--- a/_문서/_Project Entropy 기획문서.pptx
+++ b/_문서/_Project Entropy 기획문서.pptx
@@ -105,6 +105,11 @@
       </a:defRPr>
     </a:lvl9pPr>
   </p:defaultTextStyle>
+  <p:extLst>
+    <p:ext uri="{EFAFB233-063F-42B5-8137-9DF3F51BA10A}">
+      <p15:sldGuideLst xmlns:p15="http://schemas.microsoft.com/office/powerpoint/2012/main"/>
+    </p:ext>
+  </p:extLst>
 </p:presentation>
 </file>
 
@@ -255,7 +260,7 @@
           <a:p>
             <a:fld id="{DECF2A0E-2FBA-4159-9323-C233CC2AF0DB}" type="datetimeFigureOut">
               <a:rPr lang="ko-KR" altLang="en-US" smtClean="0"/>
-              <a:t>2026-07-11</a:t>
+              <a:t>2026-07-12</a:t>
             </a:fld>
             <a:endParaRPr lang="ko-KR" altLang="en-US"/>
           </a:p>
@@ -453,7 +458,7 @@
           <a:p>
             <a:fld id="{DECF2A0E-2FBA-4159-9323-C233CC2AF0DB}" type="datetimeFigureOut">
               <a:rPr lang="ko-KR" altLang="en-US" smtClean="0"/>
-              <a:t>2026-07-11</a:t>
+              <a:t>2026-07-12</a:t>
             </a:fld>
             <a:endParaRPr lang="ko-KR" altLang="en-US"/>
           </a:p>
@@ -661,7 +666,7 @@
           <a:p>
             <a:fld id="{DECF2A0E-2FBA-4159-9323-C233CC2AF0DB}" type="datetimeFigureOut">
               <a:rPr lang="ko-KR" altLang="en-US" smtClean="0"/>
-              <a:t>2026-07-11</a:t>
+              <a:t>2026-07-12</a:t>
             </a:fld>
             <a:endParaRPr lang="ko-KR" altLang="en-US"/>
           </a:p>
@@ -859,7 +864,7 @@
           <a:p>
             <a:fld id="{DECF2A0E-2FBA-4159-9323-C233CC2AF0DB}" type="datetimeFigureOut">
               <a:rPr lang="ko-KR" altLang="en-US" smtClean="0"/>
-              <a:t>2026-07-11</a:t>
+              <a:t>2026-07-12</a:t>
             </a:fld>
             <a:endParaRPr lang="ko-KR" altLang="en-US"/>
           </a:p>
@@ -1134,7 +1139,7 @@
           <a:p>
             <a:fld id="{DECF2A0E-2FBA-4159-9323-C233CC2AF0DB}" type="datetimeFigureOut">
               <a:rPr lang="ko-KR" altLang="en-US" smtClean="0"/>
-              <a:t>2026-07-11</a:t>
+              <a:t>2026-07-12</a:t>
             </a:fld>
             <a:endParaRPr lang="ko-KR" altLang="en-US"/>
           </a:p>
@@ -1399,7 +1404,7 @@
           <a:p>
             <a:fld id="{DECF2A0E-2FBA-4159-9323-C233CC2AF0DB}" type="datetimeFigureOut">
               <a:rPr lang="ko-KR" altLang="en-US" smtClean="0"/>
-              <a:t>2026-07-11</a:t>
+              <a:t>2026-07-12</a:t>
             </a:fld>
             <a:endParaRPr lang="ko-KR" altLang="en-US"/>
           </a:p>
@@ -1811,7 +1816,7 @@
           <a:p>
             <a:fld id="{DECF2A0E-2FBA-4159-9323-C233CC2AF0DB}" type="datetimeFigureOut">
               <a:rPr lang="ko-KR" altLang="en-US" smtClean="0"/>
-              <a:t>2026-07-11</a:t>
+              <a:t>2026-07-12</a:t>
             </a:fld>
             <a:endParaRPr lang="ko-KR" altLang="en-US"/>
           </a:p>
@@ -1952,7 +1957,7 @@
           <a:p>
             <a:fld id="{DECF2A0E-2FBA-4159-9323-C233CC2AF0DB}" type="datetimeFigureOut">
               <a:rPr lang="ko-KR" altLang="en-US" smtClean="0"/>
-              <a:t>2026-07-11</a:t>
+              <a:t>2026-07-12</a:t>
             </a:fld>
             <a:endParaRPr lang="ko-KR" altLang="en-US"/>
           </a:p>
@@ -2065,7 +2070,7 @@
           <a:p>
             <a:fld id="{DECF2A0E-2FBA-4159-9323-C233CC2AF0DB}" type="datetimeFigureOut">
               <a:rPr lang="ko-KR" altLang="en-US" smtClean="0"/>
-              <a:t>2026-07-11</a:t>
+              <a:t>2026-07-12</a:t>
             </a:fld>
             <a:endParaRPr lang="ko-KR" altLang="en-US"/>
           </a:p>
@@ -2376,7 +2381,7 @@
           <a:p>
             <a:fld id="{DECF2A0E-2FBA-4159-9323-C233CC2AF0DB}" type="datetimeFigureOut">
               <a:rPr lang="ko-KR" altLang="en-US" smtClean="0"/>
-              <a:t>2026-07-11</a:t>
+              <a:t>2026-07-12</a:t>
             </a:fld>
             <a:endParaRPr lang="ko-KR" altLang="en-US"/>
           </a:p>
@@ -2664,7 +2669,7 @@
           <a:p>
             <a:fld id="{DECF2A0E-2FBA-4159-9323-C233CC2AF0DB}" type="datetimeFigureOut">
               <a:rPr lang="ko-KR" altLang="en-US" smtClean="0"/>
-              <a:t>2026-07-11</a:t>
+              <a:t>2026-07-12</a:t>
             </a:fld>
             <a:endParaRPr lang="ko-KR" altLang="en-US"/>
           </a:p>
@@ -2905,7 +2910,7 @@
           <a:p>
             <a:fld id="{DECF2A0E-2FBA-4159-9323-C233CC2AF0DB}" type="datetimeFigureOut">
               <a:rPr lang="ko-KR" altLang="en-US" smtClean="0"/>
-              <a:t>2026-07-11</a:t>
+              <a:t>2026-07-12</a:t>
             </a:fld>
             <a:endParaRPr lang="ko-KR" altLang="en-US"/>
           </a:p>
@@ -3453,12 +3458,351 @@
             <p:ph idx="1"/>
           </p:nvPr>
         </p:nvSpPr>
-        <p:spPr/>
-        <p:txBody>
-          <a:bodyPr/>
-          <a:lstStyle/>
-          <a:p>
-            <a:endParaRPr lang="ko-KR" altLang="en-US"/>
+        <p:spPr>
+          <a:xfrm>
+            <a:off x="838200" y="1825624"/>
+            <a:ext cx="4106333" cy="4778375"/>
+          </a:xfrm>
+        </p:spPr>
+        <p:txBody>
+          <a:bodyPr>
+            <a:normAutofit/>
+          </a:bodyPr>
+          <a:lstStyle/>
+          <a:p>
+            <a:pPr marL="457200" indent="-457200">
+              <a:buAutoNum type="arabicPeriod"/>
+            </a:pPr>
+            <a:r>
+              <a:rPr lang="ko-KR" altLang="en-US" sz="2000" dirty="0"/>
+              <a:t>게임 개요</a:t>
+            </a:r>
+            <a:endParaRPr lang="en-US" altLang="ko-KR" sz="2000" dirty="0"/>
+          </a:p>
+          <a:p>
+            <a:pPr marL="457200" indent="-457200">
+              <a:buAutoNum type="arabicPeriod"/>
+            </a:pPr>
+            <a:r>
+              <a:rPr lang="ko-KR" altLang="en-US" sz="2000" dirty="0"/>
+              <a:t>유사 게임 분석</a:t>
+            </a:r>
+            <a:endParaRPr lang="en-US" altLang="ko-KR" sz="2000" dirty="0"/>
+          </a:p>
+          <a:p>
+            <a:pPr marL="457200" indent="-457200">
+              <a:buAutoNum type="arabicPeriod"/>
+            </a:pPr>
+            <a:r>
+              <a:rPr lang="ko-KR" altLang="en-US" sz="2000" dirty="0"/>
+              <a:t>세계관</a:t>
+            </a:r>
+            <a:endParaRPr lang="en-US" altLang="ko-KR" sz="2000" dirty="0"/>
+          </a:p>
+          <a:p>
+            <a:pPr marL="914400" lvl="1" indent="-457200">
+              <a:buAutoNum type="arabicPeriod"/>
+            </a:pPr>
+            <a:r>
+              <a:rPr lang="ko-KR" altLang="en-US" sz="1600" dirty="0"/>
+              <a:t>전체</a:t>
+            </a:r>
+            <a:r>
+              <a:rPr lang="en-US" altLang="ko-KR" sz="1600" dirty="0"/>
+              <a:t> </a:t>
+            </a:r>
+            <a:r>
+              <a:rPr lang="ko-KR" altLang="en-US" sz="1600" dirty="0"/>
+              <a:t>세계관</a:t>
+            </a:r>
+            <a:endParaRPr lang="en-US" altLang="ko-KR" sz="1600" dirty="0"/>
+          </a:p>
+          <a:p>
+            <a:pPr marL="914400" lvl="1" indent="-457200">
+              <a:buAutoNum type="arabicPeriod"/>
+            </a:pPr>
+            <a:r>
+              <a:rPr lang="ko-KR" altLang="en-US" sz="1600" dirty="0"/>
+              <a:t>스토리</a:t>
+            </a:r>
+            <a:endParaRPr lang="en-US" altLang="ko-KR" sz="1600" dirty="0"/>
+          </a:p>
+          <a:p>
+            <a:pPr marL="914400" lvl="1" indent="-457200">
+              <a:buAutoNum type="arabicPeriod"/>
+            </a:pPr>
+            <a:r>
+              <a:rPr lang="ko-KR" altLang="en-US" sz="1600" dirty="0"/>
+              <a:t>캐릭터</a:t>
+            </a:r>
+            <a:endParaRPr lang="en-US" altLang="ko-KR" sz="1600" dirty="0"/>
+          </a:p>
+          <a:p>
+            <a:pPr marL="914400" lvl="1" indent="-457200">
+              <a:buAutoNum type="arabicPeriod"/>
+            </a:pPr>
+            <a:endParaRPr lang="en-US" altLang="ko-KR" sz="1600" dirty="0"/>
+          </a:p>
+          <a:p>
+            <a:pPr marL="457200" indent="-457200">
+              <a:buAutoNum type="arabicPeriod"/>
+            </a:pPr>
+            <a:r>
+              <a:rPr lang="ko-KR" altLang="en-US" sz="2000" dirty="0"/>
+              <a:t>구조 및 형태</a:t>
+            </a:r>
+            <a:endParaRPr lang="en-US" altLang="ko-KR" sz="2000" dirty="0"/>
+          </a:p>
+          <a:p>
+            <a:pPr marL="914400" lvl="1" indent="-457200">
+              <a:buAutoNum type="arabicPeriod"/>
+            </a:pPr>
+            <a:r>
+              <a:rPr lang="en-US" altLang="ko-KR" sz="1600" dirty="0"/>
+              <a:t>Flow Chart</a:t>
+            </a:r>
+          </a:p>
+          <a:p>
+            <a:pPr marL="914400" lvl="1" indent="-457200">
+              <a:buAutoNum type="arabicPeriod"/>
+            </a:pPr>
+            <a:r>
+              <a:rPr lang="en-US" altLang="ko-KR" sz="1600" dirty="0"/>
+              <a:t>UI</a:t>
+            </a:r>
+          </a:p>
+          <a:p>
+            <a:pPr marL="914400" lvl="1" indent="-457200">
+              <a:buAutoNum type="arabicPeriod"/>
+            </a:pPr>
+            <a:r>
+              <a:rPr lang="en-US" altLang="ko-KR" sz="1600" dirty="0"/>
+              <a:t>Key Settings</a:t>
+            </a:r>
+          </a:p>
+        </p:txBody>
+      </p:sp>
+      <p:sp>
+        <p:nvSpPr>
+          <p:cNvPr id="5" name="내용 개체 틀 2">
+            <a:extLst>
+              <a:ext uri="{FF2B5EF4-FFF2-40B4-BE49-F238E27FC236}">
+                <a16:creationId xmlns:a16="http://schemas.microsoft.com/office/drawing/2014/main" id="{52728993-5CEE-3287-A44A-2D6F08A30CA4}"/>
+              </a:ext>
+            </a:extLst>
+          </p:cNvPr>
+          <p:cNvSpPr txBox="1">
+            <a:spLocks/>
+          </p:cNvSpPr>
+          <p:nvPr/>
+        </p:nvSpPr>
+        <p:spPr>
+          <a:xfrm>
+            <a:off x="4944533" y="1825624"/>
+            <a:ext cx="4106333" cy="4778375"/>
+          </a:xfrm>
+          <a:prstGeom prst="rect">
+            <a:avLst/>
+          </a:prstGeom>
+        </p:spPr>
+        <p:txBody>
+          <a:bodyPr vert="horz" lIns="91440" tIns="45720" rIns="91440" bIns="45720" rtlCol="0">
+            <a:normAutofit/>
+          </a:bodyPr>
+          <a:lstStyle>
+            <a:lvl1pPr marL="228600" indent="-228600" algn="l" defTabSz="914400" rtl="0" eaLnBrk="1" latinLnBrk="1" hangingPunct="1">
+              <a:lnSpc>
+                <a:spcPct val="90000"/>
+              </a:lnSpc>
+              <a:spcBef>
+                <a:spcPts val="1000"/>
+              </a:spcBef>
+              <a:buFont typeface="Arial" panose="020B0604020202020204" pitchFamily="34" charset="0"/>
+              <a:buChar char="•"/>
+              <a:defRPr sz="2800" kern="1200">
+                <a:solidFill>
+                  <a:schemeClr val="tx1"/>
+                </a:solidFill>
+                <a:latin typeface="+mn-lt"/>
+                <a:ea typeface="+mn-ea"/>
+                <a:cs typeface="+mn-cs"/>
+              </a:defRPr>
+            </a:lvl1pPr>
+            <a:lvl2pPr marL="685800" indent="-228600" algn="l" defTabSz="914400" rtl="0" eaLnBrk="1" latinLnBrk="1" hangingPunct="1">
+              <a:lnSpc>
+                <a:spcPct val="90000"/>
+              </a:lnSpc>
+              <a:spcBef>
+                <a:spcPts val="500"/>
+              </a:spcBef>
+              <a:buFont typeface="Arial" panose="020B0604020202020204" pitchFamily="34" charset="0"/>
+              <a:buChar char="•"/>
+              <a:defRPr sz="2400" kern="1200">
+                <a:solidFill>
+                  <a:schemeClr val="tx1"/>
+                </a:solidFill>
+                <a:latin typeface="+mn-lt"/>
+                <a:ea typeface="+mn-ea"/>
+                <a:cs typeface="+mn-cs"/>
+              </a:defRPr>
+            </a:lvl2pPr>
+            <a:lvl3pPr marL="1143000" indent="-228600" algn="l" defTabSz="914400" rtl="0" eaLnBrk="1" latinLnBrk="1" hangingPunct="1">
+              <a:lnSpc>
+                <a:spcPct val="90000"/>
+              </a:lnSpc>
+              <a:spcBef>
+                <a:spcPts val="500"/>
+              </a:spcBef>
+              <a:buFont typeface="Arial" panose="020B0604020202020204" pitchFamily="34" charset="0"/>
+              <a:buChar char="•"/>
+              <a:defRPr sz="2000" kern="1200">
+                <a:solidFill>
+                  <a:schemeClr val="tx1"/>
+                </a:solidFill>
+                <a:latin typeface="+mn-lt"/>
+                <a:ea typeface="+mn-ea"/>
+                <a:cs typeface="+mn-cs"/>
+              </a:defRPr>
+            </a:lvl3pPr>
+            <a:lvl4pPr marL="1600200" indent="-228600" algn="l" defTabSz="914400" rtl="0" eaLnBrk="1" latinLnBrk="1" hangingPunct="1">
+              <a:lnSpc>
+                <a:spcPct val="90000"/>
+              </a:lnSpc>
+              <a:spcBef>
+                <a:spcPts val="500"/>
+              </a:spcBef>
+              <a:buFont typeface="Arial" panose="020B0604020202020204" pitchFamily="34" charset="0"/>
+              <a:buChar char="•"/>
+              <a:defRPr sz="1800" kern="1200">
+                <a:solidFill>
+                  <a:schemeClr val="tx1"/>
+                </a:solidFill>
+                <a:latin typeface="+mn-lt"/>
+                <a:ea typeface="+mn-ea"/>
+                <a:cs typeface="+mn-cs"/>
+              </a:defRPr>
+            </a:lvl4pPr>
+            <a:lvl5pPr marL="2057400" indent="-228600" algn="l" defTabSz="914400" rtl="0" eaLnBrk="1" latinLnBrk="1" hangingPunct="1">
+              <a:lnSpc>
+                <a:spcPct val="90000"/>
+              </a:lnSpc>
+              <a:spcBef>
+                <a:spcPts val="500"/>
+              </a:spcBef>
+              <a:buFont typeface="Arial" panose="020B0604020202020204" pitchFamily="34" charset="0"/>
+              <a:buChar char="•"/>
+              <a:defRPr sz="1800" kern="1200">
+                <a:solidFill>
+                  <a:schemeClr val="tx1"/>
+                </a:solidFill>
+                <a:latin typeface="+mn-lt"/>
+                <a:ea typeface="+mn-ea"/>
+                <a:cs typeface="+mn-cs"/>
+              </a:defRPr>
+            </a:lvl5pPr>
+            <a:lvl6pPr marL="2514600" indent="-228600" algn="l" defTabSz="914400" rtl="0" eaLnBrk="1" latinLnBrk="1" hangingPunct="1">
+              <a:lnSpc>
+                <a:spcPct val="90000"/>
+              </a:lnSpc>
+              <a:spcBef>
+                <a:spcPts val="500"/>
+              </a:spcBef>
+              <a:buFont typeface="Arial" panose="020B0604020202020204" pitchFamily="34" charset="0"/>
+              <a:buChar char="•"/>
+              <a:defRPr sz="1800" kern="1200">
+                <a:solidFill>
+                  <a:schemeClr val="tx1"/>
+                </a:solidFill>
+                <a:latin typeface="+mn-lt"/>
+                <a:ea typeface="+mn-ea"/>
+                <a:cs typeface="+mn-cs"/>
+              </a:defRPr>
+            </a:lvl6pPr>
+            <a:lvl7pPr marL="2971800" indent="-228600" algn="l" defTabSz="914400" rtl="0" eaLnBrk="1" latinLnBrk="1" hangingPunct="1">
+              <a:lnSpc>
+                <a:spcPct val="90000"/>
+              </a:lnSpc>
+              <a:spcBef>
+                <a:spcPts val="500"/>
+              </a:spcBef>
+              <a:buFont typeface="Arial" panose="020B0604020202020204" pitchFamily="34" charset="0"/>
+              <a:buChar char="•"/>
+              <a:defRPr sz="1800" kern="1200">
+                <a:solidFill>
+                  <a:schemeClr val="tx1"/>
+                </a:solidFill>
+                <a:latin typeface="+mn-lt"/>
+                <a:ea typeface="+mn-ea"/>
+                <a:cs typeface="+mn-cs"/>
+              </a:defRPr>
+            </a:lvl7pPr>
+            <a:lvl8pPr marL="3429000" indent="-228600" algn="l" defTabSz="914400" rtl="0" eaLnBrk="1" latinLnBrk="1" hangingPunct="1">
+              <a:lnSpc>
+                <a:spcPct val="90000"/>
+              </a:lnSpc>
+              <a:spcBef>
+                <a:spcPts val="500"/>
+              </a:spcBef>
+              <a:buFont typeface="Arial" panose="020B0604020202020204" pitchFamily="34" charset="0"/>
+              <a:buChar char="•"/>
+              <a:defRPr sz="1800" kern="1200">
+                <a:solidFill>
+                  <a:schemeClr val="tx1"/>
+                </a:solidFill>
+                <a:latin typeface="+mn-lt"/>
+                <a:ea typeface="+mn-ea"/>
+                <a:cs typeface="+mn-cs"/>
+              </a:defRPr>
+            </a:lvl8pPr>
+            <a:lvl9pPr marL="3886200" indent="-228600" algn="l" defTabSz="914400" rtl="0" eaLnBrk="1" latinLnBrk="1" hangingPunct="1">
+              <a:lnSpc>
+                <a:spcPct val="90000"/>
+              </a:lnSpc>
+              <a:spcBef>
+                <a:spcPts val="500"/>
+              </a:spcBef>
+              <a:buFont typeface="Arial" panose="020B0604020202020204" pitchFamily="34" charset="0"/>
+              <a:buChar char="•"/>
+              <a:defRPr sz="1800" kern="1200">
+                <a:solidFill>
+                  <a:schemeClr val="tx1"/>
+                </a:solidFill>
+                <a:latin typeface="+mn-lt"/>
+                <a:ea typeface="+mn-ea"/>
+                <a:cs typeface="+mn-cs"/>
+              </a:defRPr>
+            </a:lvl9pPr>
+          </a:lstStyle>
+          <a:p>
+            <a:pPr marL="0" indent="0">
+              <a:buNone/>
+            </a:pPr>
+            <a:r>
+              <a:rPr lang="en-US" altLang="ko-KR" sz="2000" dirty="0"/>
+              <a:t>5.   Game System</a:t>
+            </a:r>
+          </a:p>
+          <a:p>
+            <a:pPr marL="914400" lvl="1" indent="-457200">
+              <a:buFont typeface="Arial" panose="020B0604020202020204" pitchFamily="34" charset="0"/>
+              <a:buAutoNum type="arabicPeriod"/>
+            </a:pPr>
+            <a:r>
+              <a:rPr lang="ko-KR" altLang="en-US" sz="1600" dirty="0"/>
+              <a:t>기본 룰</a:t>
+            </a:r>
+            <a:endParaRPr lang="en-US" altLang="ko-KR" sz="1600" dirty="0"/>
+          </a:p>
+          <a:p>
+            <a:pPr marL="914400" lvl="1" indent="-457200">
+              <a:buFont typeface="Arial" panose="020B0604020202020204" pitchFamily="34" charset="0"/>
+              <a:buAutoNum type="arabicPeriod"/>
+            </a:pPr>
+            <a:r>
+              <a:rPr lang="ko-KR" altLang="en-US" sz="1600" dirty="0"/>
+              <a:t>스테이지 구성</a:t>
+            </a:r>
+            <a:endParaRPr lang="en-US" altLang="ko-KR" sz="1600" dirty="0"/>
           </a:p>
         </p:txBody>
       </p:sp>

--- a/_문서/_Project Entropy 기획문서.pptx
+++ b/_문서/_Project Entropy 기획문서.pptx
@@ -7,6 +7,14 @@
   <p:sldIdLst>
     <p:sldId id="256" r:id="rId2"/>
     <p:sldId id="257" r:id="rId3"/>
+    <p:sldId id="258" r:id="rId4"/>
+    <p:sldId id="259" r:id="rId5"/>
+    <p:sldId id="260" r:id="rId6"/>
+    <p:sldId id="261" r:id="rId7"/>
+    <p:sldId id="262" r:id="rId8"/>
+    <p:sldId id="263" r:id="rId9"/>
+    <p:sldId id="265" r:id="rId10"/>
+    <p:sldId id="266" r:id="rId11"/>
   </p:sldIdLst>
   <p:sldSz cx="12192000" cy="6858000"/>
   <p:notesSz cx="6858000" cy="9144000"/>
@@ -3379,7 +3387,7 @@
           <a:p>
             <a:r>
               <a:rPr lang="ko-KR" altLang="en-US" dirty="0"/>
-              <a:t>부제목 미정</a:t>
+              <a:t>혼돈의 세계</a:t>
             </a:r>
           </a:p>
         </p:txBody>
@@ -3388,6 +3396,267 @@
     <p:extLst>
       <p:ext uri="{BB962C8B-B14F-4D97-AF65-F5344CB8AC3E}">
         <p14:creationId xmlns:p14="http://schemas.microsoft.com/office/powerpoint/2010/main" val="3583707741"/>
+      </p:ext>
+    </p:extLst>
+  </p:cSld>
+  <p:clrMapOvr>
+    <a:masterClrMapping/>
+  </p:clrMapOvr>
+</p:sld>
+</file>
+
+<file path=ppt/slides/slide10.xml><?xml version="1.0" encoding="utf-8"?>
+<p:sld xmlns:a="http://schemas.openxmlformats.org/drawingml/2006/main" xmlns:r="http://schemas.openxmlformats.org/officeDocument/2006/relationships" xmlns:p="http://schemas.openxmlformats.org/presentationml/2006/main">
+  <p:cSld>
+    <p:spTree>
+      <p:nvGrpSpPr>
+        <p:cNvPr id="1" name="">
+          <a:extLst>
+            <a:ext uri="{FF2B5EF4-FFF2-40B4-BE49-F238E27FC236}">
+              <a16:creationId xmlns:a16="http://schemas.microsoft.com/office/drawing/2014/main" id="{F041DA2F-DDF1-DD37-D1F6-16585036CB16}"/>
+            </a:ext>
+          </a:extLst>
+        </p:cNvPr>
+        <p:cNvGrpSpPr/>
+        <p:nvPr/>
+      </p:nvGrpSpPr>
+      <p:grpSpPr>
+        <a:xfrm>
+          <a:off x="0" y="0"/>
+          <a:ext cx="0" cy="0"/>
+          <a:chOff x="0" y="0"/>
+          <a:chExt cx="0" cy="0"/>
+        </a:xfrm>
+      </p:grpSpPr>
+      <p:sp>
+        <p:nvSpPr>
+          <p:cNvPr id="2" name="제목 1">
+            <a:extLst>
+              <a:ext uri="{FF2B5EF4-FFF2-40B4-BE49-F238E27FC236}">
+                <a16:creationId xmlns:a16="http://schemas.microsoft.com/office/drawing/2014/main" id="{309EA54C-C486-19BF-D447-A8896F36B556}"/>
+              </a:ext>
+            </a:extLst>
+          </p:cNvPr>
+          <p:cNvSpPr>
+            <a:spLocks noGrp="1"/>
+          </p:cNvSpPr>
+          <p:nvPr>
+            <p:ph type="title"/>
+          </p:nvPr>
+        </p:nvSpPr>
+        <p:spPr/>
+        <p:txBody>
+          <a:bodyPr/>
+          <a:lstStyle/>
+          <a:p>
+            <a:r>
+              <a:rPr lang="en-US" altLang="ko-KR" dirty="0"/>
+              <a:t>4.1. Flow Chart</a:t>
+            </a:r>
+            <a:endParaRPr lang="ko-KR" altLang="en-US" dirty="0"/>
+          </a:p>
+        </p:txBody>
+      </p:sp>
+      <p:sp>
+        <p:nvSpPr>
+          <p:cNvPr id="3" name="내용 개체 틀 2">
+            <a:extLst>
+              <a:ext uri="{FF2B5EF4-FFF2-40B4-BE49-F238E27FC236}">
+                <a16:creationId xmlns:a16="http://schemas.microsoft.com/office/drawing/2014/main" id="{A3EDD2DE-C1A2-A75B-D7E7-FB44BD294FE1}"/>
+              </a:ext>
+            </a:extLst>
+          </p:cNvPr>
+          <p:cNvSpPr>
+            <a:spLocks noGrp="1"/>
+          </p:cNvSpPr>
+          <p:nvPr>
+            <p:ph idx="1"/>
+          </p:nvPr>
+        </p:nvSpPr>
+        <p:spPr/>
+        <p:txBody>
+          <a:bodyPr>
+            <a:normAutofit/>
+          </a:bodyPr>
+          <a:lstStyle/>
+          <a:p>
+            <a:pPr>
+              <a:lnSpc>
+                <a:spcPct val="150000"/>
+              </a:lnSpc>
+            </a:pPr>
+            <a:r>
+              <a:rPr lang="ko-KR" altLang="en-US" sz="2000" dirty="0"/>
+              <a:t>진행 흐름</a:t>
+            </a:r>
+            <a:endParaRPr lang="en-US" altLang="ko-KR" sz="2000" dirty="0"/>
+          </a:p>
+          <a:p>
+            <a:pPr lvl="1">
+              <a:lnSpc>
+                <a:spcPct val="150000"/>
+              </a:lnSpc>
+            </a:pPr>
+            <a:r>
+              <a:rPr lang="ko-KR" altLang="en-US" sz="1400" dirty="0"/>
+              <a:t>기지 </a:t>
+            </a:r>
+            <a:r>
+              <a:rPr lang="en-US" altLang="ko-KR" sz="1400" dirty="0"/>
+              <a:t>– </a:t>
+            </a:r>
+            <a:r>
+              <a:rPr lang="ko-KR" altLang="en-US" sz="1400" dirty="0"/>
+              <a:t>로그라이크 식 업그레이드 </a:t>
+            </a:r>
+            <a:r>
+              <a:rPr lang="en-US" altLang="ko-KR" sz="1400" dirty="0"/>
+              <a:t>(</a:t>
+            </a:r>
+            <a:r>
+              <a:rPr lang="ko-KR" altLang="en-US" sz="1400" dirty="0"/>
+              <a:t>라이프베슬</a:t>
+            </a:r>
+            <a:r>
+              <a:rPr lang="en-US" altLang="ko-KR" sz="1400" dirty="0"/>
+              <a:t>)</a:t>
+            </a:r>
+          </a:p>
+          <a:p>
+            <a:pPr lvl="1">
+              <a:lnSpc>
+                <a:spcPct val="150000"/>
+              </a:lnSpc>
+            </a:pPr>
+            <a:r>
+              <a:rPr lang="ko-KR" altLang="en-US" sz="1400" dirty="0"/>
+              <a:t>스테이지 노드 이동</a:t>
+            </a:r>
+            <a:endParaRPr lang="en-US" altLang="ko-KR" sz="1400" dirty="0"/>
+          </a:p>
+          <a:p>
+            <a:pPr lvl="1">
+              <a:lnSpc>
+                <a:spcPct val="150000"/>
+              </a:lnSpc>
+            </a:pPr>
+            <a:r>
+              <a:rPr lang="ko-KR" altLang="en-US" sz="1400" dirty="0"/>
+              <a:t>이벤트</a:t>
+            </a:r>
+            <a:r>
+              <a:rPr lang="en-US" altLang="ko-KR" sz="1400" dirty="0"/>
+              <a:t>/</a:t>
+            </a:r>
+            <a:r>
+              <a:rPr lang="ko-KR" altLang="en-US" sz="1400" dirty="0"/>
+              <a:t>상점</a:t>
+            </a:r>
+            <a:r>
+              <a:rPr lang="en-US" altLang="ko-KR" sz="1400" dirty="0"/>
+              <a:t>/</a:t>
+            </a:r>
+            <a:r>
+              <a:rPr lang="ko-KR" altLang="en-US" sz="1400" dirty="0"/>
+              <a:t>전투</a:t>
+            </a:r>
+            <a:endParaRPr lang="en-US" altLang="ko-KR" sz="1400" dirty="0"/>
+          </a:p>
+          <a:p>
+            <a:pPr lvl="1">
+              <a:lnSpc>
+                <a:spcPct val="150000"/>
+              </a:lnSpc>
+            </a:pPr>
+            <a:r>
+              <a:rPr lang="ko-KR" altLang="en-US" sz="1400" dirty="0" err="1"/>
+              <a:t>보스전</a:t>
+            </a:r>
+            <a:endParaRPr lang="en-US" altLang="ko-KR" sz="1400" dirty="0"/>
+          </a:p>
+          <a:p>
+            <a:pPr marL="0" indent="0">
+              <a:lnSpc>
+                <a:spcPct val="150000"/>
+              </a:lnSpc>
+              <a:buNone/>
+            </a:pPr>
+            <a:endParaRPr lang="en-US" altLang="ko-KR" sz="2000" dirty="0"/>
+          </a:p>
+          <a:p>
+            <a:pPr>
+              <a:lnSpc>
+                <a:spcPct val="150000"/>
+              </a:lnSpc>
+            </a:pPr>
+            <a:r>
+              <a:rPr lang="ko-KR" altLang="en-US" sz="2000" dirty="0"/>
+              <a:t>스테이지 구성</a:t>
+            </a:r>
+            <a:endParaRPr lang="en-US" altLang="ko-KR" sz="2000" dirty="0"/>
+          </a:p>
+          <a:p>
+            <a:pPr lvl="1">
+              <a:lnSpc>
+                <a:spcPct val="150000"/>
+              </a:lnSpc>
+            </a:pPr>
+            <a:r>
+              <a:rPr lang="ko-KR" altLang="en-US" sz="1400" dirty="0"/>
+              <a:t>초원</a:t>
+            </a:r>
+            <a:r>
+              <a:rPr lang="en-US" altLang="ko-KR" sz="1400" dirty="0"/>
+              <a:t> / </a:t>
+            </a:r>
+            <a:r>
+              <a:rPr lang="ko-KR" altLang="en-US" sz="1400" dirty="0"/>
+              <a:t>외곽</a:t>
+            </a:r>
+            <a:r>
+              <a:rPr lang="en-US" altLang="ko-KR" sz="1400" dirty="0"/>
+              <a:t> / </a:t>
+            </a:r>
+            <a:r>
+              <a:rPr lang="ko-KR" altLang="en-US" sz="1400" dirty="0"/>
+              <a:t>성도</a:t>
+            </a:r>
+            <a:r>
+              <a:rPr lang="en-US" altLang="ko-KR" sz="1400" dirty="0"/>
+              <a:t> / </a:t>
+            </a:r>
+            <a:r>
+              <a:rPr lang="ko-KR" altLang="en-US" sz="1400" dirty="0"/>
+              <a:t>왕궁</a:t>
+            </a:r>
+            <a:r>
+              <a:rPr lang="en-US" altLang="ko-KR" sz="1400" dirty="0"/>
+              <a:t> / </a:t>
+            </a:r>
+            <a:r>
+              <a:rPr lang="ko-KR" altLang="en-US" sz="1400" dirty="0"/>
+              <a:t>지하</a:t>
+            </a:r>
+            <a:endParaRPr lang="en-US" altLang="ko-KR" sz="1400" dirty="0"/>
+          </a:p>
+          <a:p>
+            <a:pPr lvl="1">
+              <a:lnSpc>
+                <a:spcPct val="150000"/>
+              </a:lnSpc>
+            </a:pPr>
+            <a:r>
+              <a:rPr lang="ko-KR" altLang="en-US" sz="1400" dirty="0"/>
+              <a:t>지하는 일반 막보다도 적은 노드와 최종 보스로 구성</a:t>
+            </a:r>
+            <a:endParaRPr lang="en-US" altLang="ko-KR" sz="1400" dirty="0"/>
+          </a:p>
+        </p:txBody>
+      </p:sp>
+    </p:spTree>
+    <p:extLst>
+      <p:ext uri="{BB962C8B-B14F-4D97-AF65-F5344CB8AC3E}">
+        <p14:creationId xmlns:p14="http://schemas.microsoft.com/office/powerpoint/2010/main" val="3193409258"/>
       </p:ext>
     </p:extLst>
   </p:cSld>
@@ -3460,8 +3729,8 @@
         </p:nvSpPr>
         <p:spPr>
           <a:xfrm>
-            <a:off x="838200" y="1825624"/>
-            <a:ext cx="4106333" cy="4778375"/>
+            <a:off x="838200" y="1825625"/>
+            <a:ext cx="4106333" cy="5032376"/>
           </a:xfrm>
         </p:spPr>
         <p:txBody>
@@ -3471,6 +3740,9 @@
           <a:lstStyle/>
           <a:p>
             <a:pPr marL="457200" indent="-457200">
+              <a:lnSpc>
+                <a:spcPct val="150000"/>
+              </a:lnSpc>
               <a:buAutoNum type="arabicPeriod"/>
             </a:pPr>
             <a:r>
@@ -3481,6 +3753,9 @@
           </a:p>
           <a:p>
             <a:pPr marL="457200" indent="-457200">
+              <a:lnSpc>
+                <a:spcPct val="150000"/>
+              </a:lnSpc>
               <a:buAutoNum type="arabicPeriod"/>
             </a:pPr>
             <a:r>
@@ -3491,6 +3766,9 @@
           </a:p>
           <a:p>
             <a:pPr marL="457200" indent="-457200">
+              <a:lnSpc>
+                <a:spcPct val="150000"/>
+              </a:lnSpc>
               <a:buAutoNum type="arabicPeriod"/>
             </a:pPr>
             <a:r>
@@ -3501,6 +3779,9 @@
           </a:p>
           <a:p>
             <a:pPr marL="914400" lvl="1" indent="-457200">
+              <a:lnSpc>
+                <a:spcPct val="150000"/>
+              </a:lnSpc>
               <a:buAutoNum type="arabicPeriod"/>
             </a:pPr>
             <a:r>
@@ -3519,6 +3800,9 @@
           </a:p>
           <a:p>
             <a:pPr marL="914400" lvl="1" indent="-457200">
+              <a:lnSpc>
+                <a:spcPct val="150000"/>
+              </a:lnSpc>
               <a:buAutoNum type="arabicPeriod"/>
             </a:pPr>
             <a:r>
@@ -3529,6 +3813,9 @@
           </a:p>
           <a:p>
             <a:pPr marL="914400" lvl="1" indent="-457200">
+              <a:lnSpc>
+                <a:spcPct val="150000"/>
+              </a:lnSpc>
               <a:buAutoNum type="arabicPeriod"/>
             </a:pPr>
             <a:r>
@@ -3538,41 +3825,47 @@
             <a:endParaRPr lang="en-US" altLang="ko-KR" sz="1600" dirty="0"/>
           </a:p>
           <a:p>
-            <a:pPr marL="914400" lvl="1" indent="-457200">
+            <a:pPr marL="457200" indent="-457200">
+              <a:lnSpc>
+                <a:spcPct val="150000"/>
+              </a:lnSpc>
               <a:buAutoNum type="arabicPeriod"/>
             </a:pPr>
-            <a:endParaRPr lang="en-US" altLang="ko-KR" sz="1600" dirty="0"/>
-          </a:p>
-          <a:p>
-            <a:pPr marL="457200" indent="-457200">
+            <a:r>
+              <a:rPr lang="ko-KR" altLang="en-US" sz="2000" dirty="0"/>
+              <a:t>구조 및 형태</a:t>
+            </a:r>
+            <a:endParaRPr lang="en-US" altLang="ko-KR" sz="2000" dirty="0"/>
+          </a:p>
+          <a:p>
+            <a:pPr marL="914400" lvl="1" indent="-457200">
+              <a:lnSpc>
+                <a:spcPct val="150000"/>
+              </a:lnSpc>
               <a:buAutoNum type="arabicPeriod"/>
             </a:pPr>
             <a:r>
-              <a:rPr lang="ko-KR" altLang="en-US" sz="2000" dirty="0"/>
-              <a:t>구조 및 형태</a:t>
-            </a:r>
-            <a:endParaRPr lang="en-US" altLang="ko-KR" sz="2000" dirty="0"/>
+              <a:rPr lang="en-US" altLang="ko-KR" sz="1600" dirty="0"/>
+              <a:t>Flow Chart</a:t>
+            </a:r>
           </a:p>
           <a:p>
             <a:pPr marL="914400" lvl="1" indent="-457200">
+              <a:lnSpc>
+                <a:spcPct val="150000"/>
+              </a:lnSpc>
               <a:buAutoNum type="arabicPeriod"/>
             </a:pPr>
             <a:r>
               <a:rPr lang="en-US" altLang="ko-KR" sz="1600" dirty="0"/>
-              <a:t>Flow Chart</a:t>
+              <a:t>UI</a:t>
             </a:r>
           </a:p>
           <a:p>
             <a:pPr marL="914400" lvl="1" indent="-457200">
-              <a:buAutoNum type="arabicPeriod"/>
-            </a:pPr>
-            <a:r>
-              <a:rPr lang="en-US" altLang="ko-KR" sz="1600" dirty="0"/>
-              <a:t>UI</a:t>
-            </a:r>
-          </a:p>
-          <a:p>
-            <a:pPr marL="914400" lvl="1" indent="-457200">
+              <a:lnSpc>
+                <a:spcPct val="150000"/>
+              </a:lnSpc>
               <a:buAutoNum type="arabicPeriod"/>
             </a:pPr>
             <a:r>
@@ -3599,7 +3892,7 @@
         <p:spPr>
           <a:xfrm>
             <a:off x="4944533" y="1825624"/>
-            <a:ext cx="4106333" cy="4778375"/>
+            <a:ext cx="4106333" cy="5032376"/>
           </a:xfrm>
           <a:prstGeom prst="rect">
             <a:avLst/>
@@ -3775,6 +4068,9 @@
           </a:lstStyle>
           <a:p>
             <a:pPr marL="0" indent="0">
+              <a:lnSpc>
+                <a:spcPct val="150000"/>
+              </a:lnSpc>
               <a:buNone/>
             </a:pPr>
             <a:r>
@@ -3784,6 +4080,9 @@
           </a:p>
           <a:p>
             <a:pPr marL="914400" lvl="1" indent="-457200">
+              <a:lnSpc>
+                <a:spcPct val="150000"/>
+              </a:lnSpc>
               <a:buFont typeface="Arial" panose="020B0604020202020204" pitchFamily="34" charset="0"/>
               <a:buAutoNum type="arabicPeriod"/>
             </a:pPr>
@@ -3795,6 +4094,9 @@
           </a:p>
           <a:p>
             <a:pPr marL="914400" lvl="1" indent="-457200">
+              <a:lnSpc>
+                <a:spcPct val="150000"/>
+              </a:lnSpc>
               <a:buFont typeface="Arial" panose="020B0604020202020204" pitchFamily="34" charset="0"/>
               <a:buAutoNum type="arabicPeriod"/>
             </a:pPr>
@@ -3810,6 +4112,1434 @@
     <p:extLst>
       <p:ext uri="{BB962C8B-B14F-4D97-AF65-F5344CB8AC3E}">
         <p14:creationId xmlns:p14="http://schemas.microsoft.com/office/powerpoint/2010/main" val="3758008093"/>
+      </p:ext>
+    </p:extLst>
+  </p:cSld>
+  <p:clrMapOvr>
+    <a:masterClrMapping/>
+  </p:clrMapOvr>
+</p:sld>
+</file>
+
+<file path=ppt/slides/slide3.xml><?xml version="1.0" encoding="utf-8"?>
+<p:sld xmlns:a="http://schemas.openxmlformats.org/drawingml/2006/main" xmlns:r="http://schemas.openxmlformats.org/officeDocument/2006/relationships" xmlns:p="http://schemas.openxmlformats.org/presentationml/2006/main">
+  <p:cSld>
+    <p:spTree>
+      <p:nvGrpSpPr>
+        <p:cNvPr id="1" name=""/>
+        <p:cNvGrpSpPr/>
+        <p:nvPr/>
+      </p:nvGrpSpPr>
+      <p:grpSpPr>
+        <a:xfrm>
+          <a:off x="0" y="0"/>
+          <a:ext cx="0" cy="0"/>
+          <a:chOff x="0" y="0"/>
+          <a:chExt cx="0" cy="0"/>
+        </a:xfrm>
+      </p:grpSpPr>
+      <p:sp>
+        <p:nvSpPr>
+          <p:cNvPr id="2" name="제목 1">
+            <a:extLst>
+              <a:ext uri="{FF2B5EF4-FFF2-40B4-BE49-F238E27FC236}">
+                <a16:creationId xmlns:a16="http://schemas.microsoft.com/office/drawing/2014/main" id="{BB1733E4-8118-4A3B-6B8F-49AC3E621CF0}"/>
+              </a:ext>
+            </a:extLst>
+          </p:cNvPr>
+          <p:cNvSpPr>
+            <a:spLocks noGrp="1"/>
+          </p:cNvSpPr>
+          <p:nvPr>
+            <p:ph type="title"/>
+          </p:nvPr>
+        </p:nvSpPr>
+        <p:spPr/>
+        <p:txBody>
+          <a:bodyPr/>
+          <a:lstStyle/>
+          <a:p>
+            <a:r>
+              <a:rPr lang="en-US" altLang="ko-KR" dirty="0"/>
+              <a:t>1. </a:t>
+            </a:r>
+            <a:r>
+              <a:rPr lang="ko-KR" altLang="en-US" dirty="0"/>
+              <a:t>게임 개요</a:t>
+            </a:r>
+          </a:p>
+        </p:txBody>
+      </p:sp>
+      <p:sp>
+        <p:nvSpPr>
+          <p:cNvPr id="3" name="내용 개체 틀 2">
+            <a:extLst>
+              <a:ext uri="{FF2B5EF4-FFF2-40B4-BE49-F238E27FC236}">
+                <a16:creationId xmlns:a16="http://schemas.microsoft.com/office/drawing/2014/main" id="{42F474D3-4B81-7B98-8B17-B1AE4BDB2929}"/>
+              </a:ext>
+            </a:extLst>
+          </p:cNvPr>
+          <p:cNvSpPr>
+            <a:spLocks noGrp="1"/>
+          </p:cNvSpPr>
+          <p:nvPr>
+            <p:ph idx="1"/>
+          </p:nvPr>
+        </p:nvSpPr>
+        <p:spPr/>
+        <p:txBody>
+          <a:bodyPr>
+            <a:normAutofit/>
+          </a:bodyPr>
+          <a:lstStyle/>
+          <a:p>
+            <a:pPr>
+              <a:lnSpc>
+                <a:spcPct val="100000"/>
+              </a:lnSpc>
+            </a:pPr>
+            <a:r>
+              <a:rPr lang="ko-KR" altLang="en-US" sz="2000" b="1" dirty="0"/>
+              <a:t>장르</a:t>
+            </a:r>
+            <a:r>
+              <a:rPr lang="en-US" altLang="ko-KR" sz="2000" b="1" dirty="0"/>
+              <a:t>: </a:t>
+            </a:r>
+            <a:r>
+              <a:rPr lang="ko-KR" altLang="en-US" sz="2000" dirty="0"/>
+              <a:t>턴제</a:t>
+            </a:r>
+            <a:r>
+              <a:rPr lang="en-US" altLang="ko-KR" sz="2000" dirty="0"/>
+              <a:t>, </a:t>
+            </a:r>
+            <a:r>
+              <a:rPr lang="ko-KR" altLang="en-US" sz="2000" dirty="0"/>
+              <a:t>카드게임</a:t>
+            </a:r>
+            <a:r>
+              <a:rPr lang="en-US" altLang="ko-KR" sz="2000" dirty="0"/>
+              <a:t>, </a:t>
+            </a:r>
+            <a:r>
+              <a:rPr lang="ko-KR" altLang="en-US" sz="2000" dirty="0"/>
+              <a:t>체스</a:t>
+            </a:r>
+            <a:r>
+              <a:rPr lang="en-US" altLang="ko-KR" sz="2000" dirty="0"/>
+              <a:t>, </a:t>
+            </a:r>
+            <a:r>
+              <a:rPr lang="ko-KR" altLang="en-US" sz="2000" dirty="0"/>
+              <a:t>그리드</a:t>
+            </a:r>
+            <a:r>
+              <a:rPr lang="en-US" altLang="ko-KR" sz="2000" dirty="0"/>
+              <a:t>(</a:t>
+            </a:r>
+            <a:r>
+              <a:rPr lang="ko-KR" altLang="en-US" sz="2000" dirty="0"/>
+              <a:t>배열</a:t>
+            </a:r>
+            <a:r>
+              <a:rPr lang="en-US" altLang="ko-KR" sz="2000" dirty="0"/>
+              <a:t>), </a:t>
+            </a:r>
+            <a:r>
+              <a:rPr lang="ko-KR" altLang="en-US" sz="2000" dirty="0"/>
+              <a:t>덱빌딩 로그라이크</a:t>
+            </a:r>
+            <a:endParaRPr lang="en-US" altLang="ko-KR" sz="2000" dirty="0"/>
+          </a:p>
+          <a:p>
+            <a:pPr>
+              <a:lnSpc>
+                <a:spcPct val="100000"/>
+              </a:lnSpc>
+            </a:pPr>
+            <a:endParaRPr lang="en-US" altLang="ko-KR" sz="2000" dirty="0"/>
+          </a:p>
+          <a:p>
+            <a:pPr>
+              <a:lnSpc>
+                <a:spcPct val="100000"/>
+              </a:lnSpc>
+            </a:pPr>
+            <a:r>
+              <a:rPr lang="ko-KR" altLang="en-US" sz="2000" b="1" dirty="0"/>
+              <a:t>핵심 플레이 타임</a:t>
+            </a:r>
+            <a:r>
+              <a:rPr lang="en-US" altLang="ko-KR" sz="2000" b="1" dirty="0"/>
+              <a:t>: </a:t>
+            </a:r>
+            <a:r>
+              <a:rPr lang="ko-KR" altLang="en-US" sz="2000" dirty="0"/>
+              <a:t>한 판당 </a:t>
+            </a:r>
+            <a:r>
+              <a:rPr lang="en-US" altLang="ko-KR" sz="2000" dirty="0">
+                <a:solidFill>
+                  <a:srgbClr val="FF0000"/>
+                </a:solidFill>
+              </a:rPr>
+              <a:t>1</a:t>
+            </a:r>
+            <a:r>
+              <a:rPr lang="ko-KR" altLang="en-US" sz="2000" dirty="0">
+                <a:solidFill>
+                  <a:srgbClr val="FF0000"/>
+                </a:solidFill>
+              </a:rPr>
+              <a:t>시간 </a:t>
+            </a:r>
+            <a:r>
+              <a:rPr lang="ko-KR" altLang="en-US" sz="2000" dirty="0"/>
+              <a:t>내외의 세션으로 구성</a:t>
+            </a:r>
+          </a:p>
+        </p:txBody>
+      </p:sp>
+    </p:spTree>
+    <p:extLst>
+      <p:ext uri="{BB962C8B-B14F-4D97-AF65-F5344CB8AC3E}">
+        <p14:creationId xmlns:p14="http://schemas.microsoft.com/office/powerpoint/2010/main" val="3650617638"/>
+      </p:ext>
+    </p:extLst>
+  </p:cSld>
+  <p:clrMapOvr>
+    <a:masterClrMapping/>
+  </p:clrMapOvr>
+</p:sld>
+</file>
+
+<file path=ppt/slides/slide4.xml><?xml version="1.0" encoding="utf-8"?>
+<p:sld xmlns:a="http://schemas.openxmlformats.org/drawingml/2006/main" xmlns:r="http://schemas.openxmlformats.org/officeDocument/2006/relationships" xmlns:p="http://schemas.openxmlformats.org/presentationml/2006/main">
+  <p:cSld>
+    <p:spTree>
+      <p:nvGrpSpPr>
+        <p:cNvPr id="1" name="">
+          <a:extLst>
+            <a:ext uri="{FF2B5EF4-FFF2-40B4-BE49-F238E27FC236}">
+              <a16:creationId xmlns:a16="http://schemas.microsoft.com/office/drawing/2014/main" id="{F8BCE99A-2C86-E915-4A1D-5556F5D9D18F}"/>
+            </a:ext>
+          </a:extLst>
+        </p:cNvPr>
+        <p:cNvGrpSpPr/>
+        <p:nvPr/>
+      </p:nvGrpSpPr>
+      <p:grpSpPr>
+        <a:xfrm>
+          <a:off x="0" y="0"/>
+          <a:ext cx="0" cy="0"/>
+          <a:chOff x="0" y="0"/>
+          <a:chExt cx="0" cy="0"/>
+        </a:xfrm>
+      </p:grpSpPr>
+      <p:sp>
+        <p:nvSpPr>
+          <p:cNvPr id="2" name="제목 1">
+            <a:extLst>
+              <a:ext uri="{FF2B5EF4-FFF2-40B4-BE49-F238E27FC236}">
+                <a16:creationId xmlns:a16="http://schemas.microsoft.com/office/drawing/2014/main" id="{14E0D69E-C5C7-4D89-00A4-1060D72BAFCD}"/>
+              </a:ext>
+            </a:extLst>
+          </p:cNvPr>
+          <p:cNvSpPr>
+            <a:spLocks noGrp="1"/>
+          </p:cNvSpPr>
+          <p:nvPr>
+            <p:ph type="title"/>
+          </p:nvPr>
+        </p:nvSpPr>
+        <p:spPr/>
+        <p:txBody>
+          <a:bodyPr/>
+          <a:lstStyle/>
+          <a:p>
+            <a:r>
+              <a:rPr lang="en-US" altLang="ko-KR" dirty="0"/>
+              <a:t>2. </a:t>
+            </a:r>
+            <a:r>
+              <a:rPr lang="ko-KR" altLang="en-US" dirty="0"/>
+              <a:t>유사 게임 분석</a:t>
+            </a:r>
+          </a:p>
+        </p:txBody>
+      </p:sp>
+      <p:sp>
+        <p:nvSpPr>
+          <p:cNvPr id="3" name="내용 개체 틀 2">
+            <a:extLst>
+              <a:ext uri="{FF2B5EF4-FFF2-40B4-BE49-F238E27FC236}">
+                <a16:creationId xmlns:a16="http://schemas.microsoft.com/office/drawing/2014/main" id="{6D752AC1-7357-E12A-DF91-010F8CA72E51}"/>
+              </a:ext>
+            </a:extLst>
+          </p:cNvPr>
+          <p:cNvSpPr>
+            <a:spLocks noGrp="1"/>
+          </p:cNvSpPr>
+          <p:nvPr>
+            <p:ph idx="1"/>
+          </p:nvPr>
+        </p:nvSpPr>
+        <p:spPr/>
+        <p:txBody>
+          <a:bodyPr>
+            <a:normAutofit/>
+          </a:bodyPr>
+          <a:lstStyle/>
+          <a:p>
+            <a:pPr>
+              <a:lnSpc>
+                <a:spcPct val="100000"/>
+              </a:lnSpc>
+            </a:pPr>
+            <a:r>
+              <a:rPr lang="en-US" altLang="ko-KR" sz="2000" b="1" dirty="0"/>
+              <a:t>Slay the Spire: </a:t>
+            </a:r>
+            <a:r>
+              <a:rPr lang="ko-KR" altLang="en-US" sz="2000" dirty="0"/>
+              <a:t>스테이지 이동 시 노드를 선택하여 진행하는 맵 이동 방식 차용</a:t>
+            </a:r>
+            <a:endParaRPr lang="en-US" altLang="ko-KR" sz="2000" dirty="0"/>
+          </a:p>
+          <a:p>
+            <a:pPr marL="0" indent="0">
+              <a:lnSpc>
+                <a:spcPct val="100000"/>
+              </a:lnSpc>
+              <a:buNone/>
+            </a:pPr>
+            <a:endParaRPr lang="en-US" altLang="ko-KR" sz="2000" dirty="0"/>
+          </a:p>
+          <a:p>
+            <a:pPr>
+              <a:lnSpc>
+                <a:spcPct val="100000"/>
+              </a:lnSpc>
+            </a:pPr>
+            <a:r>
+              <a:rPr lang="en-US" altLang="ko-KR" sz="2000" b="1" dirty="0" err="1"/>
+              <a:t>Noita</a:t>
+            </a:r>
+            <a:r>
+              <a:rPr lang="en-US" altLang="ko-KR" sz="2000" b="1" dirty="0"/>
+              <a:t>: </a:t>
+            </a:r>
+            <a:r>
+              <a:rPr lang="ko-KR" altLang="en-US" sz="2000" dirty="0"/>
+              <a:t>상점에서 신이 무작위 아이템을 </a:t>
+            </a:r>
+            <a:r>
+              <a:rPr lang="ko-KR" altLang="en-US" sz="2000" dirty="0" err="1"/>
+              <a:t>스폰해주고</a:t>
+            </a:r>
+            <a:r>
+              <a:rPr lang="ko-KR" altLang="en-US" sz="2000" dirty="0"/>
+              <a:t> 제물을 바치는 컨셉 차용</a:t>
+            </a:r>
+          </a:p>
+        </p:txBody>
+      </p:sp>
+    </p:spTree>
+    <p:extLst>
+      <p:ext uri="{BB962C8B-B14F-4D97-AF65-F5344CB8AC3E}">
+        <p14:creationId xmlns:p14="http://schemas.microsoft.com/office/powerpoint/2010/main" val="2220040866"/>
+      </p:ext>
+    </p:extLst>
+  </p:cSld>
+  <p:clrMapOvr>
+    <a:masterClrMapping/>
+  </p:clrMapOvr>
+</p:sld>
+</file>
+
+<file path=ppt/slides/slide5.xml><?xml version="1.0" encoding="utf-8"?>
+<p:sld xmlns:a="http://schemas.openxmlformats.org/drawingml/2006/main" xmlns:r="http://schemas.openxmlformats.org/officeDocument/2006/relationships" xmlns:p="http://schemas.openxmlformats.org/presentationml/2006/main">
+  <p:cSld>
+    <p:spTree>
+      <p:nvGrpSpPr>
+        <p:cNvPr id="1" name="">
+          <a:extLst>
+            <a:ext uri="{FF2B5EF4-FFF2-40B4-BE49-F238E27FC236}">
+              <a16:creationId xmlns:a16="http://schemas.microsoft.com/office/drawing/2014/main" id="{5C0D8F25-67A5-54FF-E404-71DC8F3E8897}"/>
+            </a:ext>
+          </a:extLst>
+        </p:cNvPr>
+        <p:cNvGrpSpPr/>
+        <p:nvPr/>
+      </p:nvGrpSpPr>
+      <p:grpSpPr>
+        <a:xfrm>
+          <a:off x="0" y="0"/>
+          <a:ext cx="0" cy="0"/>
+          <a:chOff x="0" y="0"/>
+          <a:chExt cx="0" cy="0"/>
+        </a:xfrm>
+      </p:grpSpPr>
+      <p:sp>
+        <p:nvSpPr>
+          <p:cNvPr id="2" name="제목 1">
+            <a:extLst>
+              <a:ext uri="{FF2B5EF4-FFF2-40B4-BE49-F238E27FC236}">
+                <a16:creationId xmlns:a16="http://schemas.microsoft.com/office/drawing/2014/main" id="{37875853-4928-28E1-19F9-2F91413F9599}"/>
+              </a:ext>
+            </a:extLst>
+          </p:cNvPr>
+          <p:cNvSpPr>
+            <a:spLocks noGrp="1"/>
+          </p:cNvSpPr>
+          <p:nvPr>
+            <p:ph type="title"/>
+          </p:nvPr>
+        </p:nvSpPr>
+        <p:spPr/>
+        <p:txBody>
+          <a:bodyPr/>
+          <a:lstStyle/>
+          <a:p>
+            <a:r>
+              <a:rPr lang="en-US" altLang="ko-KR" dirty="0"/>
+              <a:t>3. </a:t>
+            </a:r>
+            <a:r>
+              <a:rPr lang="ko-KR" altLang="en-US" dirty="0"/>
+              <a:t>세계관</a:t>
+            </a:r>
+          </a:p>
+        </p:txBody>
+      </p:sp>
+      <p:sp>
+        <p:nvSpPr>
+          <p:cNvPr id="3" name="내용 개체 틀 2">
+            <a:extLst>
+              <a:ext uri="{FF2B5EF4-FFF2-40B4-BE49-F238E27FC236}">
+                <a16:creationId xmlns:a16="http://schemas.microsoft.com/office/drawing/2014/main" id="{1039EF24-B485-2D55-5FDF-A657A55B1CC6}"/>
+              </a:ext>
+            </a:extLst>
+          </p:cNvPr>
+          <p:cNvSpPr>
+            <a:spLocks noGrp="1"/>
+          </p:cNvSpPr>
+          <p:nvPr>
+            <p:ph idx="1"/>
+          </p:nvPr>
+        </p:nvSpPr>
+        <p:spPr/>
+        <p:txBody>
+          <a:bodyPr>
+            <a:normAutofit/>
+          </a:bodyPr>
+          <a:lstStyle/>
+          <a:p>
+            <a:pPr>
+              <a:lnSpc>
+                <a:spcPct val="100000"/>
+              </a:lnSpc>
+            </a:pPr>
+            <a:r>
+              <a:rPr lang="en-US" altLang="ko-KR" sz="2000" dirty="0"/>
+              <a:t>3.1. </a:t>
+            </a:r>
+            <a:r>
+              <a:rPr lang="ko-KR" altLang="en-US" sz="2000" dirty="0"/>
+              <a:t>전체 세계관</a:t>
+            </a:r>
+            <a:endParaRPr lang="en-US" altLang="ko-KR" sz="2000" dirty="0"/>
+          </a:p>
+          <a:p>
+            <a:pPr>
+              <a:lnSpc>
+                <a:spcPct val="100000"/>
+              </a:lnSpc>
+            </a:pPr>
+            <a:endParaRPr lang="en-US" altLang="ko-KR" sz="2000" dirty="0"/>
+          </a:p>
+          <a:p>
+            <a:pPr>
+              <a:lnSpc>
+                <a:spcPct val="100000"/>
+              </a:lnSpc>
+            </a:pPr>
+            <a:r>
+              <a:rPr lang="en-US" altLang="ko-KR" sz="2000" dirty="0"/>
+              <a:t>3.2. </a:t>
+            </a:r>
+            <a:r>
+              <a:rPr lang="ko-KR" altLang="en-US" sz="2000" dirty="0"/>
+              <a:t>스토리</a:t>
+            </a:r>
+            <a:endParaRPr lang="en-US" altLang="ko-KR" sz="2000" dirty="0"/>
+          </a:p>
+          <a:p>
+            <a:pPr>
+              <a:lnSpc>
+                <a:spcPct val="100000"/>
+              </a:lnSpc>
+            </a:pPr>
+            <a:endParaRPr lang="en-US" altLang="ko-KR" sz="2000" dirty="0"/>
+          </a:p>
+          <a:p>
+            <a:pPr>
+              <a:lnSpc>
+                <a:spcPct val="100000"/>
+              </a:lnSpc>
+            </a:pPr>
+            <a:r>
+              <a:rPr lang="en-US" altLang="ko-KR" sz="2000" dirty="0"/>
+              <a:t>3.3. </a:t>
+            </a:r>
+            <a:r>
+              <a:rPr lang="ko-KR" altLang="en-US" sz="2000" dirty="0"/>
+              <a:t>캐릭터</a:t>
+            </a:r>
+          </a:p>
+        </p:txBody>
+      </p:sp>
+    </p:spTree>
+    <p:extLst>
+      <p:ext uri="{BB962C8B-B14F-4D97-AF65-F5344CB8AC3E}">
+        <p14:creationId xmlns:p14="http://schemas.microsoft.com/office/powerpoint/2010/main" val="3451712130"/>
+      </p:ext>
+    </p:extLst>
+  </p:cSld>
+  <p:clrMapOvr>
+    <a:masterClrMapping/>
+  </p:clrMapOvr>
+</p:sld>
+</file>
+
+<file path=ppt/slides/slide6.xml><?xml version="1.0" encoding="utf-8"?>
+<p:sld xmlns:a="http://schemas.openxmlformats.org/drawingml/2006/main" xmlns:r="http://schemas.openxmlformats.org/officeDocument/2006/relationships" xmlns:p="http://schemas.openxmlformats.org/presentationml/2006/main">
+  <p:cSld>
+    <p:spTree>
+      <p:nvGrpSpPr>
+        <p:cNvPr id="1" name="">
+          <a:extLst>
+            <a:ext uri="{FF2B5EF4-FFF2-40B4-BE49-F238E27FC236}">
+              <a16:creationId xmlns:a16="http://schemas.microsoft.com/office/drawing/2014/main" id="{7EF39394-5AE7-110C-8D38-2571F8FB18E8}"/>
+            </a:ext>
+          </a:extLst>
+        </p:cNvPr>
+        <p:cNvGrpSpPr/>
+        <p:nvPr/>
+      </p:nvGrpSpPr>
+      <p:grpSpPr>
+        <a:xfrm>
+          <a:off x="0" y="0"/>
+          <a:ext cx="0" cy="0"/>
+          <a:chOff x="0" y="0"/>
+          <a:chExt cx="0" cy="0"/>
+        </a:xfrm>
+      </p:grpSpPr>
+      <p:sp>
+        <p:nvSpPr>
+          <p:cNvPr id="2" name="제목 1">
+            <a:extLst>
+              <a:ext uri="{FF2B5EF4-FFF2-40B4-BE49-F238E27FC236}">
+                <a16:creationId xmlns:a16="http://schemas.microsoft.com/office/drawing/2014/main" id="{2BFC43E7-43D9-1D84-9E36-E725633991AE}"/>
+              </a:ext>
+            </a:extLst>
+          </p:cNvPr>
+          <p:cNvSpPr>
+            <a:spLocks noGrp="1"/>
+          </p:cNvSpPr>
+          <p:nvPr>
+            <p:ph type="title"/>
+          </p:nvPr>
+        </p:nvSpPr>
+        <p:spPr/>
+        <p:txBody>
+          <a:bodyPr/>
+          <a:lstStyle/>
+          <a:p>
+            <a:r>
+              <a:rPr lang="en-US" altLang="ko-KR" dirty="0"/>
+              <a:t>3.1. </a:t>
+            </a:r>
+            <a:r>
+              <a:rPr lang="ko-KR" altLang="en-US" dirty="0"/>
+              <a:t>전체 세계관</a:t>
+            </a:r>
+          </a:p>
+        </p:txBody>
+      </p:sp>
+      <p:sp>
+        <p:nvSpPr>
+          <p:cNvPr id="3" name="내용 개체 틀 2">
+            <a:extLst>
+              <a:ext uri="{FF2B5EF4-FFF2-40B4-BE49-F238E27FC236}">
+                <a16:creationId xmlns:a16="http://schemas.microsoft.com/office/drawing/2014/main" id="{135ABD84-BE81-8E32-C083-0EADB4119D45}"/>
+              </a:ext>
+            </a:extLst>
+          </p:cNvPr>
+          <p:cNvSpPr>
+            <a:spLocks noGrp="1"/>
+          </p:cNvSpPr>
+          <p:nvPr>
+            <p:ph idx="1"/>
+          </p:nvPr>
+        </p:nvSpPr>
+        <p:spPr/>
+        <p:txBody>
+          <a:bodyPr>
+            <a:normAutofit/>
+          </a:bodyPr>
+          <a:lstStyle/>
+          <a:p>
+            <a:pPr>
+              <a:lnSpc>
+                <a:spcPct val="150000"/>
+              </a:lnSpc>
+            </a:pPr>
+            <a:r>
+              <a:rPr lang="ko-KR" altLang="en-US" sz="2000" dirty="0"/>
+              <a:t>악마들이 깨운 </a:t>
+            </a:r>
+            <a:r>
+              <a:rPr lang="ko-KR" altLang="en-US" sz="2000" dirty="0">
+                <a:solidFill>
+                  <a:srgbClr val="FF0000"/>
+                </a:solidFill>
+              </a:rPr>
+              <a:t>재앙</a:t>
+            </a:r>
+            <a:r>
+              <a:rPr lang="ko-KR" altLang="en-US" sz="2000" dirty="0"/>
+              <a:t>에 휘말려 원소는 불안정해지고 마력이 흐트러지는 등 </a:t>
+            </a:r>
+            <a:br>
+              <a:rPr lang="en-US" altLang="ko-KR" sz="2000" dirty="0"/>
+            </a:br>
+            <a:r>
+              <a:rPr lang="ko-KR" altLang="en-US" sz="2000" dirty="0"/>
+              <a:t>영문 모를 현상들이 일어나는 멸망 직전의 세계</a:t>
+            </a:r>
+            <a:endParaRPr lang="en-US" altLang="ko-KR" sz="2000" dirty="0"/>
+          </a:p>
+          <a:p>
+            <a:pPr>
+              <a:lnSpc>
+                <a:spcPct val="150000"/>
+              </a:lnSpc>
+            </a:pPr>
+            <a:endParaRPr lang="en-US" altLang="ko-KR" sz="2000" dirty="0"/>
+          </a:p>
+          <a:p>
+            <a:pPr>
+              <a:lnSpc>
+                <a:spcPct val="150000"/>
+              </a:lnSpc>
+            </a:pPr>
+            <a:r>
+              <a:rPr lang="ko-KR" altLang="en-US" sz="2000" dirty="0"/>
+              <a:t>세계를 멸망시키려던 악마들조차 이 재앙에 휘말려 지성을 잃고 몬스터화 되었고</a:t>
+            </a:r>
+            <a:r>
+              <a:rPr lang="en-US" altLang="ko-KR" sz="2000" dirty="0"/>
+              <a:t>, </a:t>
+            </a:r>
+            <a:br>
+              <a:rPr lang="en-US" altLang="ko-KR" sz="2000" dirty="0"/>
+            </a:br>
+            <a:r>
+              <a:rPr lang="ko-KR" altLang="en-US" sz="2000" dirty="0"/>
+              <a:t>왕궁 지하에는 </a:t>
+            </a:r>
+            <a:r>
+              <a:rPr lang="en-US" altLang="ko-KR" sz="2000" dirty="0">
+                <a:solidFill>
+                  <a:schemeClr val="accent5">
+                    <a:lumMod val="75000"/>
+                  </a:schemeClr>
+                </a:solidFill>
+              </a:rPr>
+              <a:t>‘</a:t>
+            </a:r>
+            <a:r>
+              <a:rPr lang="ko-KR" altLang="en-US" sz="2000" dirty="0">
+                <a:solidFill>
+                  <a:schemeClr val="accent5">
+                    <a:lumMod val="75000"/>
+                  </a:schemeClr>
+                </a:solidFill>
+              </a:rPr>
+              <a:t>엔트로피</a:t>
+            </a:r>
+            <a:r>
+              <a:rPr lang="en-US" altLang="ko-KR" sz="2000" dirty="0">
+                <a:solidFill>
+                  <a:schemeClr val="accent5">
+                    <a:lumMod val="75000"/>
+                  </a:schemeClr>
+                </a:solidFill>
+              </a:rPr>
+              <a:t>’</a:t>
+            </a:r>
+            <a:r>
+              <a:rPr lang="ko-KR" altLang="en-US" sz="2000" dirty="0"/>
+              <a:t>라 불리는 지성 없는 혼돈이 자리 잡고 있다</a:t>
+            </a:r>
+            <a:r>
+              <a:rPr lang="en-US" altLang="ko-KR" sz="2000" dirty="0"/>
+              <a:t>.</a:t>
+            </a:r>
+            <a:endParaRPr lang="ko-KR" altLang="en-US" sz="2000" dirty="0"/>
+          </a:p>
+        </p:txBody>
+      </p:sp>
+    </p:spTree>
+    <p:extLst>
+      <p:ext uri="{BB962C8B-B14F-4D97-AF65-F5344CB8AC3E}">
+        <p14:creationId xmlns:p14="http://schemas.microsoft.com/office/powerpoint/2010/main" val="1068270619"/>
+      </p:ext>
+    </p:extLst>
+  </p:cSld>
+  <p:clrMapOvr>
+    <a:masterClrMapping/>
+  </p:clrMapOvr>
+</p:sld>
+</file>
+
+<file path=ppt/slides/slide7.xml><?xml version="1.0" encoding="utf-8"?>
+<p:sld xmlns:a="http://schemas.openxmlformats.org/drawingml/2006/main" xmlns:r="http://schemas.openxmlformats.org/officeDocument/2006/relationships" xmlns:p="http://schemas.openxmlformats.org/presentationml/2006/main">
+  <p:cSld>
+    <p:spTree>
+      <p:nvGrpSpPr>
+        <p:cNvPr id="1" name="">
+          <a:extLst>
+            <a:ext uri="{FF2B5EF4-FFF2-40B4-BE49-F238E27FC236}">
+              <a16:creationId xmlns:a16="http://schemas.microsoft.com/office/drawing/2014/main" id="{A52257D3-77E4-DB99-E0F6-76E7AE6331AF}"/>
+            </a:ext>
+          </a:extLst>
+        </p:cNvPr>
+        <p:cNvGrpSpPr/>
+        <p:nvPr/>
+      </p:nvGrpSpPr>
+      <p:grpSpPr>
+        <a:xfrm>
+          <a:off x="0" y="0"/>
+          <a:ext cx="0" cy="0"/>
+          <a:chOff x="0" y="0"/>
+          <a:chExt cx="0" cy="0"/>
+        </a:xfrm>
+      </p:grpSpPr>
+      <p:sp>
+        <p:nvSpPr>
+          <p:cNvPr id="2" name="제목 1">
+            <a:extLst>
+              <a:ext uri="{FF2B5EF4-FFF2-40B4-BE49-F238E27FC236}">
+                <a16:creationId xmlns:a16="http://schemas.microsoft.com/office/drawing/2014/main" id="{08BF67C8-F280-D029-C4A0-A46AE537599E}"/>
+              </a:ext>
+            </a:extLst>
+          </p:cNvPr>
+          <p:cNvSpPr>
+            <a:spLocks noGrp="1"/>
+          </p:cNvSpPr>
+          <p:nvPr>
+            <p:ph type="title"/>
+          </p:nvPr>
+        </p:nvSpPr>
+        <p:spPr/>
+        <p:txBody>
+          <a:bodyPr/>
+          <a:lstStyle/>
+          <a:p>
+            <a:r>
+              <a:rPr lang="en-US" altLang="ko-KR" dirty="0"/>
+              <a:t>3.2. </a:t>
+            </a:r>
+            <a:r>
+              <a:rPr lang="ko-KR" altLang="en-US" dirty="0"/>
+              <a:t>스토리</a:t>
+            </a:r>
+          </a:p>
+        </p:txBody>
+      </p:sp>
+      <p:sp>
+        <p:nvSpPr>
+          <p:cNvPr id="3" name="내용 개체 틀 2">
+            <a:extLst>
+              <a:ext uri="{FF2B5EF4-FFF2-40B4-BE49-F238E27FC236}">
+                <a16:creationId xmlns:a16="http://schemas.microsoft.com/office/drawing/2014/main" id="{C231CC7B-D791-96EB-58AC-F61FDD41DF60}"/>
+              </a:ext>
+            </a:extLst>
+          </p:cNvPr>
+          <p:cNvSpPr>
+            <a:spLocks noGrp="1"/>
+          </p:cNvSpPr>
+          <p:nvPr>
+            <p:ph idx="1"/>
+          </p:nvPr>
+        </p:nvSpPr>
+        <p:spPr/>
+        <p:txBody>
+          <a:bodyPr>
+            <a:normAutofit/>
+          </a:bodyPr>
+          <a:lstStyle/>
+          <a:p>
+            <a:pPr>
+              <a:lnSpc>
+                <a:spcPct val="150000"/>
+              </a:lnSpc>
+            </a:pPr>
+            <a:r>
+              <a:rPr lang="ko-KR" altLang="en-US" sz="2000" dirty="0"/>
+              <a:t>수천 년 전 악마의 저주로 </a:t>
+            </a:r>
+            <a:r>
+              <a:rPr lang="ko-KR" altLang="en-US" sz="2000" dirty="0">
+                <a:solidFill>
+                  <a:srgbClr val="7030A0"/>
+                </a:solidFill>
+              </a:rPr>
+              <a:t>리치</a:t>
+            </a:r>
+            <a:r>
+              <a:rPr lang="ko-KR" altLang="en-US" sz="2000" dirty="0"/>
+              <a:t>가 되어 스스로를 왕궁 지하에 봉인했던 </a:t>
+            </a:r>
+            <a:br>
+              <a:rPr lang="en-US" altLang="ko-KR" sz="2000" dirty="0"/>
+            </a:br>
+            <a:r>
+              <a:rPr lang="ko-KR" altLang="en-US" sz="2000" dirty="0">
+                <a:solidFill>
+                  <a:schemeClr val="tx2">
+                    <a:lumMod val="50000"/>
+                    <a:lumOff val="50000"/>
+                  </a:schemeClr>
+                </a:solidFill>
+              </a:rPr>
+              <a:t>현자</a:t>
+            </a:r>
+            <a:r>
+              <a:rPr lang="en-US" altLang="ko-KR" sz="2000" dirty="0">
+                <a:solidFill>
+                  <a:schemeClr val="tx2">
+                    <a:lumMod val="50000"/>
+                    <a:lumOff val="50000"/>
+                  </a:schemeClr>
+                </a:solidFill>
+              </a:rPr>
+              <a:t>(</a:t>
+            </a:r>
+            <a:r>
+              <a:rPr lang="ko-KR" altLang="en-US" sz="2000" dirty="0">
+                <a:solidFill>
+                  <a:schemeClr val="tx2">
+                    <a:lumMod val="50000"/>
+                    <a:lumOff val="50000"/>
+                  </a:schemeClr>
+                </a:solidFill>
+              </a:rPr>
+              <a:t>연금술사</a:t>
+            </a:r>
+            <a:r>
+              <a:rPr lang="en-US" altLang="ko-KR" sz="2000" dirty="0">
+                <a:solidFill>
+                  <a:schemeClr val="tx2">
+                    <a:lumMod val="50000"/>
+                    <a:lumOff val="50000"/>
+                  </a:schemeClr>
+                </a:solidFill>
+              </a:rPr>
+              <a:t>)</a:t>
+            </a:r>
+            <a:r>
+              <a:rPr lang="ko-KR" altLang="en-US" sz="2000" dirty="0"/>
+              <a:t>가 부스러기 마력만 남은 채로 눈을 뜨게 된다</a:t>
+            </a:r>
+            <a:r>
+              <a:rPr lang="en-US" altLang="ko-KR" sz="2000" dirty="0"/>
+              <a:t>. </a:t>
+            </a:r>
+          </a:p>
+          <a:p>
+            <a:pPr lvl="1">
+              <a:lnSpc>
+                <a:spcPct val="150000"/>
+              </a:lnSpc>
+            </a:pPr>
+            <a:r>
+              <a:rPr lang="ko-KR" altLang="en-US" sz="1400" dirty="0"/>
+              <a:t>죽으려면 라이프베슬이 필요했지만 어디 있는지는 몰랐다는 설정</a:t>
+            </a:r>
+            <a:endParaRPr lang="en-US" altLang="ko-KR" sz="1400" dirty="0"/>
+          </a:p>
+          <a:p>
+            <a:pPr lvl="1">
+              <a:lnSpc>
+                <a:spcPct val="150000"/>
+              </a:lnSpc>
+            </a:pPr>
+            <a:r>
+              <a:rPr lang="ko-KR" altLang="en-US" sz="1400" dirty="0"/>
+              <a:t>재앙으로 왕궁 지하 봉인지가 무너져 한번 죽고</a:t>
+            </a:r>
+            <a:r>
+              <a:rPr lang="en-US" altLang="ko-KR" sz="1400" dirty="0"/>
+              <a:t>, </a:t>
+            </a:r>
+            <a:r>
+              <a:rPr lang="ko-KR" altLang="en-US" sz="1400" dirty="0"/>
+              <a:t>라이프베슬 앞에서 부활하게 된 것 </a:t>
+            </a:r>
+            <a:r>
+              <a:rPr lang="en-US" altLang="ko-KR" sz="1400" dirty="0"/>
+              <a:t>(</a:t>
+            </a:r>
+            <a:r>
+              <a:rPr lang="ko-KR" altLang="en-US" sz="1400" dirty="0"/>
+              <a:t>원래는 왕궁에서 부활했었다</a:t>
+            </a:r>
+            <a:r>
+              <a:rPr lang="en-US" altLang="ko-KR" sz="1400" dirty="0"/>
+              <a:t>.)</a:t>
+            </a:r>
+          </a:p>
+          <a:p>
+            <a:pPr>
+              <a:lnSpc>
+                <a:spcPct val="150000"/>
+              </a:lnSpc>
+            </a:pPr>
+            <a:r>
+              <a:rPr lang="ko-KR" altLang="en-US" sz="2000" dirty="0"/>
+              <a:t>뒤틀리며 멸망하는 세계의 광경</a:t>
+            </a:r>
+            <a:r>
+              <a:rPr lang="en-US" altLang="ko-KR" sz="2000" dirty="0"/>
+              <a:t>(</a:t>
+            </a:r>
+            <a:r>
+              <a:rPr lang="ko-KR" altLang="en-US" sz="2000" dirty="0"/>
+              <a:t>꿈</a:t>
+            </a:r>
+            <a:r>
+              <a:rPr lang="en-US" altLang="ko-KR" sz="2000" dirty="0"/>
+              <a:t>)</a:t>
+            </a:r>
+            <a:r>
+              <a:rPr lang="ko-KR" altLang="en-US" sz="2000" dirty="0"/>
+              <a:t>에 눈을 뜬 주인공은 흩어진 마석과 마법을 모아 </a:t>
+            </a:r>
+            <a:br>
+              <a:rPr lang="en-US" altLang="ko-KR" sz="2000" dirty="0"/>
+            </a:br>
+            <a:r>
+              <a:rPr lang="ko-KR" altLang="en-US" sz="2000" dirty="0"/>
+              <a:t>재앙을 해체해야 한다</a:t>
+            </a:r>
+            <a:r>
+              <a:rPr lang="en-US" altLang="ko-KR" sz="2000" dirty="0"/>
+              <a:t>.</a:t>
+            </a:r>
+            <a:r>
+              <a:rPr lang="ko-KR" altLang="en-US" sz="2000" dirty="0"/>
+              <a:t> </a:t>
+            </a:r>
+            <a:endParaRPr lang="en-US" altLang="ko-KR" sz="2000" dirty="0"/>
+          </a:p>
+          <a:p>
+            <a:pPr>
+              <a:lnSpc>
+                <a:spcPct val="150000"/>
+              </a:lnSpc>
+            </a:pPr>
+            <a:r>
+              <a:rPr lang="ko-KR" altLang="en-US" sz="2000" dirty="0"/>
+              <a:t>엔딩</a:t>
+            </a:r>
+            <a:r>
+              <a:rPr lang="en-US" altLang="ko-KR" sz="2000" dirty="0"/>
+              <a:t>: </a:t>
+            </a:r>
+            <a:r>
+              <a:rPr lang="ko-KR" altLang="en-US" sz="2000" dirty="0"/>
+              <a:t>마력 없는 세계 </a:t>
+            </a:r>
+            <a:r>
+              <a:rPr lang="en-US" altLang="ko-KR" sz="2000" dirty="0"/>
+              <a:t>(</a:t>
+            </a:r>
+            <a:r>
+              <a:rPr lang="ko-KR" altLang="en-US" sz="2000" dirty="0"/>
+              <a:t>먼 미래에는 현대의 지구처럼 변함</a:t>
+            </a:r>
+            <a:r>
+              <a:rPr lang="en-US" altLang="ko-KR" sz="2000" dirty="0"/>
+              <a:t>)</a:t>
+            </a:r>
+            <a:endParaRPr lang="ko-KR" altLang="en-US" sz="2000" dirty="0"/>
+          </a:p>
+        </p:txBody>
+      </p:sp>
+    </p:spTree>
+    <p:extLst>
+      <p:ext uri="{BB962C8B-B14F-4D97-AF65-F5344CB8AC3E}">
+        <p14:creationId xmlns:p14="http://schemas.microsoft.com/office/powerpoint/2010/main" val="1028325480"/>
+      </p:ext>
+    </p:extLst>
+  </p:cSld>
+  <p:clrMapOvr>
+    <a:masterClrMapping/>
+  </p:clrMapOvr>
+</p:sld>
+</file>
+
+<file path=ppt/slides/slide8.xml><?xml version="1.0" encoding="utf-8"?>
+<p:sld xmlns:a="http://schemas.openxmlformats.org/drawingml/2006/main" xmlns:r="http://schemas.openxmlformats.org/officeDocument/2006/relationships" xmlns:p="http://schemas.openxmlformats.org/presentationml/2006/main">
+  <p:cSld>
+    <p:spTree>
+      <p:nvGrpSpPr>
+        <p:cNvPr id="1" name="">
+          <a:extLst>
+            <a:ext uri="{FF2B5EF4-FFF2-40B4-BE49-F238E27FC236}">
+              <a16:creationId xmlns:a16="http://schemas.microsoft.com/office/drawing/2014/main" id="{EDC1AFCC-321D-6963-4EFF-6DE953DB250B}"/>
+            </a:ext>
+          </a:extLst>
+        </p:cNvPr>
+        <p:cNvGrpSpPr/>
+        <p:nvPr/>
+      </p:nvGrpSpPr>
+      <p:grpSpPr>
+        <a:xfrm>
+          <a:off x="0" y="0"/>
+          <a:ext cx="0" cy="0"/>
+          <a:chOff x="0" y="0"/>
+          <a:chExt cx="0" cy="0"/>
+        </a:xfrm>
+      </p:grpSpPr>
+      <p:sp>
+        <p:nvSpPr>
+          <p:cNvPr id="2" name="제목 1">
+            <a:extLst>
+              <a:ext uri="{FF2B5EF4-FFF2-40B4-BE49-F238E27FC236}">
+                <a16:creationId xmlns:a16="http://schemas.microsoft.com/office/drawing/2014/main" id="{FAE25485-143B-F494-7A40-921CA9A9BEB1}"/>
+              </a:ext>
+            </a:extLst>
+          </p:cNvPr>
+          <p:cNvSpPr>
+            <a:spLocks noGrp="1"/>
+          </p:cNvSpPr>
+          <p:nvPr>
+            <p:ph type="title"/>
+          </p:nvPr>
+        </p:nvSpPr>
+        <p:spPr/>
+        <p:txBody>
+          <a:bodyPr/>
+          <a:lstStyle/>
+          <a:p>
+            <a:r>
+              <a:rPr lang="en-US" altLang="ko-KR" dirty="0"/>
+              <a:t>3.3. </a:t>
+            </a:r>
+            <a:r>
+              <a:rPr lang="ko-KR" altLang="en-US" dirty="0"/>
+              <a:t>캐릭터</a:t>
+            </a:r>
+          </a:p>
+        </p:txBody>
+      </p:sp>
+      <p:sp>
+        <p:nvSpPr>
+          <p:cNvPr id="3" name="내용 개체 틀 2">
+            <a:extLst>
+              <a:ext uri="{FF2B5EF4-FFF2-40B4-BE49-F238E27FC236}">
+                <a16:creationId xmlns:a16="http://schemas.microsoft.com/office/drawing/2014/main" id="{36ECD976-4A62-8453-AA7D-802A4A663551}"/>
+              </a:ext>
+            </a:extLst>
+          </p:cNvPr>
+          <p:cNvSpPr>
+            <a:spLocks noGrp="1"/>
+          </p:cNvSpPr>
+          <p:nvPr>
+            <p:ph idx="1"/>
+          </p:nvPr>
+        </p:nvSpPr>
+        <p:spPr/>
+        <p:txBody>
+          <a:bodyPr>
+            <a:normAutofit/>
+          </a:bodyPr>
+          <a:lstStyle/>
+          <a:p>
+            <a:pPr>
+              <a:lnSpc>
+                <a:spcPct val="150000"/>
+              </a:lnSpc>
+            </a:pPr>
+            <a:r>
+              <a:rPr lang="ko-KR" altLang="en-US" sz="2000" dirty="0"/>
+              <a:t>주인공</a:t>
+            </a:r>
+            <a:r>
+              <a:rPr lang="en-US" altLang="ko-KR" sz="2000" dirty="0"/>
+              <a:t>: </a:t>
+            </a:r>
+            <a:r>
+              <a:rPr lang="ko-KR" altLang="en-US" sz="2000" dirty="0"/>
+              <a:t>한때 현자라 불렸던 대연금술사</a:t>
+            </a:r>
+            <a:r>
+              <a:rPr lang="en-US" altLang="ko-KR" sz="2000" dirty="0"/>
+              <a:t>, </a:t>
+            </a:r>
+            <a:r>
+              <a:rPr lang="ko-KR" altLang="en-US" sz="2000" dirty="0"/>
+              <a:t>현재는 악마의 저주로 리치가 되었음</a:t>
+            </a:r>
+            <a:endParaRPr lang="en-US" altLang="ko-KR" sz="2000" dirty="0"/>
+          </a:p>
+          <a:p>
+            <a:pPr>
+              <a:lnSpc>
+                <a:spcPct val="150000"/>
+              </a:lnSpc>
+            </a:pPr>
+            <a:endParaRPr lang="en-US" altLang="ko-KR" sz="2000" dirty="0"/>
+          </a:p>
+          <a:p>
+            <a:pPr>
+              <a:lnSpc>
+                <a:spcPct val="150000"/>
+              </a:lnSpc>
+            </a:pPr>
+            <a:r>
+              <a:rPr lang="ko-KR" altLang="en-US" sz="2000" dirty="0"/>
+              <a:t>적대 개체</a:t>
+            </a:r>
+            <a:r>
+              <a:rPr lang="en-US" altLang="ko-KR" sz="2000" dirty="0"/>
+              <a:t>:</a:t>
+            </a:r>
+          </a:p>
+          <a:p>
+            <a:pPr lvl="1">
+              <a:lnSpc>
+                <a:spcPct val="150000"/>
+              </a:lnSpc>
+            </a:pPr>
+            <a:r>
+              <a:rPr lang="ko-KR" altLang="en-US" sz="1600" dirty="0" err="1">
+                <a:solidFill>
+                  <a:srgbClr val="00B050"/>
+                </a:solidFill>
+              </a:rPr>
+              <a:t>슬라임</a:t>
+            </a:r>
+            <a:r>
+              <a:rPr lang="ko-KR" altLang="en-US" sz="1600" dirty="0">
+                <a:solidFill>
+                  <a:srgbClr val="00B050"/>
+                </a:solidFill>
+              </a:rPr>
+              <a:t> 킹</a:t>
+            </a:r>
+            <a:r>
+              <a:rPr lang="en-US" altLang="ko-KR" sz="1600" dirty="0">
+                <a:solidFill>
+                  <a:srgbClr val="00B050"/>
+                </a:solidFill>
+              </a:rPr>
+              <a:t>, </a:t>
+            </a:r>
+            <a:r>
+              <a:rPr lang="ko-KR" altLang="en-US" sz="1600" dirty="0" err="1">
+                <a:solidFill>
+                  <a:srgbClr val="00B050"/>
+                </a:solidFill>
+              </a:rPr>
+              <a:t>고블린</a:t>
+            </a:r>
+            <a:r>
+              <a:rPr lang="ko-KR" altLang="en-US" sz="1600" dirty="0">
+                <a:solidFill>
+                  <a:srgbClr val="00B050"/>
+                </a:solidFill>
+              </a:rPr>
+              <a:t> 샤먼 등의 토착 몬스터 무리</a:t>
+            </a:r>
+            <a:endParaRPr lang="en-US" altLang="ko-KR" sz="1600" dirty="0">
+              <a:solidFill>
+                <a:srgbClr val="00B050"/>
+              </a:solidFill>
+            </a:endParaRPr>
+          </a:p>
+          <a:p>
+            <a:pPr lvl="1">
+              <a:lnSpc>
+                <a:spcPct val="150000"/>
+              </a:lnSpc>
+            </a:pPr>
+            <a:r>
+              <a:rPr lang="ko-KR" altLang="en-US" sz="1600" dirty="0">
+                <a:solidFill>
+                  <a:schemeClr val="tx2">
+                    <a:lumMod val="75000"/>
+                    <a:lumOff val="25000"/>
+                  </a:schemeClr>
+                </a:solidFill>
+              </a:rPr>
+              <a:t>혼돈에 뒤틀린 기사와 귀족</a:t>
+            </a:r>
+            <a:r>
+              <a:rPr lang="en-US" altLang="ko-KR" sz="1600" dirty="0">
+                <a:solidFill>
+                  <a:schemeClr val="tx2">
+                    <a:lumMod val="75000"/>
+                    <a:lumOff val="25000"/>
+                  </a:schemeClr>
+                </a:solidFill>
+              </a:rPr>
+              <a:t>, </a:t>
+            </a:r>
+            <a:r>
+              <a:rPr lang="ko-KR" altLang="en-US" sz="1600" dirty="0">
+                <a:solidFill>
+                  <a:schemeClr val="tx2">
+                    <a:lumMod val="75000"/>
+                    <a:lumOff val="25000"/>
+                  </a:schemeClr>
+                </a:solidFill>
+              </a:rPr>
+              <a:t>왕도 시민들</a:t>
+            </a:r>
+            <a:endParaRPr lang="en-US" altLang="ko-KR" sz="1600" dirty="0">
+              <a:solidFill>
+                <a:schemeClr val="tx2">
+                  <a:lumMod val="75000"/>
+                  <a:lumOff val="25000"/>
+                </a:schemeClr>
+              </a:solidFill>
+            </a:endParaRPr>
+          </a:p>
+          <a:p>
+            <a:pPr lvl="1">
+              <a:lnSpc>
+                <a:spcPct val="150000"/>
+              </a:lnSpc>
+            </a:pPr>
+            <a:r>
+              <a:rPr lang="ko-KR" altLang="en-US" sz="1600" dirty="0">
+                <a:solidFill>
+                  <a:srgbClr val="FF0000"/>
+                </a:solidFill>
+              </a:rPr>
+              <a:t>지성 잃은 악마들</a:t>
+            </a:r>
+            <a:endParaRPr lang="en-US" altLang="ko-KR" sz="1600" dirty="0">
+              <a:solidFill>
+                <a:srgbClr val="FF0000"/>
+              </a:solidFill>
+            </a:endParaRPr>
+          </a:p>
+          <a:p>
+            <a:pPr lvl="1">
+              <a:lnSpc>
+                <a:spcPct val="150000"/>
+              </a:lnSpc>
+            </a:pPr>
+            <a:r>
+              <a:rPr lang="ko-KR" altLang="en-US" sz="1600" dirty="0">
+                <a:solidFill>
+                  <a:srgbClr val="7030A0"/>
+                </a:solidFill>
+              </a:rPr>
+              <a:t>심층부의 재앙의 근원 </a:t>
+            </a:r>
+            <a:r>
+              <a:rPr lang="en-US" altLang="ko-KR" sz="1600" dirty="0">
+                <a:solidFill>
+                  <a:srgbClr val="7030A0"/>
+                </a:solidFill>
+              </a:rPr>
+              <a:t>(</a:t>
+            </a:r>
+            <a:r>
+              <a:rPr lang="ko-KR" altLang="en-US" sz="1600" dirty="0">
+                <a:solidFill>
+                  <a:srgbClr val="7030A0"/>
+                </a:solidFill>
+              </a:rPr>
+              <a:t>엔트로피</a:t>
+            </a:r>
+            <a:r>
+              <a:rPr lang="en-US" altLang="ko-KR" sz="1600" dirty="0">
+                <a:solidFill>
+                  <a:srgbClr val="7030A0"/>
+                </a:solidFill>
+              </a:rPr>
+              <a:t>)</a:t>
+            </a:r>
+          </a:p>
+          <a:p>
+            <a:pPr lvl="1">
+              <a:lnSpc>
+                <a:spcPct val="150000"/>
+              </a:lnSpc>
+            </a:pPr>
+            <a:endParaRPr lang="en-US" altLang="ko-KR" sz="1600" dirty="0"/>
+          </a:p>
+        </p:txBody>
+      </p:sp>
+    </p:spTree>
+    <p:extLst>
+      <p:ext uri="{BB962C8B-B14F-4D97-AF65-F5344CB8AC3E}">
+        <p14:creationId xmlns:p14="http://schemas.microsoft.com/office/powerpoint/2010/main" val="2363842144"/>
+      </p:ext>
+    </p:extLst>
+  </p:cSld>
+  <p:clrMapOvr>
+    <a:masterClrMapping/>
+  </p:clrMapOvr>
+</p:sld>
+</file>
+
+<file path=ppt/slides/slide9.xml><?xml version="1.0" encoding="utf-8"?>
+<p:sld xmlns:a="http://schemas.openxmlformats.org/drawingml/2006/main" xmlns:r="http://schemas.openxmlformats.org/officeDocument/2006/relationships" xmlns:p="http://schemas.openxmlformats.org/presentationml/2006/main">
+  <p:cSld>
+    <p:spTree>
+      <p:nvGrpSpPr>
+        <p:cNvPr id="1" name="">
+          <a:extLst>
+            <a:ext uri="{FF2B5EF4-FFF2-40B4-BE49-F238E27FC236}">
+              <a16:creationId xmlns:a16="http://schemas.microsoft.com/office/drawing/2014/main" id="{89BA4688-910A-3335-29E5-E5944A09F3D1}"/>
+            </a:ext>
+          </a:extLst>
+        </p:cNvPr>
+        <p:cNvGrpSpPr/>
+        <p:nvPr/>
+      </p:nvGrpSpPr>
+      <p:grpSpPr>
+        <a:xfrm>
+          <a:off x="0" y="0"/>
+          <a:ext cx="0" cy="0"/>
+          <a:chOff x="0" y="0"/>
+          <a:chExt cx="0" cy="0"/>
+        </a:xfrm>
+      </p:grpSpPr>
+      <p:sp>
+        <p:nvSpPr>
+          <p:cNvPr id="2" name="제목 1">
+            <a:extLst>
+              <a:ext uri="{FF2B5EF4-FFF2-40B4-BE49-F238E27FC236}">
+                <a16:creationId xmlns:a16="http://schemas.microsoft.com/office/drawing/2014/main" id="{37C0D987-90C5-9E62-DB52-F0819C4F8258}"/>
+              </a:ext>
+            </a:extLst>
+          </p:cNvPr>
+          <p:cNvSpPr>
+            <a:spLocks noGrp="1"/>
+          </p:cNvSpPr>
+          <p:nvPr>
+            <p:ph type="title"/>
+          </p:nvPr>
+        </p:nvSpPr>
+        <p:spPr/>
+        <p:txBody>
+          <a:bodyPr/>
+          <a:lstStyle/>
+          <a:p>
+            <a:r>
+              <a:rPr lang="en-US" altLang="ko-KR" dirty="0"/>
+              <a:t>4. </a:t>
+            </a:r>
+            <a:r>
+              <a:rPr lang="ko-KR" altLang="en-US" dirty="0"/>
+              <a:t>구조 및 형태</a:t>
+            </a:r>
+          </a:p>
+        </p:txBody>
+      </p:sp>
+      <p:sp>
+        <p:nvSpPr>
+          <p:cNvPr id="3" name="내용 개체 틀 2">
+            <a:extLst>
+              <a:ext uri="{FF2B5EF4-FFF2-40B4-BE49-F238E27FC236}">
+                <a16:creationId xmlns:a16="http://schemas.microsoft.com/office/drawing/2014/main" id="{40ADB100-4B70-7BE9-656E-A26599AB297E}"/>
+              </a:ext>
+            </a:extLst>
+          </p:cNvPr>
+          <p:cNvSpPr>
+            <a:spLocks noGrp="1"/>
+          </p:cNvSpPr>
+          <p:nvPr>
+            <p:ph idx="1"/>
+          </p:nvPr>
+        </p:nvSpPr>
+        <p:spPr/>
+        <p:txBody>
+          <a:bodyPr>
+            <a:normAutofit/>
+          </a:bodyPr>
+          <a:lstStyle/>
+          <a:p>
+            <a:pPr>
+              <a:lnSpc>
+                <a:spcPct val="100000"/>
+              </a:lnSpc>
+            </a:pPr>
+            <a:r>
+              <a:rPr lang="en-US" altLang="ko-KR" sz="2000" dirty="0"/>
+              <a:t>4.1. Flow Chart</a:t>
+            </a:r>
+          </a:p>
+          <a:p>
+            <a:pPr>
+              <a:lnSpc>
+                <a:spcPct val="100000"/>
+              </a:lnSpc>
+            </a:pPr>
+            <a:endParaRPr lang="en-US" altLang="ko-KR" sz="2000" dirty="0"/>
+          </a:p>
+          <a:p>
+            <a:pPr>
+              <a:lnSpc>
+                <a:spcPct val="100000"/>
+              </a:lnSpc>
+            </a:pPr>
+            <a:r>
+              <a:rPr lang="en-US" altLang="ko-KR" sz="2000" dirty="0"/>
+              <a:t>4.2. UI</a:t>
+            </a:r>
+          </a:p>
+          <a:p>
+            <a:pPr>
+              <a:lnSpc>
+                <a:spcPct val="100000"/>
+              </a:lnSpc>
+            </a:pPr>
+            <a:endParaRPr lang="en-US" altLang="ko-KR" sz="2000" dirty="0"/>
+          </a:p>
+          <a:p>
+            <a:pPr>
+              <a:lnSpc>
+                <a:spcPct val="100000"/>
+              </a:lnSpc>
+            </a:pPr>
+            <a:r>
+              <a:rPr lang="en-US" altLang="ko-KR" sz="2000" dirty="0"/>
+              <a:t>4.3. </a:t>
+            </a:r>
+            <a:r>
+              <a:rPr lang="ko-KR" altLang="en-US" sz="2000" dirty="0" err="1"/>
+              <a:t>키설정</a:t>
+            </a:r>
+            <a:endParaRPr lang="ko-KR" altLang="en-US" sz="2000" dirty="0"/>
+          </a:p>
+        </p:txBody>
+      </p:sp>
+    </p:spTree>
+    <p:extLst>
+      <p:ext uri="{BB962C8B-B14F-4D97-AF65-F5344CB8AC3E}">
+        <p14:creationId xmlns:p14="http://schemas.microsoft.com/office/powerpoint/2010/main" val="2588717425"/>
       </p:ext>
     </p:extLst>
   </p:cSld>

--- a/_문서/_Project Entropy 기획문서.pptx
+++ b/_문서/_Project Entropy 기획문서.pptx
@@ -15,6 +15,9 @@
     <p:sldId id="263" r:id="rId9"/>
     <p:sldId id="265" r:id="rId10"/>
     <p:sldId id="266" r:id="rId11"/>
+    <p:sldId id="267" r:id="rId12"/>
+    <p:sldId id="268" r:id="rId13"/>
+    <p:sldId id="269" r:id="rId14"/>
   </p:sldIdLst>
   <p:sldSz cx="12192000" cy="6858000"/>
   <p:notesSz cx="6858000" cy="9144000"/>
@@ -3499,7 +3502,7 @@
             </a:pPr>
             <a:r>
               <a:rPr lang="ko-KR" altLang="en-US" sz="1400" dirty="0"/>
-              <a:t>기지 </a:t>
+              <a:t>거점 </a:t>
             </a:r>
             <a:r>
               <a:rPr lang="en-US" altLang="ko-KR" sz="1400" dirty="0"/>
@@ -3657,6 +3660,525 @@
     <p:extLst>
       <p:ext uri="{BB962C8B-B14F-4D97-AF65-F5344CB8AC3E}">
         <p14:creationId xmlns:p14="http://schemas.microsoft.com/office/powerpoint/2010/main" val="3193409258"/>
+      </p:ext>
+    </p:extLst>
+  </p:cSld>
+  <p:clrMapOvr>
+    <a:masterClrMapping/>
+  </p:clrMapOvr>
+</p:sld>
+</file>
+
+<file path=ppt/slides/slide11.xml><?xml version="1.0" encoding="utf-8"?>
+<p:sld xmlns:a="http://schemas.openxmlformats.org/drawingml/2006/main" xmlns:r="http://schemas.openxmlformats.org/officeDocument/2006/relationships" xmlns:p="http://schemas.openxmlformats.org/presentationml/2006/main">
+  <p:cSld>
+    <p:spTree>
+      <p:nvGrpSpPr>
+        <p:cNvPr id="1" name="">
+          <a:extLst>
+            <a:ext uri="{FF2B5EF4-FFF2-40B4-BE49-F238E27FC236}">
+              <a16:creationId xmlns:a16="http://schemas.microsoft.com/office/drawing/2014/main" id="{094BD48F-7878-3CC2-F304-CEC6A48353CF}"/>
+            </a:ext>
+          </a:extLst>
+        </p:cNvPr>
+        <p:cNvGrpSpPr/>
+        <p:nvPr/>
+      </p:nvGrpSpPr>
+      <p:grpSpPr>
+        <a:xfrm>
+          <a:off x="0" y="0"/>
+          <a:ext cx="0" cy="0"/>
+          <a:chOff x="0" y="0"/>
+          <a:chExt cx="0" cy="0"/>
+        </a:xfrm>
+      </p:grpSpPr>
+      <p:sp>
+        <p:nvSpPr>
+          <p:cNvPr id="2" name="제목 1">
+            <a:extLst>
+              <a:ext uri="{FF2B5EF4-FFF2-40B4-BE49-F238E27FC236}">
+                <a16:creationId xmlns:a16="http://schemas.microsoft.com/office/drawing/2014/main" id="{4F97F80A-2F28-65E2-BC02-9B6CEEA2F801}"/>
+              </a:ext>
+            </a:extLst>
+          </p:cNvPr>
+          <p:cNvSpPr>
+            <a:spLocks noGrp="1"/>
+          </p:cNvSpPr>
+          <p:nvPr>
+            <p:ph type="title"/>
+          </p:nvPr>
+        </p:nvSpPr>
+        <p:spPr/>
+        <p:txBody>
+          <a:bodyPr/>
+          <a:lstStyle/>
+          <a:p>
+            <a:r>
+              <a:rPr lang="en-US" altLang="ko-KR" dirty="0"/>
+              <a:t>4.2. UI</a:t>
+            </a:r>
+            <a:endParaRPr lang="ko-KR" altLang="en-US" dirty="0"/>
+          </a:p>
+        </p:txBody>
+      </p:sp>
+      <p:sp>
+        <p:nvSpPr>
+          <p:cNvPr id="3" name="내용 개체 틀 2">
+            <a:extLst>
+              <a:ext uri="{FF2B5EF4-FFF2-40B4-BE49-F238E27FC236}">
+                <a16:creationId xmlns:a16="http://schemas.microsoft.com/office/drawing/2014/main" id="{6AC00A0C-45B2-032B-D2D9-3F7E3F691273}"/>
+              </a:ext>
+            </a:extLst>
+          </p:cNvPr>
+          <p:cNvSpPr>
+            <a:spLocks noGrp="1"/>
+          </p:cNvSpPr>
+          <p:nvPr>
+            <p:ph idx="1"/>
+          </p:nvPr>
+        </p:nvSpPr>
+        <p:spPr/>
+        <p:txBody>
+          <a:bodyPr>
+            <a:normAutofit/>
+          </a:bodyPr>
+          <a:lstStyle/>
+          <a:p>
+            <a:pPr>
+              <a:lnSpc>
+                <a:spcPct val="150000"/>
+              </a:lnSpc>
+            </a:pPr>
+            <a:r>
+              <a:rPr lang="ko-KR" altLang="en-US" sz="2000" dirty="0"/>
+              <a:t>거점</a:t>
+            </a:r>
+            <a:endParaRPr lang="en-US" altLang="ko-KR" sz="2000" dirty="0"/>
+          </a:p>
+          <a:p>
+            <a:pPr>
+              <a:lnSpc>
+                <a:spcPct val="150000"/>
+              </a:lnSpc>
+            </a:pPr>
+            <a:r>
+              <a:rPr lang="ko-KR" altLang="en-US" sz="2000" dirty="0"/>
+              <a:t>전투</a:t>
+            </a:r>
+            <a:endParaRPr lang="en-US" altLang="ko-KR" sz="2000" dirty="0"/>
+          </a:p>
+          <a:p>
+            <a:pPr>
+              <a:lnSpc>
+                <a:spcPct val="150000"/>
+              </a:lnSpc>
+            </a:pPr>
+            <a:r>
+              <a:rPr lang="ko-KR" altLang="en-US" sz="2000" dirty="0"/>
+              <a:t>상점</a:t>
+            </a:r>
+            <a:endParaRPr lang="en-US" altLang="ko-KR" sz="2000" dirty="0"/>
+          </a:p>
+        </p:txBody>
+      </p:sp>
+    </p:spTree>
+    <p:extLst>
+      <p:ext uri="{BB962C8B-B14F-4D97-AF65-F5344CB8AC3E}">
+        <p14:creationId xmlns:p14="http://schemas.microsoft.com/office/powerpoint/2010/main" val="1613280691"/>
+      </p:ext>
+    </p:extLst>
+  </p:cSld>
+  <p:clrMapOvr>
+    <a:masterClrMapping/>
+  </p:clrMapOvr>
+</p:sld>
+</file>
+
+<file path=ppt/slides/slide12.xml><?xml version="1.0" encoding="utf-8"?>
+<p:sld xmlns:a="http://schemas.openxmlformats.org/drawingml/2006/main" xmlns:r="http://schemas.openxmlformats.org/officeDocument/2006/relationships" xmlns:p="http://schemas.openxmlformats.org/presentationml/2006/main">
+  <p:cSld>
+    <p:spTree>
+      <p:nvGrpSpPr>
+        <p:cNvPr id="1" name="">
+          <a:extLst>
+            <a:ext uri="{FF2B5EF4-FFF2-40B4-BE49-F238E27FC236}">
+              <a16:creationId xmlns:a16="http://schemas.microsoft.com/office/drawing/2014/main" id="{F470D32E-EE75-FDE7-2D46-48EF3C61D850}"/>
+            </a:ext>
+          </a:extLst>
+        </p:cNvPr>
+        <p:cNvGrpSpPr/>
+        <p:nvPr/>
+      </p:nvGrpSpPr>
+      <p:grpSpPr>
+        <a:xfrm>
+          <a:off x="0" y="0"/>
+          <a:ext cx="0" cy="0"/>
+          <a:chOff x="0" y="0"/>
+          <a:chExt cx="0" cy="0"/>
+        </a:xfrm>
+      </p:grpSpPr>
+      <p:sp>
+        <p:nvSpPr>
+          <p:cNvPr id="2" name="제목 1">
+            <a:extLst>
+              <a:ext uri="{FF2B5EF4-FFF2-40B4-BE49-F238E27FC236}">
+                <a16:creationId xmlns:a16="http://schemas.microsoft.com/office/drawing/2014/main" id="{E346C6A5-8613-CDF6-B5A3-B507D133FDE6}"/>
+              </a:ext>
+            </a:extLst>
+          </p:cNvPr>
+          <p:cNvSpPr>
+            <a:spLocks noGrp="1"/>
+          </p:cNvSpPr>
+          <p:nvPr>
+            <p:ph type="title"/>
+          </p:nvPr>
+        </p:nvSpPr>
+        <p:spPr/>
+        <p:txBody>
+          <a:bodyPr/>
+          <a:lstStyle/>
+          <a:p>
+            <a:r>
+              <a:rPr lang="en-US" altLang="ko-KR" dirty="0"/>
+              <a:t>4.3. </a:t>
+            </a:r>
+            <a:r>
+              <a:rPr lang="ko-KR" altLang="en-US" dirty="0"/>
+              <a:t>키 설정</a:t>
+            </a:r>
+          </a:p>
+        </p:txBody>
+      </p:sp>
+      <p:sp>
+        <p:nvSpPr>
+          <p:cNvPr id="3" name="내용 개체 틀 2">
+            <a:extLst>
+              <a:ext uri="{FF2B5EF4-FFF2-40B4-BE49-F238E27FC236}">
+                <a16:creationId xmlns:a16="http://schemas.microsoft.com/office/drawing/2014/main" id="{CADB6F4C-A582-4AA6-57F6-9306CF870CC5}"/>
+              </a:ext>
+            </a:extLst>
+          </p:cNvPr>
+          <p:cNvSpPr>
+            <a:spLocks noGrp="1"/>
+          </p:cNvSpPr>
+          <p:nvPr>
+            <p:ph idx="1"/>
+          </p:nvPr>
+        </p:nvSpPr>
+        <p:spPr/>
+        <p:txBody>
+          <a:bodyPr>
+            <a:normAutofit/>
+          </a:bodyPr>
+          <a:lstStyle/>
+          <a:p>
+            <a:pPr>
+              <a:lnSpc>
+                <a:spcPct val="150000"/>
+              </a:lnSpc>
+            </a:pPr>
+            <a:r>
+              <a:rPr lang="ko-KR" altLang="en-US" sz="2000" dirty="0"/>
+              <a:t>기지 및 상점 </a:t>
+            </a:r>
+            <a:r>
+              <a:rPr lang="en-US" altLang="ko-KR" sz="2000" dirty="0"/>
+              <a:t>– WASD</a:t>
+            </a:r>
+            <a:r>
+              <a:rPr lang="ko-KR" altLang="en-US" sz="2000" dirty="0"/>
+              <a:t>를 이용한 캐릭터 직접 조작 및 상호작용 키 사용</a:t>
+            </a:r>
+            <a:endParaRPr lang="en-US" altLang="ko-KR" sz="2000" dirty="0"/>
+          </a:p>
+          <a:p>
+            <a:pPr>
+              <a:lnSpc>
+                <a:spcPct val="150000"/>
+              </a:lnSpc>
+            </a:pPr>
+            <a:r>
+              <a:rPr lang="ko-KR" altLang="en-US" sz="2000" dirty="0"/>
+              <a:t>전투 </a:t>
+            </a:r>
+            <a:r>
+              <a:rPr lang="en-US" altLang="ko-KR" sz="2000" dirty="0"/>
+              <a:t>– </a:t>
+            </a:r>
+            <a:r>
+              <a:rPr lang="ko-KR" altLang="en-US" sz="2000" dirty="0"/>
+              <a:t>마우스</a:t>
+            </a:r>
+            <a:r>
+              <a:rPr lang="en-US" altLang="ko-KR" sz="2000" dirty="0"/>
+              <a:t>:</a:t>
+            </a:r>
+            <a:r>
+              <a:rPr lang="ko-KR" altLang="en-US" sz="2000" dirty="0"/>
+              <a:t> 카드 사용 및 타일 이동 지시</a:t>
+            </a:r>
+            <a:r>
+              <a:rPr lang="en-US" altLang="ko-KR" sz="2000" dirty="0"/>
+              <a:t>, UI</a:t>
+            </a:r>
+            <a:r>
+              <a:rPr lang="ko-KR" altLang="en-US" sz="2000" dirty="0"/>
+              <a:t>버튼 클릭 등</a:t>
+            </a:r>
+            <a:r>
+              <a:rPr lang="en-US" altLang="ko-KR" sz="2000" dirty="0"/>
+              <a:t> </a:t>
+            </a:r>
+            <a:r>
+              <a:rPr lang="ko-KR" altLang="en-US" sz="2000" dirty="0"/>
+              <a:t>사용</a:t>
+            </a:r>
+            <a:br>
+              <a:rPr lang="en-US" altLang="ko-KR" sz="2000" dirty="0"/>
+            </a:br>
+            <a:r>
+              <a:rPr lang="en-US" altLang="ko-KR" sz="2000" dirty="0"/>
+              <a:t>	  </a:t>
+            </a:r>
+            <a:r>
+              <a:rPr lang="ko-KR" altLang="en-US" sz="2000" dirty="0"/>
+              <a:t>키보드</a:t>
+            </a:r>
+            <a:r>
+              <a:rPr lang="en-US" altLang="ko-KR" sz="2000" dirty="0"/>
+              <a:t>:</a:t>
+            </a:r>
+            <a:r>
+              <a:rPr lang="ko-KR" altLang="en-US" sz="2000" dirty="0"/>
+              <a:t> 카드 및 턴 종료 등 단축키 사용</a:t>
+            </a:r>
+            <a:endParaRPr lang="en-US" altLang="ko-KR" sz="2000" dirty="0"/>
+          </a:p>
+          <a:p>
+            <a:pPr>
+              <a:lnSpc>
+                <a:spcPct val="150000"/>
+              </a:lnSpc>
+            </a:pPr>
+            <a:r>
+              <a:rPr lang="ko-KR" altLang="en-US" sz="2000" dirty="0"/>
+              <a:t>공통 시스템 </a:t>
+            </a:r>
+            <a:r>
+              <a:rPr lang="en-US" altLang="ko-KR" sz="2000" dirty="0"/>
+              <a:t>– </a:t>
+            </a:r>
+            <a:r>
+              <a:rPr lang="ko-KR" altLang="en-US" sz="2000" dirty="0"/>
+              <a:t>일시정지</a:t>
+            </a:r>
+            <a:r>
+              <a:rPr lang="en-US" altLang="ko-KR" sz="2000" dirty="0"/>
+              <a:t>, </a:t>
+            </a:r>
+            <a:r>
+              <a:rPr lang="ko-KR" altLang="en-US" sz="2000" dirty="0"/>
+              <a:t>지도 </a:t>
+            </a:r>
+            <a:r>
+              <a:rPr lang="en-US" altLang="ko-KR" sz="2000" dirty="0"/>
+              <a:t>UI </a:t>
+            </a:r>
+            <a:r>
+              <a:rPr lang="ko-KR" altLang="en-US" sz="2000" dirty="0"/>
+              <a:t>등 시스템 입력 담당</a:t>
+            </a:r>
+            <a:endParaRPr lang="en-US" altLang="ko-KR" sz="2000" dirty="0"/>
+          </a:p>
+        </p:txBody>
+      </p:sp>
+    </p:spTree>
+    <p:extLst>
+      <p:ext uri="{BB962C8B-B14F-4D97-AF65-F5344CB8AC3E}">
+        <p14:creationId xmlns:p14="http://schemas.microsoft.com/office/powerpoint/2010/main" val="1393712750"/>
+      </p:ext>
+    </p:extLst>
+  </p:cSld>
+  <p:clrMapOvr>
+    <a:masterClrMapping/>
+  </p:clrMapOvr>
+</p:sld>
+</file>
+
+<file path=ppt/slides/slide13.xml><?xml version="1.0" encoding="utf-8"?>
+<p:sld xmlns:a="http://schemas.openxmlformats.org/drawingml/2006/main" xmlns:r="http://schemas.openxmlformats.org/officeDocument/2006/relationships" xmlns:p="http://schemas.openxmlformats.org/presentationml/2006/main">
+  <p:cSld>
+    <p:spTree>
+      <p:nvGrpSpPr>
+        <p:cNvPr id="1" name="">
+          <a:extLst>
+            <a:ext uri="{FF2B5EF4-FFF2-40B4-BE49-F238E27FC236}">
+              <a16:creationId xmlns:a16="http://schemas.microsoft.com/office/drawing/2014/main" id="{DCAC262B-9941-37B4-D5FF-BF504532536A}"/>
+            </a:ext>
+          </a:extLst>
+        </p:cNvPr>
+        <p:cNvGrpSpPr/>
+        <p:nvPr/>
+      </p:nvGrpSpPr>
+      <p:grpSpPr>
+        <a:xfrm>
+          <a:off x="0" y="0"/>
+          <a:ext cx="0" cy="0"/>
+          <a:chOff x="0" y="0"/>
+          <a:chExt cx="0" cy="0"/>
+        </a:xfrm>
+      </p:grpSpPr>
+      <p:sp>
+        <p:nvSpPr>
+          <p:cNvPr id="2" name="제목 1">
+            <a:extLst>
+              <a:ext uri="{FF2B5EF4-FFF2-40B4-BE49-F238E27FC236}">
+                <a16:creationId xmlns:a16="http://schemas.microsoft.com/office/drawing/2014/main" id="{B1524A78-F25B-D0B5-3CD4-65842E6F862B}"/>
+              </a:ext>
+            </a:extLst>
+          </p:cNvPr>
+          <p:cNvSpPr>
+            <a:spLocks noGrp="1"/>
+          </p:cNvSpPr>
+          <p:nvPr>
+            <p:ph type="title"/>
+          </p:nvPr>
+        </p:nvSpPr>
+        <p:spPr/>
+        <p:txBody>
+          <a:bodyPr/>
+          <a:lstStyle/>
+          <a:p>
+            <a:r>
+              <a:rPr lang="en-US" altLang="ko-KR" dirty="0"/>
+              <a:t>5. Game System</a:t>
+            </a:r>
+            <a:endParaRPr lang="ko-KR" altLang="en-US" dirty="0"/>
+          </a:p>
+        </p:txBody>
+      </p:sp>
+      <p:sp>
+        <p:nvSpPr>
+          <p:cNvPr id="3" name="내용 개체 틀 2">
+            <a:extLst>
+              <a:ext uri="{FF2B5EF4-FFF2-40B4-BE49-F238E27FC236}">
+                <a16:creationId xmlns:a16="http://schemas.microsoft.com/office/drawing/2014/main" id="{EA8614E0-97FA-74D3-9722-4415C7023059}"/>
+              </a:ext>
+            </a:extLst>
+          </p:cNvPr>
+          <p:cNvSpPr>
+            <a:spLocks noGrp="1"/>
+          </p:cNvSpPr>
+          <p:nvPr>
+            <p:ph idx="1"/>
+          </p:nvPr>
+        </p:nvSpPr>
+        <p:spPr/>
+        <p:txBody>
+          <a:bodyPr>
+            <a:normAutofit/>
+          </a:bodyPr>
+          <a:lstStyle/>
+          <a:p>
+            <a:pPr>
+              <a:lnSpc>
+                <a:spcPct val="150000"/>
+              </a:lnSpc>
+            </a:pPr>
+            <a:r>
+              <a:rPr lang="en-US" altLang="ko-KR" sz="2000" dirty="0"/>
+              <a:t>5.1. </a:t>
+            </a:r>
+            <a:r>
+              <a:rPr lang="ko-KR" altLang="en-US" sz="2000" dirty="0"/>
+              <a:t>행동력 </a:t>
+            </a:r>
+            <a:r>
+              <a:rPr lang="en-US" altLang="ko-KR" sz="2000" dirty="0"/>
+              <a:t>(AP)</a:t>
+            </a:r>
+            <a:r>
+              <a:rPr lang="ko-KR" altLang="en-US" sz="2000" dirty="0"/>
+              <a:t> 규칙</a:t>
+            </a:r>
+            <a:endParaRPr lang="en-US" altLang="ko-KR" sz="2000" dirty="0"/>
+          </a:p>
+          <a:p>
+            <a:pPr>
+              <a:lnSpc>
+                <a:spcPct val="150000"/>
+              </a:lnSpc>
+            </a:pPr>
+            <a:r>
+              <a:rPr lang="en-US" altLang="ko-KR" sz="2000" dirty="0"/>
+              <a:t>5.2. </a:t>
+            </a:r>
+            <a:r>
+              <a:rPr lang="ko-KR" altLang="en-US" sz="2000" dirty="0"/>
+              <a:t>턴 흐름 및 적 </a:t>
+            </a:r>
+            <a:r>
+              <a:rPr lang="en-US" altLang="ko-KR" sz="2000" dirty="0"/>
+              <a:t>AI</a:t>
+            </a:r>
+          </a:p>
+          <a:p>
+            <a:pPr>
+              <a:lnSpc>
+                <a:spcPct val="150000"/>
+              </a:lnSpc>
+            </a:pPr>
+            <a:r>
+              <a:rPr lang="en-US" altLang="ko-KR" sz="2000" dirty="0"/>
+              <a:t>5.3. </a:t>
+            </a:r>
+            <a:r>
+              <a:rPr lang="ko-KR" altLang="en-US" sz="2000" dirty="0"/>
+              <a:t>지형 변화 및 연쇄 반응 </a:t>
+            </a:r>
+            <a:r>
+              <a:rPr lang="en-US" altLang="ko-KR" sz="2000" dirty="0"/>
+              <a:t>(</a:t>
+            </a:r>
+            <a:r>
+              <a:rPr lang="ko-KR" altLang="en-US" sz="2000" dirty="0"/>
+              <a:t>핵심 기믹</a:t>
+            </a:r>
+            <a:r>
+              <a:rPr lang="en-US" altLang="ko-KR" sz="2000" dirty="0"/>
+              <a:t>)</a:t>
+            </a:r>
+          </a:p>
+          <a:p>
+            <a:pPr>
+              <a:lnSpc>
+                <a:spcPct val="150000"/>
+              </a:lnSpc>
+            </a:pPr>
+            <a:r>
+              <a:rPr lang="en-US" altLang="ko-KR" sz="2000" dirty="0"/>
+              <a:t>5.4. </a:t>
+            </a:r>
+            <a:r>
+              <a:rPr lang="ko-KR" altLang="en-US" sz="2000" dirty="0"/>
+              <a:t>마법</a:t>
+            </a:r>
+            <a:r>
+              <a:rPr lang="en-US" altLang="ko-KR" sz="2000" dirty="0"/>
+              <a:t>/</a:t>
+            </a:r>
+            <a:r>
+              <a:rPr lang="ko-KR" altLang="en-US" sz="2000"/>
+              <a:t>덱 컨셉</a:t>
+            </a:r>
+            <a:endParaRPr lang="en-US" altLang="ko-KR" sz="2000" dirty="0"/>
+          </a:p>
+        </p:txBody>
+      </p:sp>
+    </p:spTree>
+    <p:extLst>
+      <p:ext uri="{BB962C8B-B14F-4D97-AF65-F5344CB8AC3E}">
+        <p14:creationId xmlns:p14="http://schemas.microsoft.com/office/powerpoint/2010/main" val="1226688366"/>
       </p:ext>
     </p:extLst>
   </p:cSld>
@@ -5228,20 +5750,12 @@
               </a:lnSpc>
             </a:pPr>
             <a:r>
-              <a:rPr lang="ko-KR" altLang="en-US" sz="1600" dirty="0" err="1">
-                <a:solidFill>
-                  <a:srgbClr val="00B050"/>
-                </a:solidFill>
-              </a:rPr>
-              <a:t>슬라임</a:t>
-            </a:r>
-            <a:r>
               <a:rPr lang="ko-KR" altLang="en-US" sz="1600" dirty="0">
                 <a:solidFill>
                   <a:srgbClr val="00B050"/>
                 </a:solidFill>
               </a:rPr>
-              <a:t> 킹</a:t>
+              <a:t>슬라임 킹</a:t>
             </a:r>
             <a:r>
               <a:rPr lang="en-US" altLang="ko-KR" sz="1600" dirty="0">
@@ -5252,20 +5766,12 @@
               <a:t>, </a:t>
             </a:r>
             <a:r>
-              <a:rPr lang="ko-KR" altLang="en-US" sz="1600" dirty="0" err="1">
-                <a:solidFill>
-                  <a:srgbClr val="00B050"/>
-                </a:solidFill>
-              </a:rPr>
-              <a:t>고블린</a:t>
-            </a:r>
-            <a:r>
               <a:rPr lang="ko-KR" altLang="en-US" sz="1600" dirty="0">
                 <a:solidFill>
                   <a:srgbClr val="00B050"/>
                 </a:solidFill>
               </a:rPr>
-              <a:t> 샤먼 등의 토착 몬스터 무리</a:t>
+              <a:t>고블린 샤먼 등의 토착 몬스터 무리</a:t>
             </a:r>
             <a:endParaRPr lang="en-US" altLang="ko-KR" sz="1600" dirty="0">
               <a:solidFill>
@@ -5529,10 +6035,9 @@
               <a:t>4.3. </a:t>
             </a:r>
             <a:r>
-              <a:rPr lang="ko-KR" altLang="en-US" sz="2000" dirty="0" err="1"/>
-              <a:t>키설정</a:t>
-            </a:r>
-            <a:endParaRPr lang="ko-KR" altLang="en-US" sz="2000" dirty="0"/>
+              <a:rPr lang="ko-KR" altLang="en-US" sz="2000" dirty="0"/>
+              <a:t>키 설정</a:t>
+            </a:r>
           </a:p>
         </p:txBody>
       </p:sp>

--- a/_문서/_Project Entropy 기획문서.pptx
+++ b/_문서/_Project Entropy 기획문서.pptx
@@ -18,6 +18,11 @@
     <p:sldId id="267" r:id="rId12"/>
     <p:sldId id="268" r:id="rId13"/>
     <p:sldId id="269" r:id="rId14"/>
+    <p:sldId id="270" r:id="rId15"/>
+    <p:sldId id="271" r:id="rId16"/>
+    <p:sldId id="272" r:id="rId17"/>
+    <p:sldId id="273" r:id="rId18"/>
+    <p:sldId id="274" r:id="rId19"/>
   </p:sldIdLst>
   <p:sldSz cx="12192000" cy="6858000"/>
   <p:notesSz cx="6858000" cy="9144000"/>
@@ -4168,7 +4173,7 @@
               <a:t>/</a:t>
             </a:r>
             <a:r>
-              <a:rPr lang="ko-KR" altLang="en-US" sz="2000"/>
+              <a:rPr lang="ko-KR" altLang="en-US" sz="2000" dirty="0"/>
               <a:t>덱 컨셉</a:t>
             </a:r>
             <a:endParaRPr lang="en-US" altLang="ko-KR" sz="2000" dirty="0"/>
@@ -4179,6 +4184,1357 @@
     <p:extLst>
       <p:ext uri="{BB962C8B-B14F-4D97-AF65-F5344CB8AC3E}">
         <p14:creationId xmlns:p14="http://schemas.microsoft.com/office/powerpoint/2010/main" val="1226688366"/>
+      </p:ext>
+    </p:extLst>
+  </p:cSld>
+  <p:clrMapOvr>
+    <a:masterClrMapping/>
+  </p:clrMapOvr>
+</p:sld>
+</file>
+
+<file path=ppt/slides/slide14.xml><?xml version="1.0" encoding="utf-8"?>
+<p:sld xmlns:a="http://schemas.openxmlformats.org/drawingml/2006/main" xmlns:r="http://schemas.openxmlformats.org/officeDocument/2006/relationships" xmlns:p="http://schemas.openxmlformats.org/presentationml/2006/main">
+  <p:cSld>
+    <p:spTree>
+      <p:nvGrpSpPr>
+        <p:cNvPr id="1" name="">
+          <a:extLst>
+            <a:ext uri="{FF2B5EF4-FFF2-40B4-BE49-F238E27FC236}">
+              <a16:creationId xmlns:a16="http://schemas.microsoft.com/office/drawing/2014/main" id="{DD80843A-3304-6892-ACF5-C65B740AD7B9}"/>
+            </a:ext>
+          </a:extLst>
+        </p:cNvPr>
+        <p:cNvGrpSpPr/>
+        <p:nvPr/>
+      </p:nvGrpSpPr>
+      <p:grpSpPr>
+        <a:xfrm>
+          <a:off x="0" y="0"/>
+          <a:ext cx="0" cy="0"/>
+          <a:chOff x="0" y="0"/>
+          <a:chExt cx="0" cy="0"/>
+        </a:xfrm>
+      </p:grpSpPr>
+      <p:sp>
+        <p:nvSpPr>
+          <p:cNvPr id="2" name="제목 1">
+            <a:extLst>
+              <a:ext uri="{FF2B5EF4-FFF2-40B4-BE49-F238E27FC236}">
+                <a16:creationId xmlns:a16="http://schemas.microsoft.com/office/drawing/2014/main" id="{1F5A207B-4364-CBC0-A6A3-4A1161AD2684}"/>
+              </a:ext>
+            </a:extLst>
+          </p:cNvPr>
+          <p:cNvSpPr>
+            <a:spLocks noGrp="1"/>
+          </p:cNvSpPr>
+          <p:nvPr>
+            <p:ph type="title"/>
+          </p:nvPr>
+        </p:nvSpPr>
+        <p:spPr/>
+        <p:txBody>
+          <a:bodyPr/>
+          <a:lstStyle/>
+          <a:p>
+            <a:r>
+              <a:rPr lang="en-US" altLang="ko-KR" dirty="0"/>
+              <a:t>5.1. </a:t>
+            </a:r>
+            <a:r>
+              <a:rPr lang="ko-KR" altLang="en-US" dirty="0"/>
+              <a:t>행동력 </a:t>
+            </a:r>
+            <a:r>
+              <a:rPr lang="en-US" altLang="ko-KR" dirty="0"/>
+              <a:t>(AP) </a:t>
+            </a:r>
+            <a:r>
+              <a:rPr lang="ko-KR" altLang="en-US" dirty="0"/>
+              <a:t>규칙</a:t>
+            </a:r>
+          </a:p>
+        </p:txBody>
+      </p:sp>
+      <p:sp>
+        <p:nvSpPr>
+          <p:cNvPr id="3" name="내용 개체 틀 2">
+            <a:extLst>
+              <a:ext uri="{FF2B5EF4-FFF2-40B4-BE49-F238E27FC236}">
+                <a16:creationId xmlns:a16="http://schemas.microsoft.com/office/drawing/2014/main" id="{A4923786-BE50-22F0-8BE4-74AA14DB8F40}"/>
+              </a:ext>
+            </a:extLst>
+          </p:cNvPr>
+          <p:cNvSpPr>
+            <a:spLocks noGrp="1"/>
+          </p:cNvSpPr>
+          <p:nvPr>
+            <p:ph idx="1"/>
+          </p:nvPr>
+        </p:nvSpPr>
+        <p:spPr/>
+        <p:txBody>
+          <a:bodyPr>
+            <a:normAutofit/>
+          </a:bodyPr>
+          <a:lstStyle/>
+          <a:p>
+            <a:pPr>
+              <a:lnSpc>
+                <a:spcPct val="150000"/>
+              </a:lnSpc>
+            </a:pPr>
+            <a:r>
+              <a:rPr lang="ko-KR" altLang="ko-KR" sz="2000" dirty="0"/>
+              <a:t>플레이어와 적은 이동 및 스킬 사용에 소모되는 'AP(행동력)’</a:t>
+            </a:r>
+            <a:r>
+              <a:rPr lang="ko-KR" altLang="ko-KR" sz="2000" dirty="0" err="1"/>
+              <a:t>를</a:t>
+            </a:r>
+            <a:r>
+              <a:rPr lang="ko-KR" altLang="ko-KR" sz="2000" dirty="0"/>
+              <a:t> 공통 자원으로 </a:t>
+            </a:r>
+            <a:br>
+              <a:rPr lang="en-US" altLang="ko-KR" sz="2000" dirty="0"/>
+            </a:br>
+            <a:r>
+              <a:rPr lang="ko-KR" altLang="ko-KR" sz="2000" dirty="0"/>
+              <a:t>사용</a:t>
+            </a:r>
+            <a:r>
+              <a:rPr lang="ko-KR" altLang="en-US" sz="2000" dirty="0"/>
+              <a:t>한다</a:t>
+            </a:r>
+            <a:r>
+              <a:rPr lang="ko-KR" altLang="ko-KR" sz="2000" dirty="0"/>
+              <a:t>. </a:t>
+            </a:r>
+            <a:endParaRPr lang="en-US" altLang="ko-KR" sz="2000" dirty="0"/>
+          </a:p>
+          <a:p>
+            <a:pPr>
+              <a:lnSpc>
+                <a:spcPct val="150000"/>
+              </a:lnSpc>
+            </a:pPr>
+            <a:r>
+              <a:rPr lang="ko-KR" altLang="en-US" sz="2000" dirty="0"/>
+              <a:t>최대 이동 사거리</a:t>
+            </a:r>
+            <a:r>
+              <a:rPr lang="en-US" altLang="ko-KR" sz="2000" dirty="0"/>
+              <a:t>(</a:t>
+            </a:r>
+            <a:r>
+              <a:rPr lang="ko-KR" altLang="en-US" sz="2000" dirty="0"/>
+              <a:t>스탯</a:t>
+            </a:r>
+            <a:r>
+              <a:rPr lang="en-US" altLang="ko-KR" sz="2000" dirty="0"/>
+              <a:t>) </a:t>
+            </a:r>
+            <a:r>
+              <a:rPr lang="ko-KR" altLang="en-US" sz="2000" dirty="0"/>
+              <a:t>만큼의 이동마다 </a:t>
+            </a:r>
+            <a:r>
+              <a:rPr lang="en-US" altLang="ko-KR" sz="2000" dirty="0"/>
+              <a:t>1AP</a:t>
+            </a:r>
+            <a:r>
+              <a:rPr lang="ko-KR" altLang="en-US" sz="2000" dirty="0"/>
+              <a:t>가 소모되며</a:t>
+            </a:r>
+            <a:r>
+              <a:rPr lang="en-US" altLang="ko-KR" sz="2000" dirty="0"/>
+              <a:t>,</a:t>
+            </a:r>
+            <a:r>
+              <a:rPr lang="ko-KR" altLang="en-US" sz="2000" dirty="0"/>
+              <a:t> </a:t>
+            </a:r>
+            <a:br>
+              <a:rPr lang="en-US" altLang="ko-KR" sz="2000" dirty="0"/>
+            </a:br>
+            <a:r>
+              <a:rPr lang="ko-KR" altLang="en-US" sz="2000" dirty="0"/>
+              <a:t>마법</a:t>
+            </a:r>
+            <a:r>
+              <a:rPr lang="en-US" altLang="ko-KR" sz="2000" dirty="0"/>
+              <a:t>(</a:t>
+            </a:r>
+            <a:r>
+              <a:rPr lang="ko-KR" altLang="en-US" sz="2000" dirty="0"/>
+              <a:t>카드</a:t>
+            </a:r>
+            <a:r>
+              <a:rPr lang="en-US" altLang="ko-KR" sz="2000" dirty="0"/>
+              <a:t>) </a:t>
+            </a:r>
+            <a:r>
+              <a:rPr lang="ko-KR" altLang="en-US" sz="2000" dirty="0"/>
+              <a:t>사용 시에도 카드별 </a:t>
+            </a:r>
+            <a:r>
+              <a:rPr lang="en-US" altLang="ko-KR" sz="2000" dirty="0"/>
+              <a:t>AP</a:t>
+            </a:r>
+            <a:r>
+              <a:rPr lang="ko-KR" altLang="en-US" sz="2000" dirty="0"/>
+              <a:t>를 소모한다</a:t>
+            </a:r>
+            <a:r>
+              <a:rPr lang="en-US" altLang="ko-KR" sz="2000" dirty="0"/>
+              <a:t>.</a:t>
+            </a:r>
+          </a:p>
+        </p:txBody>
+      </p:sp>
+    </p:spTree>
+    <p:extLst>
+      <p:ext uri="{BB962C8B-B14F-4D97-AF65-F5344CB8AC3E}">
+        <p14:creationId xmlns:p14="http://schemas.microsoft.com/office/powerpoint/2010/main" val="1765079539"/>
+      </p:ext>
+    </p:extLst>
+  </p:cSld>
+  <p:clrMapOvr>
+    <a:masterClrMapping/>
+  </p:clrMapOvr>
+</p:sld>
+</file>
+
+<file path=ppt/slides/slide15.xml><?xml version="1.0" encoding="utf-8"?>
+<p:sld xmlns:a="http://schemas.openxmlformats.org/drawingml/2006/main" xmlns:r="http://schemas.openxmlformats.org/officeDocument/2006/relationships" xmlns:p="http://schemas.openxmlformats.org/presentationml/2006/main">
+  <p:cSld>
+    <p:spTree>
+      <p:nvGrpSpPr>
+        <p:cNvPr id="1" name="">
+          <a:extLst>
+            <a:ext uri="{FF2B5EF4-FFF2-40B4-BE49-F238E27FC236}">
+              <a16:creationId xmlns:a16="http://schemas.microsoft.com/office/drawing/2014/main" id="{9A4FF5A0-ECEA-7902-DC88-36B2460BB5BE}"/>
+            </a:ext>
+          </a:extLst>
+        </p:cNvPr>
+        <p:cNvGrpSpPr/>
+        <p:nvPr/>
+      </p:nvGrpSpPr>
+      <p:grpSpPr>
+        <a:xfrm>
+          <a:off x="0" y="0"/>
+          <a:ext cx="0" cy="0"/>
+          <a:chOff x="0" y="0"/>
+          <a:chExt cx="0" cy="0"/>
+        </a:xfrm>
+      </p:grpSpPr>
+      <p:sp>
+        <p:nvSpPr>
+          <p:cNvPr id="2" name="제목 1">
+            <a:extLst>
+              <a:ext uri="{FF2B5EF4-FFF2-40B4-BE49-F238E27FC236}">
+                <a16:creationId xmlns:a16="http://schemas.microsoft.com/office/drawing/2014/main" id="{22EC4620-0D17-F93A-EE80-88F458A35DCE}"/>
+              </a:ext>
+            </a:extLst>
+          </p:cNvPr>
+          <p:cNvSpPr>
+            <a:spLocks noGrp="1"/>
+          </p:cNvSpPr>
+          <p:nvPr>
+            <p:ph type="title"/>
+          </p:nvPr>
+        </p:nvSpPr>
+        <p:spPr/>
+        <p:txBody>
+          <a:bodyPr/>
+          <a:lstStyle/>
+          <a:p>
+            <a:r>
+              <a:rPr lang="en-US" altLang="ko-KR" dirty="0"/>
+              <a:t>5.2. </a:t>
+            </a:r>
+            <a:r>
+              <a:rPr lang="ko-KR" altLang="en-US" dirty="0"/>
+              <a:t>턴 흐름 및 적 </a:t>
+            </a:r>
+            <a:r>
+              <a:rPr lang="en-US" altLang="ko-KR" dirty="0"/>
+              <a:t>AI</a:t>
+            </a:r>
+            <a:endParaRPr lang="ko-KR" altLang="en-US" dirty="0"/>
+          </a:p>
+        </p:txBody>
+      </p:sp>
+      <p:sp>
+        <p:nvSpPr>
+          <p:cNvPr id="3" name="내용 개체 틀 2">
+            <a:extLst>
+              <a:ext uri="{FF2B5EF4-FFF2-40B4-BE49-F238E27FC236}">
+                <a16:creationId xmlns:a16="http://schemas.microsoft.com/office/drawing/2014/main" id="{D3E3CEC6-5BEA-B111-6FD4-8FAC8B6B4CBD}"/>
+              </a:ext>
+            </a:extLst>
+          </p:cNvPr>
+          <p:cNvSpPr>
+            <a:spLocks noGrp="1"/>
+          </p:cNvSpPr>
+          <p:nvPr>
+            <p:ph idx="1"/>
+          </p:nvPr>
+        </p:nvSpPr>
+        <p:spPr/>
+        <p:txBody>
+          <a:bodyPr>
+            <a:normAutofit/>
+          </a:bodyPr>
+          <a:lstStyle/>
+          <a:p>
+            <a:pPr>
+              <a:lnSpc>
+                <a:spcPct val="150000"/>
+              </a:lnSpc>
+            </a:pPr>
+            <a:r>
+              <a:rPr lang="ko-KR" altLang="ko-KR" sz="2000" b="1" dirty="0"/>
+              <a:t>플레이어</a:t>
+            </a:r>
+            <a:r>
+              <a:rPr lang="en-US" altLang="ko-KR" sz="2000" b="1" dirty="0"/>
+              <a:t> </a:t>
+            </a:r>
+            <a:r>
+              <a:rPr lang="ko-KR" altLang="en-US" sz="2000" b="1" dirty="0"/>
+              <a:t>턴</a:t>
+            </a:r>
+            <a:r>
+              <a:rPr lang="en-US" altLang="ko-KR" sz="2000" b="1" dirty="0"/>
+              <a:t>: </a:t>
+            </a:r>
+            <a:br>
+              <a:rPr lang="en-US" altLang="ko-KR" sz="2000" b="1" dirty="0"/>
+            </a:br>
+            <a:r>
+              <a:rPr lang="ko-KR" altLang="en-US" sz="2000" dirty="0"/>
+              <a:t>매 턴 기본 드로우를 획득하고</a:t>
+            </a:r>
+            <a:r>
+              <a:rPr lang="en-US" altLang="ko-KR" sz="2000" dirty="0"/>
+              <a:t>, AP</a:t>
+            </a:r>
+            <a:r>
+              <a:rPr lang="ko-KR" altLang="en-US" sz="2000" dirty="0"/>
+              <a:t>를 소모해 마법을 사용하거나 이동한다</a:t>
+            </a:r>
+            <a:r>
+              <a:rPr lang="en-US" altLang="ko-KR" sz="2000" dirty="0"/>
+              <a:t>.</a:t>
+            </a:r>
+            <a:br>
+              <a:rPr lang="en-US" altLang="ko-KR" sz="2000" dirty="0"/>
+            </a:br>
+            <a:r>
+              <a:rPr lang="ko-KR" altLang="en-US" sz="2000" dirty="0"/>
+              <a:t>턴 종료 시 들고 있던 카드를 버린다</a:t>
+            </a:r>
+            <a:r>
+              <a:rPr lang="en-US" altLang="ko-KR" sz="2000" dirty="0"/>
+              <a:t>.</a:t>
+            </a:r>
+          </a:p>
+          <a:p>
+            <a:pPr marL="0" indent="0">
+              <a:lnSpc>
+                <a:spcPct val="150000"/>
+              </a:lnSpc>
+              <a:buNone/>
+            </a:pPr>
+            <a:endParaRPr lang="en-US" altLang="ko-KR" sz="2000" dirty="0"/>
+          </a:p>
+          <a:p>
+            <a:pPr>
+              <a:lnSpc>
+                <a:spcPct val="150000"/>
+              </a:lnSpc>
+            </a:pPr>
+            <a:r>
+              <a:rPr lang="ko-KR" altLang="en-US" sz="2000" b="1" dirty="0"/>
+              <a:t>적 턴</a:t>
+            </a:r>
+            <a:r>
+              <a:rPr lang="en-US" altLang="ko-KR" sz="2000" b="1" dirty="0"/>
+              <a:t>: </a:t>
+            </a:r>
+            <a:br>
+              <a:rPr lang="en-US" altLang="ko-KR" sz="2000" b="1" dirty="0"/>
+            </a:br>
+            <a:r>
+              <a:rPr lang="ko-KR" altLang="en-US" sz="2000" dirty="0"/>
+              <a:t>적들은 고유한 행동 패턴</a:t>
+            </a:r>
+            <a:r>
+              <a:rPr lang="en-US" altLang="ko-KR" sz="2000" dirty="0"/>
+              <a:t>(</a:t>
+            </a:r>
+            <a:r>
+              <a:rPr lang="ko-KR" altLang="en-US" sz="2000" dirty="0"/>
+              <a:t>스킬 셋</a:t>
+            </a:r>
+            <a:r>
+              <a:rPr lang="en-US" altLang="ko-KR" sz="2000" dirty="0"/>
+              <a:t>)</a:t>
+            </a:r>
+            <a:r>
+              <a:rPr lang="ko-KR" altLang="en-US" sz="2000" dirty="0"/>
+              <a:t>을 가지며</a:t>
+            </a:r>
+            <a:r>
+              <a:rPr lang="en-US" altLang="ko-KR" sz="2000" dirty="0"/>
+              <a:t>, </a:t>
+            </a:r>
+            <a:r>
+              <a:rPr lang="ko-KR" altLang="en-US" sz="2000" dirty="0"/>
+              <a:t>플레이어처럼 남은 </a:t>
+            </a:r>
+            <a:r>
+              <a:rPr lang="en-US" altLang="ko-KR" sz="2000" dirty="0"/>
+              <a:t>AP</a:t>
+            </a:r>
+            <a:r>
+              <a:rPr lang="ko-KR" altLang="en-US" sz="2000" dirty="0"/>
+              <a:t>를 주체적으로 운용한다</a:t>
+            </a:r>
+            <a:r>
+              <a:rPr lang="en-US" altLang="ko-KR" sz="2000" dirty="0"/>
+              <a:t>. </a:t>
+            </a:r>
+            <a:r>
+              <a:rPr lang="ko-KR" altLang="en-US" sz="2000" dirty="0"/>
+              <a:t>타겟이 사거리 내에 올 때까지 </a:t>
+            </a:r>
+            <a:r>
+              <a:rPr lang="en-US" altLang="ko-KR" sz="2000" dirty="0"/>
+              <a:t>AP</a:t>
+            </a:r>
+            <a:r>
+              <a:rPr lang="ko-KR" altLang="en-US" sz="2000" dirty="0"/>
+              <a:t>를 소모하여 이동한 뒤</a:t>
+            </a:r>
+            <a:r>
+              <a:rPr lang="en-US" altLang="ko-KR" sz="2000" dirty="0"/>
+              <a:t>, </a:t>
+            </a:r>
+            <a:r>
+              <a:rPr lang="ko-KR" altLang="en-US" sz="2000" dirty="0"/>
+              <a:t>조건을 만족하면 공격 등 패턴을 수행한다</a:t>
+            </a:r>
+            <a:r>
+              <a:rPr lang="en-US" altLang="ko-KR" sz="2000" dirty="0"/>
+              <a:t>.</a:t>
+            </a:r>
+          </a:p>
+        </p:txBody>
+      </p:sp>
+    </p:spTree>
+    <p:extLst>
+      <p:ext uri="{BB962C8B-B14F-4D97-AF65-F5344CB8AC3E}">
+        <p14:creationId xmlns:p14="http://schemas.microsoft.com/office/powerpoint/2010/main" val="3879003933"/>
+      </p:ext>
+    </p:extLst>
+  </p:cSld>
+  <p:clrMapOvr>
+    <a:masterClrMapping/>
+  </p:clrMapOvr>
+</p:sld>
+</file>
+
+<file path=ppt/slides/slide16.xml><?xml version="1.0" encoding="utf-8"?>
+<p:sld xmlns:a="http://schemas.openxmlformats.org/drawingml/2006/main" xmlns:r="http://schemas.openxmlformats.org/officeDocument/2006/relationships" xmlns:p="http://schemas.openxmlformats.org/presentationml/2006/main">
+  <p:cSld>
+    <p:spTree>
+      <p:nvGrpSpPr>
+        <p:cNvPr id="1" name="">
+          <a:extLst>
+            <a:ext uri="{FF2B5EF4-FFF2-40B4-BE49-F238E27FC236}">
+              <a16:creationId xmlns:a16="http://schemas.microsoft.com/office/drawing/2014/main" id="{C1588A2E-35E9-C1A0-5965-DF06E2D5C693}"/>
+            </a:ext>
+          </a:extLst>
+        </p:cNvPr>
+        <p:cNvGrpSpPr/>
+        <p:nvPr/>
+      </p:nvGrpSpPr>
+      <p:grpSpPr>
+        <a:xfrm>
+          <a:off x="0" y="0"/>
+          <a:ext cx="0" cy="0"/>
+          <a:chOff x="0" y="0"/>
+          <a:chExt cx="0" cy="0"/>
+        </a:xfrm>
+      </p:grpSpPr>
+      <p:sp>
+        <p:nvSpPr>
+          <p:cNvPr id="2" name="제목 1">
+            <a:extLst>
+              <a:ext uri="{FF2B5EF4-FFF2-40B4-BE49-F238E27FC236}">
+                <a16:creationId xmlns:a16="http://schemas.microsoft.com/office/drawing/2014/main" id="{B9CAC2A0-484D-F1DE-90DB-EDA6A8FC83B6}"/>
+              </a:ext>
+            </a:extLst>
+          </p:cNvPr>
+          <p:cNvSpPr>
+            <a:spLocks noGrp="1"/>
+          </p:cNvSpPr>
+          <p:nvPr>
+            <p:ph type="title"/>
+          </p:nvPr>
+        </p:nvSpPr>
+        <p:spPr/>
+        <p:txBody>
+          <a:bodyPr/>
+          <a:lstStyle/>
+          <a:p>
+            <a:r>
+              <a:rPr lang="en-US" altLang="ko-KR" dirty="0"/>
+              <a:t>5.3. </a:t>
+            </a:r>
+            <a:r>
+              <a:rPr lang="ko-KR" altLang="en-US" dirty="0"/>
+              <a:t>지형 변화 및 연쇄 반응</a:t>
+            </a:r>
+          </a:p>
+        </p:txBody>
+      </p:sp>
+      <p:sp>
+        <p:nvSpPr>
+          <p:cNvPr id="3" name="내용 개체 틀 2">
+            <a:extLst>
+              <a:ext uri="{FF2B5EF4-FFF2-40B4-BE49-F238E27FC236}">
+                <a16:creationId xmlns:a16="http://schemas.microsoft.com/office/drawing/2014/main" id="{794568E4-8197-54E1-CBA2-ED1661230595}"/>
+              </a:ext>
+            </a:extLst>
+          </p:cNvPr>
+          <p:cNvSpPr>
+            <a:spLocks noGrp="1"/>
+          </p:cNvSpPr>
+          <p:nvPr>
+            <p:ph idx="1"/>
+          </p:nvPr>
+        </p:nvSpPr>
+        <p:spPr/>
+        <p:txBody>
+          <a:bodyPr>
+            <a:normAutofit/>
+          </a:bodyPr>
+          <a:lstStyle/>
+          <a:p>
+            <a:pPr>
+              <a:lnSpc>
+                <a:spcPct val="150000"/>
+              </a:lnSpc>
+            </a:pPr>
+            <a:r>
+              <a:rPr lang="ko-KR" altLang="en-US" sz="2000" dirty="0">
+                <a:latin typeface="+mn-ea"/>
+              </a:rPr>
+              <a:t>마법을 사용하면 그리드 위에 화염</a:t>
+            </a:r>
+            <a:r>
+              <a:rPr lang="en-US" altLang="ko-KR" sz="2000" dirty="0">
+                <a:latin typeface="+mn-ea"/>
+              </a:rPr>
+              <a:t>(</a:t>
+            </a:r>
+            <a:r>
+              <a:rPr lang="ko-KR" altLang="en-US" sz="2000" dirty="0">
+                <a:latin typeface="+mn-ea"/>
+              </a:rPr>
+              <a:t>지속피해</a:t>
+            </a:r>
+            <a:r>
+              <a:rPr lang="en-US" altLang="ko-KR" sz="2000" dirty="0">
+                <a:latin typeface="+mn-ea"/>
+              </a:rPr>
+              <a:t>), </a:t>
+            </a:r>
+            <a:r>
+              <a:rPr lang="ko-KR" altLang="en-US" sz="2000" dirty="0">
+                <a:latin typeface="+mn-ea"/>
+              </a:rPr>
+              <a:t>물</a:t>
+            </a:r>
+            <a:r>
+              <a:rPr lang="en-US" altLang="ko-KR" sz="2000" dirty="0">
+                <a:latin typeface="+mn-ea"/>
+              </a:rPr>
+              <a:t>(</a:t>
+            </a:r>
+            <a:r>
+              <a:rPr lang="ko-KR" altLang="en-US" sz="2000" dirty="0" err="1">
+                <a:latin typeface="+mn-ea"/>
+              </a:rPr>
+              <a:t>이동감속</a:t>
+            </a:r>
+            <a:r>
+              <a:rPr lang="en-US" altLang="ko-KR" sz="2000" dirty="0">
+                <a:latin typeface="+mn-ea"/>
+              </a:rPr>
+              <a:t>), </a:t>
+            </a:r>
+            <a:r>
+              <a:rPr lang="ko-KR" altLang="en-US" sz="2000" dirty="0">
+                <a:latin typeface="+mn-ea"/>
+              </a:rPr>
+              <a:t>번개</a:t>
+            </a:r>
+            <a:r>
+              <a:rPr lang="en-US" altLang="ko-KR" sz="2000" dirty="0">
+                <a:latin typeface="+mn-ea"/>
+              </a:rPr>
+              <a:t>(</a:t>
+            </a:r>
+            <a:r>
+              <a:rPr lang="ko-KR" altLang="en-US" sz="2000" dirty="0">
+                <a:latin typeface="+mn-ea"/>
+              </a:rPr>
+              <a:t>감전</a:t>
+            </a:r>
+            <a:r>
+              <a:rPr lang="en-US" altLang="ko-KR" sz="2000" dirty="0">
+                <a:latin typeface="+mn-ea"/>
+              </a:rPr>
+              <a:t>), </a:t>
+            </a:r>
+            <a:br>
+              <a:rPr lang="en-US" altLang="ko-KR" sz="2000" dirty="0">
+                <a:latin typeface="+mn-ea"/>
+              </a:rPr>
+            </a:br>
+            <a:r>
+              <a:rPr lang="ko-KR" altLang="en-US" sz="2000" dirty="0">
+                <a:latin typeface="+mn-ea"/>
+              </a:rPr>
+              <a:t>얼음</a:t>
+            </a:r>
+            <a:r>
+              <a:rPr lang="en-US" altLang="ko-KR" sz="2000" dirty="0">
+                <a:latin typeface="+mn-ea"/>
+              </a:rPr>
+              <a:t>(</a:t>
+            </a:r>
+            <a:r>
+              <a:rPr lang="ko-KR" altLang="en-US" sz="2000" dirty="0">
+                <a:latin typeface="+mn-ea"/>
+              </a:rPr>
+              <a:t>미끄러짐 및 행동 불능</a:t>
+            </a:r>
+            <a:r>
+              <a:rPr lang="en-US" altLang="ko-KR" sz="2000" dirty="0">
+                <a:latin typeface="+mn-ea"/>
+              </a:rPr>
+              <a:t>) </a:t>
+            </a:r>
+            <a:r>
+              <a:rPr lang="ko-KR" altLang="en-US" sz="2000" dirty="0">
+                <a:latin typeface="+mn-ea"/>
+              </a:rPr>
+              <a:t>등의 </a:t>
+            </a:r>
+            <a:r>
+              <a:rPr lang="ko-KR" altLang="en-US" sz="2000" b="1" dirty="0">
+                <a:latin typeface="+mn-ea"/>
+              </a:rPr>
+              <a:t>속성 흔적</a:t>
+            </a:r>
+            <a:r>
+              <a:rPr lang="ko-KR" altLang="en-US" sz="2000" dirty="0">
+                <a:latin typeface="+mn-ea"/>
+              </a:rPr>
+              <a:t>이 남는다</a:t>
+            </a:r>
+            <a:r>
+              <a:rPr lang="en-US" altLang="ko-KR" sz="2000" dirty="0">
+                <a:latin typeface="+mn-ea"/>
+              </a:rPr>
+              <a:t>.</a:t>
+            </a:r>
+          </a:p>
+          <a:p>
+            <a:pPr>
+              <a:lnSpc>
+                <a:spcPct val="150000"/>
+              </a:lnSpc>
+            </a:pPr>
+            <a:r>
+              <a:rPr lang="ko-KR" altLang="en-US" sz="2000" dirty="0">
+                <a:latin typeface="+mn-ea"/>
+              </a:rPr>
+              <a:t>속성 간 상호작용이 일어난다</a:t>
+            </a:r>
+            <a:r>
+              <a:rPr lang="en-US" altLang="ko-KR" sz="2000" dirty="0">
+                <a:latin typeface="+mn-ea"/>
+              </a:rPr>
+              <a:t>. </a:t>
+            </a:r>
+            <a:br>
+              <a:rPr lang="en-US" altLang="ko-KR" sz="2000" dirty="0">
+                <a:latin typeface="+mn-ea"/>
+              </a:rPr>
+            </a:br>
+            <a:r>
+              <a:rPr lang="ko-KR" altLang="ko-KR" sz="2000" dirty="0">
+                <a:latin typeface="+mn-ea"/>
+              </a:rPr>
+              <a:t>물 타일에 번개 마법이 맞으면 연결된 물 타일 전체에 '연쇄 감전’</a:t>
+            </a:r>
+            <a:r>
+              <a:rPr lang="en-US" altLang="ko-KR" sz="2000" dirty="0">
+                <a:latin typeface="+mn-ea"/>
+              </a:rPr>
+              <a:t> </a:t>
+            </a:r>
+            <a:r>
+              <a:rPr lang="ko-KR" altLang="ko-KR" sz="2000" dirty="0">
+                <a:latin typeface="+mn-ea"/>
+              </a:rPr>
+              <a:t>이 일어나고, </a:t>
+            </a:r>
+            <a:br>
+              <a:rPr lang="en-US" altLang="ko-KR" sz="2000" dirty="0">
+                <a:latin typeface="+mn-ea"/>
+              </a:rPr>
+            </a:br>
+            <a:r>
+              <a:rPr lang="ko-KR" altLang="ko-KR" sz="2000" dirty="0">
+                <a:latin typeface="+mn-ea"/>
+              </a:rPr>
+              <a:t>화염과 물이 만나면 시야를 방해하는 '증발(안개)' 지형이 1턴 간 생성됩니다. </a:t>
+            </a:r>
+            <a:endParaRPr lang="en-US" altLang="ko-KR" sz="2000" dirty="0">
+              <a:latin typeface="+mn-ea"/>
+            </a:endParaRPr>
+          </a:p>
+          <a:p>
+            <a:pPr>
+              <a:lnSpc>
+                <a:spcPct val="150000"/>
+              </a:lnSpc>
+            </a:pPr>
+            <a:r>
+              <a:rPr lang="ko-KR" altLang="en-US" sz="2000" dirty="0">
+                <a:latin typeface="+mn-ea"/>
+              </a:rPr>
+              <a:t>밀치기 효과를 통해 적을 벽이나 생성된 장애물에 부딪히게 하면 </a:t>
+            </a:r>
+            <a:br>
+              <a:rPr lang="en-US" altLang="ko-KR" sz="2000" dirty="0">
+                <a:latin typeface="+mn-ea"/>
+              </a:rPr>
+            </a:br>
+            <a:r>
+              <a:rPr lang="en-US" altLang="ko-KR" sz="2000" dirty="0">
+                <a:latin typeface="+mn-ea"/>
+              </a:rPr>
+              <a:t>‘</a:t>
+            </a:r>
+            <a:r>
+              <a:rPr lang="ko-KR" altLang="en-US" sz="2000" dirty="0">
+                <a:latin typeface="+mn-ea"/>
+              </a:rPr>
+              <a:t>기절</a:t>
+            </a:r>
+            <a:r>
+              <a:rPr lang="en-US" altLang="ko-KR" sz="2000" dirty="0">
+                <a:latin typeface="+mn-ea"/>
+              </a:rPr>
+              <a:t>’ </a:t>
+            </a:r>
+            <a:r>
+              <a:rPr lang="ko-KR" altLang="en-US" sz="2000" dirty="0">
+                <a:latin typeface="+mn-ea"/>
+              </a:rPr>
+              <a:t>상태이상에 빠진다</a:t>
+            </a:r>
+            <a:endParaRPr lang="en-US" altLang="ko-KR" sz="2000" dirty="0">
+              <a:latin typeface="+mn-ea"/>
+            </a:endParaRPr>
+          </a:p>
+        </p:txBody>
+      </p:sp>
+    </p:spTree>
+    <p:extLst>
+      <p:ext uri="{BB962C8B-B14F-4D97-AF65-F5344CB8AC3E}">
+        <p14:creationId xmlns:p14="http://schemas.microsoft.com/office/powerpoint/2010/main" val="3890946420"/>
+      </p:ext>
+    </p:extLst>
+  </p:cSld>
+  <p:clrMapOvr>
+    <a:masterClrMapping/>
+  </p:clrMapOvr>
+</p:sld>
+</file>
+
+<file path=ppt/slides/slide17.xml><?xml version="1.0" encoding="utf-8"?>
+<p:sld xmlns:a="http://schemas.openxmlformats.org/drawingml/2006/main" xmlns:r="http://schemas.openxmlformats.org/officeDocument/2006/relationships" xmlns:p="http://schemas.openxmlformats.org/presentationml/2006/main">
+  <p:cSld>
+    <p:spTree>
+      <p:nvGrpSpPr>
+        <p:cNvPr id="1" name="">
+          <a:extLst>
+            <a:ext uri="{FF2B5EF4-FFF2-40B4-BE49-F238E27FC236}">
+              <a16:creationId xmlns:a16="http://schemas.microsoft.com/office/drawing/2014/main" id="{4026349B-6A08-20C9-1800-290B77216F0B}"/>
+            </a:ext>
+          </a:extLst>
+        </p:cNvPr>
+        <p:cNvGrpSpPr/>
+        <p:nvPr/>
+      </p:nvGrpSpPr>
+      <p:grpSpPr>
+        <a:xfrm>
+          <a:off x="0" y="0"/>
+          <a:ext cx="0" cy="0"/>
+          <a:chOff x="0" y="0"/>
+          <a:chExt cx="0" cy="0"/>
+        </a:xfrm>
+      </p:grpSpPr>
+      <p:sp>
+        <p:nvSpPr>
+          <p:cNvPr id="2" name="제목 1">
+            <a:extLst>
+              <a:ext uri="{FF2B5EF4-FFF2-40B4-BE49-F238E27FC236}">
+                <a16:creationId xmlns:a16="http://schemas.microsoft.com/office/drawing/2014/main" id="{BB7BAED9-C94A-BE15-D4B2-C863F6BE3114}"/>
+              </a:ext>
+            </a:extLst>
+          </p:cNvPr>
+          <p:cNvSpPr>
+            <a:spLocks noGrp="1"/>
+          </p:cNvSpPr>
+          <p:nvPr>
+            <p:ph type="title"/>
+          </p:nvPr>
+        </p:nvSpPr>
+        <p:spPr/>
+        <p:txBody>
+          <a:bodyPr/>
+          <a:lstStyle/>
+          <a:p>
+            <a:r>
+              <a:rPr lang="en-US" altLang="ko-KR" dirty="0"/>
+              <a:t>5.3. </a:t>
+            </a:r>
+            <a:r>
+              <a:rPr lang="ko-KR" altLang="en-US" dirty="0"/>
+              <a:t>지형 변화 및 연쇄 반응</a:t>
+            </a:r>
+          </a:p>
+        </p:txBody>
+      </p:sp>
+      <p:sp>
+        <p:nvSpPr>
+          <p:cNvPr id="3" name="내용 개체 틀 2">
+            <a:extLst>
+              <a:ext uri="{FF2B5EF4-FFF2-40B4-BE49-F238E27FC236}">
+                <a16:creationId xmlns:a16="http://schemas.microsoft.com/office/drawing/2014/main" id="{AD5EC240-9F6B-F4AE-7F48-B011A32C3201}"/>
+              </a:ext>
+            </a:extLst>
+          </p:cNvPr>
+          <p:cNvSpPr>
+            <a:spLocks noGrp="1"/>
+          </p:cNvSpPr>
+          <p:nvPr>
+            <p:ph idx="1"/>
+          </p:nvPr>
+        </p:nvSpPr>
+        <p:spPr/>
+        <p:txBody>
+          <a:bodyPr>
+            <a:normAutofit/>
+          </a:bodyPr>
+          <a:lstStyle/>
+          <a:p>
+            <a:pPr marL="0" indent="0">
+              <a:lnSpc>
+                <a:spcPct val="150000"/>
+              </a:lnSpc>
+              <a:buNone/>
+            </a:pPr>
+            <a:r>
+              <a:rPr lang="en-US" altLang="ko-KR" sz="2000" dirty="0">
+                <a:latin typeface="+mn-ea"/>
+              </a:rPr>
+              <a:t>&lt;</a:t>
+            </a:r>
+            <a:r>
+              <a:rPr lang="ko-KR" altLang="en-US" sz="2000" dirty="0">
+                <a:latin typeface="+mn-ea"/>
+              </a:rPr>
+              <a:t>지형속성 및 상호작용</a:t>
+            </a:r>
+            <a:r>
+              <a:rPr lang="en-US" altLang="ko-KR" sz="2000" dirty="0">
+                <a:latin typeface="+mn-ea"/>
+              </a:rPr>
+              <a:t>&gt;</a:t>
+            </a:r>
+          </a:p>
+          <a:p>
+            <a:pPr>
+              <a:lnSpc>
+                <a:spcPct val="150000"/>
+              </a:lnSpc>
+              <a:buFontTx/>
+              <a:buChar char="-"/>
+            </a:pPr>
+            <a:r>
+              <a:rPr lang="ko-KR" altLang="en-US" sz="1600" dirty="0">
+                <a:latin typeface="+mn-ea"/>
+              </a:rPr>
+              <a:t>불</a:t>
+            </a:r>
+            <a:endParaRPr lang="en-US" altLang="ko-KR" sz="1600" dirty="0">
+              <a:latin typeface="+mn-ea"/>
+            </a:endParaRPr>
+          </a:p>
+          <a:p>
+            <a:pPr>
+              <a:lnSpc>
+                <a:spcPct val="150000"/>
+              </a:lnSpc>
+              <a:buFontTx/>
+              <a:buChar char="-"/>
+            </a:pPr>
+            <a:r>
+              <a:rPr lang="ko-KR" altLang="en-US" sz="1600" dirty="0">
+                <a:latin typeface="+mn-ea"/>
+              </a:rPr>
+              <a:t>물</a:t>
+            </a:r>
+            <a:endParaRPr lang="en-US" altLang="ko-KR" sz="1600" dirty="0">
+              <a:latin typeface="+mn-ea"/>
+            </a:endParaRPr>
+          </a:p>
+          <a:p>
+            <a:pPr>
+              <a:lnSpc>
+                <a:spcPct val="150000"/>
+              </a:lnSpc>
+              <a:buFontTx/>
+              <a:buChar char="-"/>
+            </a:pPr>
+            <a:r>
+              <a:rPr lang="ko-KR" altLang="en-US" sz="1600" dirty="0">
+                <a:latin typeface="+mn-ea"/>
+              </a:rPr>
+              <a:t>바람</a:t>
+            </a:r>
+            <a:endParaRPr lang="en-US" altLang="ko-KR" sz="1600" dirty="0">
+              <a:latin typeface="+mn-ea"/>
+            </a:endParaRPr>
+          </a:p>
+          <a:p>
+            <a:pPr>
+              <a:lnSpc>
+                <a:spcPct val="150000"/>
+              </a:lnSpc>
+              <a:buFontTx/>
+              <a:buChar char="-"/>
+            </a:pPr>
+            <a:r>
+              <a:rPr lang="ko-KR" altLang="en-US" sz="1600" dirty="0">
+                <a:latin typeface="+mn-ea"/>
+              </a:rPr>
+              <a:t>땅</a:t>
+            </a:r>
+            <a:endParaRPr lang="en-US" altLang="ko-KR" sz="1600" dirty="0">
+              <a:latin typeface="+mn-ea"/>
+            </a:endParaRPr>
+          </a:p>
+          <a:p>
+            <a:pPr>
+              <a:lnSpc>
+                <a:spcPct val="150000"/>
+              </a:lnSpc>
+              <a:buFontTx/>
+              <a:buChar char="-"/>
+            </a:pPr>
+            <a:r>
+              <a:rPr lang="ko-KR" altLang="en-US" sz="1600" dirty="0">
+                <a:latin typeface="+mn-ea"/>
+              </a:rPr>
+              <a:t>번개</a:t>
+            </a:r>
+            <a:endParaRPr lang="en-US" altLang="ko-KR" sz="1600" dirty="0">
+              <a:latin typeface="+mn-ea"/>
+            </a:endParaRPr>
+          </a:p>
+          <a:p>
+            <a:pPr>
+              <a:lnSpc>
+                <a:spcPct val="150000"/>
+              </a:lnSpc>
+              <a:buFontTx/>
+              <a:buChar char="-"/>
+            </a:pPr>
+            <a:r>
+              <a:rPr lang="ko-KR" altLang="en-US" sz="1600" dirty="0">
+                <a:latin typeface="+mn-ea"/>
+              </a:rPr>
+              <a:t>빛</a:t>
+            </a:r>
+            <a:endParaRPr lang="en-US" altLang="ko-KR" sz="1600" dirty="0">
+              <a:latin typeface="+mn-ea"/>
+            </a:endParaRPr>
+          </a:p>
+          <a:p>
+            <a:pPr>
+              <a:lnSpc>
+                <a:spcPct val="150000"/>
+              </a:lnSpc>
+              <a:buFontTx/>
+              <a:buChar char="-"/>
+            </a:pPr>
+            <a:r>
+              <a:rPr lang="ko-KR" altLang="en-US" sz="1600" dirty="0">
+                <a:latin typeface="+mn-ea"/>
+              </a:rPr>
+              <a:t>어둠</a:t>
+            </a:r>
+            <a:endParaRPr lang="en-US" altLang="ko-KR" sz="1600" dirty="0">
+              <a:latin typeface="+mn-ea"/>
+            </a:endParaRPr>
+          </a:p>
+        </p:txBody>
+      </p:sp>
+    </p:spTree>
+    <p:extLst>
+      <p:ext uri="{BB962C8B-B14F-4D97-AF65-F5344CB8AC3E}">
+        <p14:creationId xmlns:p14="http://schemas.microsoft.com/office/powerpoint/2010/main" val="4130579350"/>
+      </p:ext>
+    </p:extLst>
+  </p:cSld>
+  <p:clrMapOvr>
+    <a:masterClrMapping/>
+  </p:clrMapOvr>
+</p:sld>
+</file>
+
+<file path=ppt/slides/slide18.xml><?xml version="1.0" encoding="utf-8"?>
+<p:sld xmlns:a="http://schemas.openxmlformats.org/drawingml/2006/main" xmlns:r="http://schemas.openxmlformats.org/officeDocument/2006/relationships" xmlns:p="http://schemas.openxmlformats.org/presentationml/2006/main">
+  <p:cSld>
+    <p:spTree>
+      <p:nvGrpSpPr>
+        <p:cNvPr id="1" name="">
+          <a:extLst>
+            <a:ext uri="{FF2B5EF4-FFF2-40B4-BE49-F238E27FC236}">
+              <a16:creationId xmlns:a16="http://schemas.microsoft.com/office/drawing/2014/main" id="{C531B589-DD34-DFFC-7FB4-6BC0E5E9679C}"/>
+            </a:ext>
+          </a:extLst>
+        </p:cNvPr>
+        <p:cNvGrpSpPr/>
+        <p:nvPr/>
+      </p:nvGrpSpPr>
+      <p:grpSpPr>
+        <a:xfrm>
+          <a:off x="0" y="0"/>
+          <a:ext cx="0" cy="0"/>
+          <a:chOff x="0" y="0"/>
+          <a:chExt cx="0" cy="0"/>
+        </a:xfrm>
+      </p:grpSpPr>
+      <p:sp>
+        <p:nvSpPr>
+          <p:cNvPr id="2" name="제목 1">
+            <a:extLst>
+              <a:ext uri="{FF2B5EF4-FFF2-40B4-BE49-F238E27FC236}">
+                <a16:creationId xmlns:a16="http://schemas.microsoft.com/office/drawing/2014/main" id="{EFC5A634-FEC1-BEC1-6A0D-A8C9979877B2}"/>
+              </a:ext>
+            </a:extLst>
+          </p:cNvPr>
+          <p:cNvSpPr>
+            <a:spLocks noGrp="1"/>
+          </p:cNvSpPr>
+          <p:nvPr>
+            <p:ph type="title"/>
+          </p:nvPr>
+        </p:nvSpPr>
+        <p:spPr/>
+        <p:txBody>
+          <a:bodyPr/>
+          <a:lstStyle/>
+          <a:p>
+            <a:r>
+              <a:rPr lang="en-US" altLang="ko-KR" dirty="0"/>
+              <a:t>5.4. </a:t>
+            </a:r>
+            <a:r>
+              <a:rPr lang="ko-KR" altLang="en-US" dirty="0"/>
+              <a:t>마법</a:t>
+            </a:r>
+            <a:r>
+              <a:rPr lang="en-US" altLang="ko-KR" dirty="0"/>
+              <a:t>/</a:t>
+            </a:r>
+            <a:r>
+              <a:rPr lang="ko-KR" altLang="en-US" dirty="0"/>
+              <a:t>덱 컨셉</a:t>
+            </a:r>
+          </a:p>
+        </p:txBody>
+      </p:sp>
+      <p:sp>
+        <p:nvSpPr>
+          <p:cNvPr id="3" name="내용 개체 틀 2">
+            <a:extLst>
+              <a:ext uri="{FF2B5EF4-FFF2-40B4-BE49-F238E27FC236}">
+                <a16:creationId xmlns:a16="http://schemas.microsoft.com/office/drawing/2014/main" id="{D7F21CF3-36B4-4EC3-9C65-E660CD83D5E7}"/>
+              </a:ext>
+            </a:extLst>
+          </p:cNvPr>
+          <p:cNvSpPr>
+            <a:spLocks noGrp="1"/>
+          </p:cNvSpPr>
+          <p:nvPr>
+            <p:ph idx="1"/>
+          </p:nvPr>
+        </p:nvSpPr>
+        <p:spPr>
+          <a:xfrm>
+            <a:off x="838200" y="1825624"/>
+            <a:ext cx="10515600" cy="5032375"/>
+          </a:xfrm>
+        </p:spPr>
+        <p:txBody>
+          <a:bodyPr>
+            <a:normAutofit lnSpcReduction="10000"/>
+          </a:bodyPr>
+          <a:lstStyle/>
+          <a:p>
+            <a:pPr>
+              <a:lnSpc>
+                <a:spcPct val="150000"/>
+              </a:lnSpc>
+            </a:pPr>
+            <a:r>
+              <a:rPr lang="ko-KR" altLang="en-US" sz="2000" dirty="0">
+                <a:latin typeface="+mn-ea"/>
+              </a:rPr>
+              <a:t>단일 속성 만으로도 온전히 작동하도록 설계</a:t>
+            </a:r>
+            <a:r>
+              <a:rPr lang="en-US" altLang="ko-KR" sz="2000" dirty="0">
+                <a:latin typeface="+mn-ea"/>
+              </a:rPr>
+              <a:t>/</a:t>
+            </a:r>
+            <a:r>
+              <a:rPr lang="ko-KR" altLang="en-US" sz="2000" dirty="0">
+                <a:latin typeface="+mn-ea"/>
+              </a:rPr>
+              <a:t>개발</a:t>
+            </a:r>
+            <a:endParaRPr lang="en-US" altLang="ko-KR" sz="2000" dirty="0">
+              <a:latin typeface="+mn-ea"/>
+            </a:endParaRPr>
+          </a:p>
+          <a:p>
+            <a:pPr lvl="1">
+              <a:lnSpc>
+                <a:spcPct val="150000"/>
+              </a:lnSpc>
+            </a:pPr>
+            <a:r>
+              <a:rPr lang="ko-KR" altLang="en-US" sz="1600" dirty="0">
+                <a:latin typeface="+mn-ea"/>
+              </a:rPr>
+              <a:t>빌드가 굉장히 많아질 듯 </a:t>
+            </a:r>
+            <a:r>
+              <a:rPr lang="en-US" altLang="ko-KR" sz="1600" dirty="0">
+                <a:latin typeface="+mn-ea"/>
+              </a:rPr>
+              <a:t>(</a:t>
+            </a:r>
+            <a:r>
+              <a:rPr lang="ko-KR" altLang="en-US" sz="1600" dirty="0">
+                <a:latin typeface="+mn-ea"/>
+              </a:rPr>
+              <a:t>단일 덱</a:t>
+            </a:r>
+            <a:r>
+              <a:rPr lang="en-US" altLang="ko-KR" sz="1600" dirty="0">
+                <a:latin typeface="+mn-ea"/>
+              </a:rPr>
+              <a:t>, </a:t>
+            </a:r>
+            <a:r>
+              <a:rPr lang="ko-KR" altLang="en-US" sz="1600" dirty="0">
+                <a:latin typeface="+mn-ea"/>
+              </a:rPr>
+              <a:t>혼합 덱 등</a:t>
+            </a:r>
+            <a:r>
+              <a:rPr lang="en-US" altLang="ko-KR" sz="1600" dirty="0">
+                <a:latin typeface="+mn-ea"/>
+              </a:rPr>
+              <a:t>)</a:t>
+            </a:r>
+          </a:p>
+          <a:p>
+            <a:pPr marL="0" indent="0">
+              <a:lnSpc>
+                <a:spcPct val="150000"/>
+              </a:lnSpc>
+              <a:buNone/>
+            </a:pPr>
+            <a:endParaRPr lang="en-US" altLang="ko-KR" sz="2000" dirty="0">
+              <a:latin typeface="+mn-ea"/>
+            </a:endParaRPr>
+          </a:p>
+          <a:p>
+            <a:pPr>
+              <a:lnSpc>
+                <a:spcPct val="150000"/>
+              </a:lnSpc>
+            </a:pPr>
+            <a:r>
+              <a:rPr lang="ko-KR" altLang="en-US" sz="2000" dirty="0">
+                <a:latin typeface="+mn-ea"/>
+              </a:rPr>
+              <a:t>속성 덱 컨셉</a:t>
+            </a:r>
+            <a:endParaRPr lang="en-US" altLang="ko-KR" sz="2000" dirty="0">
+              <a:latin typeface="+mn-ea"/>
+            </a:endParaRPr>
+          </a:p>
+          <a:p>
+            <a:pPr lvl="1">
+              <a:lnSpc>
+                <a:spcPct val="150000"/>
+              </a:lnSpc>
+            </a:pPr>
+            <a:r>
+              <a:rPr lang="ko-KR" altLang="en-US" sz="1600" dirty="0">
+                <a:latin typeface="+mn-ea"/>
+              </a:rPr>
+              <a:t>불</a:t>
+            </a:r>
+            <a:r>
+              <a:rPr lang="en-US" altLang="ko-KR" sz="1600" dirty="0">
+                <a:latin typeface="+mn-ea"/>
+              </a:rPr>
+              <a:t>	</a:t>
+            </a:r>
+          </a:p>
+          <a:p>
+            <a:pPr lvl="1">
+              <a:lnSpc>
+                <a:spcPct val="150000"/>
+              </a:lnSpc>
+            </a:pPr>
+            <a:r>
+              <a:rPr lang="ko-KR" altLang="en-US" sz="1600" dirty="0">
+                <a:latin typeface="+mn-ea"/>
+              </a:rPr>
+              <a:t>물</a:t>
+            </a:r>
+            <a:endParaRPr lang="en-US" altLang="ko-KR" sz="1600" dirty="0">
+              <a:latin typeface="+mn-ea"/>
+            </a:endParaRPr>
+          </a:p>
+          <a:p>
+            <a:pPr lvl="1">
+              <a:lnSpc>
+                <a:spcPct val="150000"/>
+              </a:lnSpc>
+            </a:pPr>
+            <a:r>
+              <a:rPr lang="ko-KR" altLang="en-US" sz="1600" dirty="0">
+                <a:latin typeface="+mn-ea"/>
+              </a:rPr>
+              <a:t>바람</a:t>
+            </a:r>
+            <a:endParaRPr lang="en-US" altLang="ko-KR" sz="1600" dirty="0">
+              <a:latin typeface="+mn-ea"/>
+            </a:endParaRPr>
+          </a:p>
+          <a:p>
+            <a:pPr lvl="1">
+              <a:lnSpc>
+                <a:spcPct val="150000"/>
+              </a:lnSpc>
+            </a:pPr>
+            <a:r>
+              <a:rPr lang="ko-KR" altLang="en-US" sz="1600" dirty="0">
+                <a:latin typeface="+mn-ea"/>
+              </a:rPr>
+              <a:t>땅</a:t>
+            </a:r>
+            <a:endParaRPr lang="en-US" altLang="ko-KR" sz="1600" dirty="0">
+              <a:latin typeface="+mn-ea"/>
+            </a:endParaRPr>
+          </a:p>
+          <a:p>
+            <a:pPr lvl="1">
+              <a:lnSpc>
+                <a:spcPct val="150000"/>
+              </a:lnSpc>
+            </a:pPr>
+            <a:r>
+              <a:rPr lang="ko-KR" altLang="en-US" sz="1600" dirty="0">
+                <a:latin typeface="+mn-ea"/>
+              </a:rPr>
+              <a:t>번개</a:t>
+            </a:r>
+            <a:endParaRPr lang="en-US" altLang="ko-KR" sz="1600" dirty="0">
+              <a:latin typeface="+mn-ea"/>
+            </a:endParaRPr>
+          </a:p>
+          <a:p>
+            <a:pPr lvl="1">
+              <a:lnSpc>
+                <a:spcPct val="150000"/>
+              </a:lnSpc>
+            </a:pPr>
+            <a:r>
+              <a:rPr lang="ko-KR" altLang="en-US" sz="1600" dirty="0">
+                <a:latin typeface="+mn-ea"/>
+              </a:rPr>
+              <a:t>빛</a:t>
+            </a:r>
+            <a:endParaRPr lang="en-US" altLang="ko-KR" sz="1600" dirty="0">
+              <a:latin typeface="+mn-ea"/>
+            </a:endParaRPr>
+          </a:p>
+          <a:p>
+            <a:pPr lvl="1">
+              <a:lnSpc>
+                <a:spcPct val="150000"/>
+              </a:lnSpc>
+            </a:pPr>
+            <a:r>
+              <a:rPr lang="ko-KR" altLang="en-US" sz="1600" dirty="0">
+                <a:latin typeface="+mn-ea"/>
+              </a:rPr>
+              <a:t>어둠</a:t>
+            </a:r>
+            <a:endParaRPr lang="en-US" altLang="ko-KR" sz="1600" dirty="0">
+              <a:latin typeface="+mn-ea"/>
+            </a:endParaRPr>
+          </a:p>
+          <a:p>
+            <a:pPr>
+              <a:lnSpc>
+                <a:spcPct val="150000"/>
+              </a:lnSpc>
+            </a:pPr>
+            <a:endParaRPr lang="en-US" altLang="ko-KR" sz="1600" dirty="0">
+              <a:latin typeface="+mn-ea"/>
+            </a:endParaRPr>
+          </a:p>
+        </p:txBody>
+      </p:sp>
+    </p:spTree>
+    <p:extLst>
+      <p:ext uri="{BB962C8B-B14F-4D97-AF65-F5344CB8AC3E}">
+        <p14:creationId xmlns:p14="http://schemas.microsoft.com/office/powerpoint/2010/main" val="4066843575"/>
       </p:ext>
     </p:extLst>
   </p:cSld>

--- a/_문서/_Project Entropy 기획문서.pptx
+++ b/_문서/_Project Entropy 기획문서.pptx
@@ -22,7 +22,8 @@
     <p:sldId id="271" r:id="rId16"/>
     <p:sldId id="272" r:id="rId17"/>
     <p:sldId id="273" r:id="rId18"/>
-    <p:sldId id="274" r:id="rId19"/>
+    <p:sldId id="276" r:id="rId19"/>
+    <p:sldId id="274" r:id="rId20"/>
   </p:sldIdLst>
   <p:sldSz cx="12192000" cy="6858000"/>
   <p:notesSz cx="6858000" cy="9144000"/>
@@ -276,7 +277,7 @@
           <a:p>
             <a:fld id="{DECF2A0E-2FBA-4159-9323-C233CC2AF0DB}" type="datetimeFigureOut">
               <a:rPr lang="ko-KR" altLang="en-US" smtClean="0"/>
-              <a:t>2026-07-12</a:t>
+              <a:t>2026-07-13</a:t>
             </a:fld>
             <a:endParaRPr lang="ko-KR" altLang="en-US"/>
           </a:p>
@@ -474,7 +475,7 @@
           <a:p>
             <a:fld id="{DECF2A0E-2FBA-4159-9323-C233CC2AF0DB}" type="datetimeFigureOut">
               <a:rPr lang="ko-KR" altLang="en-US" smtClean="0"/>
-              <a:t>2026-07-12</a:t>
+              <a:t>2026-07-13</a:t>
             </a:fld>
             <a:endParaRPr lang="ko-KR" altLang="en-US"/>
           </a:p>
@@ -682,7 +683,7 @@
           <a:p>
             <a:fld id="{DECF2A0E-2FBA-4159-9323-C233CC2AF0DB}" type="datetimeFigureOut">
               <a:rPr lang="ko-KR" altLang="en-US" smtClean="0"/>
-              <a:t>2026-07-12</a:t>
+              <a:t>2026-07-13</a:t>
             </a:fld>
             <a:endParaRPr lang="ko-KR" altLang="en-US"/>
           </a:p>
@@ -880,7 +881,7 @@
           <a:p>
             <a:fld id="{DECF2A0E-2FBA-4159-9323-C233CC2AF0DB}" type="datetimeFigureOut">
               <a:rPr lang="ko-KR" altLang="en-US" smtClean="0"/>
-              <a:t>2026-07-12</a:t>
+              <a:t>2026-07-13</a:t>
             </a:fld>
             <a:endParaRPr lang="ko-KR" altLang="en-US"/>
           </a:p>
@@ -1155,7 +1156,7 @@
           <a:p>
             <a:fld id="{DECF2A0E-2FBA-4159-9323-C233CC2AF0DB}" type="datetimeFigureOut">
               <a:rPr lang="ko-KR" altLang="en-US" smtClean="0"/>
-              <a:t>2026-07-12</a:t>
+              <a:t>2026-07-13</a:t>
             </a:fld>
             <a:endParaRPr lang="ko-KR" altLang="en-US"/>
           </a:p>
@@ -1420,7 +1421,7 @@
           <a:p>
             <a:fld id="{DECF2A0E-2FBA-4159-9323-C233CC2AF0DB}" type="datetimeFigureOut">
               <a:rPr lang="ko-KR" altLang="en-US" smtClean="0"/>
-              <a:t>2026-07-12</a:t>
+              <a:t>2026-07-13</a:t>
             </a:fld>
             <a:endParaRPr lang="ko-KR" altLang="en-US"/>
           </a:p>
@@ -1832,7 +1833,7 @@
           <a:p>
             <a:fld id="{DECF2A0E-2FBA-4159-9323-C233CC2AF0DB}" type="datetimeFigureOut">
               <a:rPr lang="ko-KR" altLang="en-US" smtClean="0"/>
-              <a:t>2026-07-12</a:t>
+              <a:t>2026-07-13</a:t>
             </a:fld>
             <a:endParaRPr lang="ko-KR" altLang="en-US"/>
           </a:p>
@@ -1973,7 +1974,7 @@
           <a:p>
             <a:fld id="{DECF2A0E-2FBA-4159-9323-C233CC2AF0DB}" type="datetimeFigureOut">
               <a:rPr lang="ko-KR" altLang="en-US" smtClean="0"/>
-              <a:t>2026-07-12</a:t>
+              <a:t>2026-07-13</a:t>
             </a:fld>
             <a:endParaRPr lang="ko-KR" altLang="en-US"/>
           </a:p>
@@ -2086,7 +2087,7 @@
           <a:p>
             <a:fld id="{DECF2A0E-2FBA-4159-9323-C233CC2AF0DB}" type="datetimeFigureOut">
               <a:rPr lang="ko-KR" altLang="en-US" smtClean="0"/>
-              <a:t>2026-07-12</a:t>
+              <a:t>2026-07-13</a:t>
             </a:fld>
             <a:endParaRPr lang="ko-KR" altLang="en-US"/>
           </a:p>
@@ -2397,7 +2398,7 @@
           <a:p>
             <a:fld id="{DECF2A0E-2FBA-4159-9323-C233CC2AF0DB}" type="datetimeFigureOut">
               <a:rPr lang="ko-KR" altLang="en-US" smtClean="0"/>
-              <a:t>2026-07-12</a:t>
+              <a:t>2026-07-13</a:t>
             </a:fld>
             <a:endParaRPr lang="ko-KR" altLang="en-US"/>
           </a:p>
@@ -2685,7 +2686,7 @@
           <a:p>
             <a:fld id="{DECF2A0E-2FBA-4159-9323-C233CC2AF0DB}" type="datetimeFigureOut">
               <a:rPr lang="ko-KR" altLang="en-US" smtClean="0"/>
-              <a:t>2026-07-12</a:t>
+              <a:t>2026-07-13</a:t>
             </a:fld>
             <a:endParaRPr lang="ko-KR" altLang="en-US"/>
           </a:p>
@@ -2926,7 +2927,7 @@
           <a:p>
             <a:fld id="{DECF2A0E-2FBA-4159-9323-C233CC2AF0DB}" type="datetimeFigureOut">
               <a:rPr lang="ko-KR" altLang="en-US" smtClean="0"/>
-              <a:t>2026-07-12</a:t>
+              <a:t>2026-07-13</a:t>
             </a:fld>
             <a:endParaRPr lang="ko-KR" altLang="en-US"/>
           </a:p>
@@ -4139,20 +4140,17 @@
             </a:r>
             <a:r>
               <a:rPr lang="ko-KR" altLang="en-US" sz="2000" dirty="0"/>
-              <a:t>지형 변화 및 연쇄 반응 </a:t>
+              <a:t>속성 및 지형 변화</a:t>
             </a:r>
             <a:r>
               <a:rPr lang="en-US" altLang="ko-KR" sz="2000" dirty="0"/>
-              <a:t>(</a:t>
+              <a:t>, </a:t>
             </a:r>
             <a:r>
               <a:rPr lang="ko-KR" altLang="en-US" sz="2000" dirty="0"/>
-              <a:t>핵심 기믹</a:t>
-            </a:r>
-            <a:r>
-              <a:rPr lang="en-US" altLang="ko-KR" sz="2000" dirty="0"/>
-              <a:t>)</a:t>
-            </a:r>
+              <a:t>연쇄 반응</a:t>
+            </a:r>
+            <a:endParaRPr lang="en-US" altLang="ko-KR" sz="2000" dirty="0"/>
           </a:p>
           <a:p>
             <a:pPr>
@@ -4697,7 +4695,15 @@
             </a:r>
             <a:r>
               <a:rPr lang="ko-KR" altLang="en-US" dirty="0"/>
-              <a:t>지형 변화 및 연쇄 반응</a:t>
+              <a:t>속성 및 지형 변화</a:t>
+            </a:r>
+            <a:r>
+              <a:rPr lang="en-US" altLang="ko-KR" dirty="0"/>
+              <a:t>, </a:t>
+            </a:r>
+            <a:r>
+              <a:rPr lang="ko-KR" altLang="en-US" dirty="0"/>
+              <a:t>연쇄 반응</a:t>
             </a:r>
           </a:p>
         </p:txBody>
@@ -4839,6 +4845,9 @@
             </a:r>
             <a:r>
               <a:rPr lang="ko-KR" altLang="en-US" sz="2000" b="1" dirty="0">
+                <a:solidFill>
+                  <a:srgbClr val="FF0000"/>
+                </a:solidFill>
                 <a:latin typeface="+mn-ea"/>
               </a:rPr>
               <a:t>속성 흔적</a:t>
@@ -4849,12 +4858,9 @@
               </a:rPr>
               <a:t>이 남는다</a:t>
             </a:r>
-            <a:r>
-              <a:rPr lang="en-US" altLang="ko-KR" sz="2000" dirty="0">
-                <a:latin typeface="+mn-ea"/>
-              </a:rPr>
-              <a:t>.</a:t>
-            </a:r>
+            <a:endParaRPr lang="en-US" altLang="ko-KR" sz="2000" dirty="0">
+              <a:latin typeface="+mn-ea"/>
+            </a:endParaRPr>
           </a:p>
           <a:p>
             <a:pPr>
@@ -4867,12 +4873,6 @@
                 <a:latin typeface="+mn-ea"/>
               </a:rPr>
               <a:t>속성 간 상호작용이 일어난다</a:t>
-            </a:r>
-            <a:r>
-              <a:rPr lang="en-US" altLang="ko-KR" sz="2000" dirty="0">
-                <a:latin typeface="+mn-ea"/>
-              </a:rPr>
-              <a:t>. </a:t>
             </a:r>
             <a:br>
               <a:rPr lang="en-US" altLang="ko-KR" sz="2000" dirty="0">
@@ -4906,7 +4906,13 @@
               <a:rPr lang="ko-KR" altLang="ko-KR" sz="2000" dirty="0">
                 <a:latin typeface="+mn-ea"/>
               </a:rPr>
-              <a:t>화염과 물이 만나면 시야를 방해하는 '증발(안개)' 지형이 1턴 간 생성됩니다. </a:t>
+              <a:t>화염과 물이 만나면 시야를 방해하는 '증발(안개)' 지형이 1턴 간 생성</a:t>
+            </a:r>
+            <a:r>
+              <a:rPr lang="ko-KR" altLang="en-US" sz="2000" dirty="0">
+                <a:latin typeface="+mn-ea"/>
+              </a:rPr>
+              <a:t>된다</a:t>
             </a:r>
             <a:endParaRPr lang="en-US" altLang="ko-KR" sz="2000" dirty="0">
               <a:latin typeface="+mn-ea"/>
@@ -5022,7 +5028,15 @@
             </a:r>
             <a:r>
               <a:rPr lang="ko-KR" altLang="en-US" dirty="0"/>
-              <a:t>지형 변화 및 연쇄 반응</a:t>
+              <a:t>속성 및 지형 변화</a:t>
+            </a:r>
+            <a:r>
+              <a:rPr lang="en-US" altLang="ko-KR" dirty="0"/>
+              <a:t>, </a:t>
+            </a:r>
+            <a:r>
+              <a:rPr lang="ko-KR" altLang="en-US" dirty="0"/>
+              <a:t>연쇄 반응</a:t>
             </a:r>
           </a:p>
         </p:txBody>
@@ -5043,10 +5057,15 @@
             <p:ph idx="1"/>
           </p:nvPr>
         </p:nvSpPr>
-        <p:spPr/>
+        <p:spPr>
+          <a:xfrm>
+            <a:off x="838199" y="1825625"/>
+            <a:ext cx="9626601" cy="4351338"/>
+          </a:xfrm>
+        </p:spPr>
         <p:txBody>
           <a:bodyPr>
-            <a:normAutofit/>
+            <a:normAutofit lnSpcReduction="10000"/>
           </a:bodyPr>
           <a:lstStyle/>
           <a:p>
@@ -5057,19 +5076,19 @@
               <a:buNone/>
             </a:pPr>
             <a:r>
-              <a:rPr lang="en-US" altLang="ko-KR" sz="2000" dirty="0">
+              <a:rPr lang="en-US" altLang="ko-KR" sz="2000" b="1" dirty="0">
                 <a:latin typeface="+mn-ea"/>
               </a:rPr>
               <a:t>&lt;</a:t>
             </a:r>
             <a:r>
-              <a:rPr lang="ko-KR" altLang="en-US" sz="2000" dirty="0">
-                <a:latin typeface="+mn-ea"/>
-              </a:rPr>
-              <a:t>지형속성 및 상호작용</a:t>
-            </a:r>
-            <a:r>
-              <a:rPr lang="en-US" altLang="ko-KR" sz="2000" dirty="0">
+              <a:rPr lang="ko-KR" altLang="en-US" sz="2000" b="1" dirty="0">
+                <a:latin typeface="+mn-ea"/>
+              </a:rPr>
+              <a:t>속성 별 특징</a:t>
+            </a:r>
+            <a:r>
+              <a:rPr lang="en-US" altLang="ko-KR" sz="2000" b="1" dirty="0">
                 <a:latin typeface="+mn-ea"/>
               </a:rPr>
               <a:t>&gt;</a:t>
@@ -5087,7 +5106,124 @@
               <a:rPr lang="ko-KR" altLang="en-US" sz="1600" dirty="0">
                 <a:latin typeface="+mn-ea"/>
               </a:rPr>
-              <a:t>불</a:t>
+              <a:t>불 </a:t>
+            </a:r>
+            <a:r>
+              <a:rPr lang="en-US" altLang="ko-KR" sz="1600" dirty="0">
+                <a:latin typeface="+mn-ea"/>
+              </a:rPr>
+              <a:t>: 	</a:t>
+            </a:r>
+            <a:r>
+              <a:rPr lang="ko-KR" altLang="en-US" sz="1600" dirty="0">
+                <a:latin typeface="+mn-ea"/>
+              </a:rPr>
+              <a:t>화상 유발</a:t>
+            </a:r>
+            <a:r>
+              <a:rPr lang="en-US" altLang="ko-KR" sz="1600" dirty="0">
+                <a:latin typeface="+mn-ea"/>
+              </a:rPr>
+              <a:t>,</a:t>
+            </a:r>
+            <a:r>
+              <a:rPr lang="ko-KR" altLang="en-US" sz="1600" dirty="0">
+                <a:latin typeface="+mn-ea"/>
+              </a:rPr>
+              <a:t> 자해</a:t>
+            </a:r>
+            <a:r>
+              <a:rPr lang="en-US" altLang="ko-KR" sz="1600" dirty="0">
+                <a:latin typeface="+mn-ea"/>
+              </a:rPr>
+              <a:t>/</a:t>
+            </a:r>
+            <a:r>
+              <a:rPr lang="ko-KR" altLang="en-US" sz="1600" dirty="0">
+                <a:latin typeface="+mn-ea"/>
+              </a:rPr>
+              <a:t>강력한 딜</a:t>
+            </a:r>
+            <a:r>
+              <a:rPr lang="en-US" altLang="ko-KR" sz="1600" dirty="0">
+                <a:latin typeface="+mn-ea"/>
+              </a:rPr>
+              <a:t> </a:t>
+            </a:r>
+            <a:r>
+              <a:rPr lang="ko-KR" altLang="en-US" sz="1600" dirty="0">
+                <a:latin typeface="+mn-ea"/>
+              </a:rPr>
+              <a:t>등</a:t>
+            </a:r>
+            <a:r>
+              <a:rPr lang="en-US" altLang="ko-KR" sz="1600" dirty="0">
+                <a:latin typeface="+mn-ea"/>
+              </a:rPr>
+              <a:t> </a:t>
+            </a:r>
+          </a:p>
+          <a:p>
+            <a:pPr>
+              <a:lnSpc>
+                <a:spcPct val="150000"/>
+              </a:lnSpc>
+              <a:buFontTx/>
+              <a:buChar char="-"/>
+            </a:pPr>
+            <a:r>
+              <a:rPr lang="ko-KR" altLang="en-US" sz="1600" dirty="0">
+                <a:latin typeface="+mn-ea"/>
+              </a:rPr>
+              <a:t>물 </a:t>
+            </a:r>
+            <a:r>
+              <a:rPr lang="en-US" altLang="ko-KR" sz="1600" dirty="0">
+                <a:latin typeface="+mn-ea"/>
+              </a:rPr>
+              <a:t>: 	</a:t>
+            </a:r>
+            <a:r>
+              <a:rPr lang="ko-KR" altLang="en-US" sz="1600" dirty="0">
+                <a:latin typeface="+mn-ea"/>
+              </a:rPr>
+              <a:t>침묵 유발</a:t>
+            </a:r>
+            <a:r>
+              <a:rPr lang="en-US" altLang="ko-KR" sz="1600" dirty="0">
+                <a:latin typeface="+mn-ea"/>
+              </a:rPr>
+              <a:t>, </a:t>
+            </a:r>
+            <a:r>
+              <a:rPr lang="ko-KR" altLang="en-US" sz="1600" dirty="0">
+                <a:latin typeface="+mn-ea"/>
+              </a:rPr>
+              <a:t>밀치기</a:t>
+            </a:r>
+            <a:r>
+              <a:rPr lang="en-US" altLang="ko-KR" sz="1600" dirty="0">
+                <a:latin typeface="+mn-ea"/>
+              </a:rPr>
+              <a:t>, </a:t>
+            </a:r>
+            <a:r>
+              <a:rPr lang="ko-KR" altLang="en-US" sz="1600" dirty="0">
+                <a:latin typeface="+mn-ea"/>
+              </a:rPr>
+              <a:t>회복</a:t>
+            </a:r>
+            <a:r>
+              <a:rPr lang="en-US" altLang="ko-KR" sz="1600" dirty="0">
+                <a:latin typeface="+mn-ea"/>
+              </a:rPr>
+              <a:t>, </a:t>
+            </a:r>
+            <a:r>
+              <a:rPr lang="ko-KR" altLang="en-US" sz="1600" dirty="0">
+                <a:latin typeface="+mn-ea"/>
+              </a:rPr>
+              <a:t>상태이상 제거 등</a:t>
             </a:r>
             <a:endParaRPr lang="en-US" altLang="ko-KR" sz="1600" dirty="0">
               <a:latin typeface="+mn-ea"/>
@@ -5105,7 +5241,55 @@
               <a:rPr lang="ko-KR" altLang="en-US" sz="1600" dirty="0">
                 <a:latin typeface="+mn-ea"/>
               </a:rPr>
-              <a:t>물</a:t>
+              <a:t>땅 </a:t>
+            </a:r>
+            <a:r>
+              <a:rPr lang="en-US" altLang="ko-KR" sz="1600" dirty="0">
+                <a:latin typeface="+mn-ea"/>
+              </a:rPr>
+              <a:t>: 	</a:t>
+            </a:r>
+            <a:r>
+              <a:rPr lang="ko-KR" altLang="en-US" sz="1600" dirty="0">
+                <a:latin typeface="+mn-ea"/>
+              </a:rPr>
+              <a:t>기절 유발</a:t>
+            </a:r>
+            <a:r>
+              <a:rPr lang="en-US" altLang="ko-KR" sz="1600" dirty="0">
+                <a:latin typeface="+mn-ea"/>
+              </a:rPr>
+              <a:t>, </a:t>
+            </a:r>
+            <a:r>
+              <a:rPr lang="ko-KR" altLang="en-US" sz="1600" dirty="0">
+                <a:latin typeface="+mn-ea"/>
+              </a:rPr>
+              <a:t>밀치기</a:t>
+            </a:r>
+            <a:r>
+              <a:rPr lang="en-US" altLang="ko-KR" sz="1600" dirty="0">
+                <a:latin typeface="+mn-ea"/>
+              </a:rPr>
+              <a:t>, </a:t>
+            </a:r>
+            <a:r>
+              <a:rPr lang="ko-KR" altLang="en-US" sz="1600" dirty="0">
+                <a:latin typeface="+mn-ea"/>
+              </a:rPr>
+              <a:t>방어</a:t>
+            </a:r>
+            <a:r>
+              <a:rPr lang="en-US" altLang="ko-KR" sz="1600" dirty="0">
+                <a:latin typeface="+mn-ea"/>
+              </a:rPr>
+              <a:t>, </a:t>
+            </a:r>
+            <a:r>
+              <a:rPr lang="ko-KR" altLang="en-US" sz="1600" dirty="0">
+                <a:latin typeface="+mn-ea"/>
+              </a:rPr>
+              <a:t>장애물 생성 등</a:t>
             </a:r>
             <a:endParaRPr lang="en-US" altLang="ko-KR" sz="1600" dirty="0">
               <a:latin typeface="+mn-ea"/>
@@ -5123,7 +5307,43 @@
               <a:rPr lang="ko-KR" altLang="en-US" sz="1600" dirty="0">
                 <a:latin typeface="+mn-ea"/>
               </a:rPr>
-              <a:t>바람</a:t>
+              <a:t>바람 </a:t>
+            </a:r>
+            <a:r>
+              <a:rPr lang="en-US" altLang="ko-KR" sz="1600" dirty="0">
+                <a:latin typeface="+mn-ea"/>
+              </a:rPr>
+              <a:t>:	</a:t>
+            </a:r>
+            <a:r>
+              <a:rPr lang="ko-KR" altLang="en-US" sz="1600" dirty="0">
+                <a:latin typeface="+mn-ea"/>
+              </a:rPr>
+              <a:t>이동 등 유틸</a:t>
+            </a:r>
+            <a:r>
+              <a:rPr lang="en-US" altLang="ko-KR" sz="1600" dirty="0">
+                <a:latin typeface="+mn-ea"/>
+              </a:rPr>
+              <a:t>/</a:t>
+            </a:r>
+            <a:r>
+              <a:rPr lang="ko-KR" altLang="en-US" sz="1600" dirty="0">
+                <a:latin typeface="+mn-ea"/>
+              </a:rPr>
+              <a:t>버프</a:t>
+            </a:r>
+            <a:r>
+              <a:rPr lang="en-US" altLang="ko-KR" sz="1600" dirty="0">
+                <a:latin typeface="+mn-ea"/>
+              </a:rPr>
+              <a:t>, AP </a:t>
+            </a:r>
+            <a:r>
+              <a:rPr lang="ko-KR" altLang="en-US" sz="1600" dirty="0">
+                <a:latin typeface="+mn-ea"/>
+              </a:rPr>
+              <a:t>회복</a:t>
             </a:r>
             <a:endParaRPr lang="en-US" altLang="ko-KR" sz="1600" dirty="0">
               <a:latin typeface="+mn-ea"/>
@@ -5141,7 +5361,100 @@
               <a:rPr lang="ko-KR" altLang="en-US" sz="1600" dirty="0">
                 <a:latin typeface="+mn-ea"/>
               </a:rPr>
-              <a:t>땅</a:t>
+              <a:t>얼음 </a:t>
+            </a:r>
+            <a:r>
+              <a:rPr lang="en-US" altLang="ko-KR" sz="1600" dirty="0">
+                <a:latin typeface="+mn-ea"/>
+              </a:rPr>
+              <a:t>: 	</a:t>
+            </a:r>
+            <a:r>
+              <a:rPr lang="ko-KR" altLang="en-US" sz="1600" dirty="0">
+                <a:latin typeface="+mn-ea"/>
+              </a:rPr>
+              <a:t>빙결 유발 </a:t>
+            </a:r>
+            <a:r>
+              <a:rPr lang="en-US" altLang="ko-KR" sz="1600" dirty="0">
+                <a:latin typeface="+mn-ea"/>
+              </a:rPr>
+              <a:t>(</a:t>
+            </a:r>
+            <a:r>
+              <a:rPr lang="ko-KR" altLang="en-US" sz="1600" dirty="0">
+                <a:latin typeface="+mn-ea"/>
+              </a:rPr>
+              <a:t>빙결된 적 공격 시 딜 증폭 및 빙결 해제</a:t>
+            </a:r>
+            <a:r>
+              <a:rPr lang="en-US" altLang="ko-KR" sz="1600" dirty="0">
+                <a:latin typeface="+mn-ea"/>
+              </a:rPr>
+              <a:t>)</a:t>
+            </a:r>
+          </a:p>
+          <a:p>
+            <a:pPr>
+              <a:lnSpc>
+                <a:spcPct val="150000"/>
+              </a:lnSpc>
+              <a:buFontTx/>
+              <a:buChar char="-"/>
+            </a:pPr>
+            <a:r>
+              <a:rPr lang="ko-KR" altLang="en-US" sz="1600" dirty="0">
+                <a:latin typeface="+mn-ea"/>
+              </a:rPr>
+              <a:t>번개 </a:t>
+            </a:r>
+            <a:r>
+              <a:rPr lang="en-US" altLang="ko-KR" sz="1600" dirty="0">
+                <a:latin typeface="+mn-ea"/>
+              </a:rPr>
+              <a:t>: 	</a:t>
+            </a:r>
+            <a:r>
+              <a:rPr lang="ko-KR" altLang="en-US" sz="1600" dirty="0">
+                <a:latin typeface="+mn-ea"/>
+              </a:rPr>
+              <a:t>감전 유발</a:t>
+            </a:r>
+            <a:r>
+              <a:rPr lang="en-US" altLang="ko-KR" sz="1600" dirty="0">
+                <a:latin typeface="+mn-ea"/>
+              </a:rPr>
+              <a:t>, </a:t>
+            </a:r>
+            <a:r>
+              <a:rPr lang="ko-KR" altLang="en-US" sz="1600" dirty="0">
+                <a:latin typeface="+mn-ea"/>
+              </a:rPr>
+              <a:t>광역</a:t>
+            </a:r>
+            <a:r>
+              <a:rPr lang="en-US" altLang="ko-KR" sz="1600" dirty="0">
+                <a:latin typeface="+mn-ea"/>
+              </a:rPr>
+              <a:t>(</a:t>
+            </a:r>
+            <a:r>
+              <a:rPr lang="ko-KR" altLang="en-US" sz="1600" dirty="0">
+                <a:latin typeface="+mn-ea"/>
+              </a:rPr>
+              <a:t>연쇄</a:t>
+            </a:r>
+            <a:r>
+              <a:rPr lang="en-US" altLang="ko-KR" sz="1600" dirty="0">
+                <a:latin typeface="+mn-ea"/>
+              </a:rPr>
+              <a:t>)</a:t>
+            </a:r>
+            <a:r>
+              <a:rPr lang="ko-KR" altLang="en-US" sz="1600" dirty="0">
+                <a:latin typeface="+mn-ea"/>
+              </a:rPr>
+              <a:t> 딜</a:t>
             </a:r>
             <a:endParaRPr lang="en-US" altLang="ko-KR" sz="1600" dirty="0">
               <a:latin typeface="+mn-ea"/>
@@ -5159,45 +5472,520 @@
               <a:rPr lang="ko-KR" altLang="en-US" sz="1600" dirty="0">
                 <a:latin typeface="+mn-ea"/>
               </a:rPr>
-              <a:t>번개</a:t>
-            </a:r>
-            <a:endParaRPr lang="en-US" altLang="ko-KR" sz="1600" dirty="0">
+              <a:t>빛 </a:t>
+            </a:r>
+            <a:r>
+              <a:rPr lang="en-US" altLang="ko-KR" sz="1600" dirty="0">
+                <a:latin typeface="+mn-ea"/>
+              </a:rPr>
+              <a:t>: 	AP </a:t>
+            </a:r>
+            <a:r>
+              <a:rPr lang="ko-KR" altLang="en-US" sz="1600" dirty="0">
+                <a:latin typeface="+mn-ea"/>
+              </a:rPr>
+              <a:t>대신 체력 소모</a:t>
+            </a:r>
+            <a:r>
+              <a:rPr lang="en-US" altLang="ko-KR" sz="1600" dirty="0">
+                <a:latin typeface="+mn-ea"/>
+              </a:rPr>
+              <a:t>, </a:t>
+            </a:r>
+            <a:r>
+              <a:rPr lang="ko-KR" altLang="en-US" sz="1600" dirty="0">
+                <a:latin typeface="+mn-ea"/>
+              </a:rPr>
+              <a:t>강력한 유틸 </a:t>
+            </a:r>
+            <a:r>
+              <a:rPr lang="en-US" altLang="ko-KR" sz="1600" dirty="0">
+                <a:latin typeface="+mn-ea"/>
+              </a:rPr>
+              <a:t>(</a:t>
+            </a:r>
+            <a:r>
+              <a:rPr lang="ko-KR" altLang="en-US" sz="1600" dirty="0">
+                <a:latin typeface="+mn-ea"/>
+              </a:rPr>
+              <a:t>디버프 제거 등</a:t>
+            </a:r>
+            <a:r>
+              <a:rPr lang="en-US" altLang="ko-KR" sz="1600" dirty="0">
+                <a:latin typeface="+mn-ea"/>
+              </a:rPr>
+              <a:t>)</a:t>
+            </a:r>
+          </a:p>
+          <a:p>
+            <a:pPr>
+              <a:lnSpc>
+                <a:spcPct val="150000"/>
+              </a:lnSpc>
+              <a:buFontTx/>
+              <a:buChar char="-"/>
+            </a:pPr>
+            <a:r>
+              <a:rPr lang="ko-KR" altLang="en-US" sz="1600" dirty="0">
+                <a:latin typeface="+mn-ea"/>
+              </a:rPr>
+              <a:t>어둠 </a:t>
+            </a:r>
+            <a:r>
+              <a:rPr lang="en-US" altLang="ko-KR" sz="1600" dirty="0">
+                <a:latin typeface="+mn-ea"/>
+              </a:rPr>
+              <a:t>: 	</a:t>
+            </a:r>
+            <a:r>
+              <a:rPr lang="ko-KR" altLang="en-US" sz="1600" dirty="0">
+                <a:latin typeface="+mn-ea"/>
+              </a:rPr>
+              <a:t>체력 흡수</a:t>
+            </a:r>
+            <a:r>
+              <a:rPr lang="en-US" altLang="ko-KR" sz="1600" dirty="0">
+                <a:latin typeface="+mn-ea"/>
+              </a:rPr>
+              <a:t>, </a:t>
+            </a:r>
+            <a:r>
+              <a:rPr lang="ko-KR" altLang="en-US" sz="1600" dirty="0">
+                <a:latin typeface="+mn-ea"/>
+              </a:rPr>
+              <a:t>강력한 딜</a:t>
+            </a:r>
+            <a:r>
+              <a:rPr lang="en-US" altLang="ko-KR" sz="1600" dirty="0">
+                <a:latin typeface="+mn-ea"/>
+              </a:rPr>
+              <a:t>.	</a:t>
+            </a:r>
+            <a:r>
+              <a:rPr lang="ko-KR" altLang="en-US" sz="1600" dirty="0">
+                <a:solidFill>
+                  <a:schemeClr val="accent5">
+                    <a:lumMod val="75000"/>
+                  </a:schemeClr>
+                </a:solidFill>
+                <a:latin typeface="+mn-ea"/>
+              </a:rPr>
+              <a:t>페널티</a:t>
+            </a:r>
+            <a:r>
+              <a:rPr lang="en-US" altLang="ko-KR" sz="1600" dirty="0">
+                <a:solidFill>
+                  <a:schemeClr val="accent5">
+                    <a:lumMod val="75000"/>
+                  </a:schemeClr>
+                </a:solidFill>
+                <a:latin typeface="+mn-ea"/>
+              </a:rPr>
+              <a:t>: </a:t>
+            </a:r>
+            <a:r>
+              <a:rPr lang="ko-KR" altLang="en-US" sz="1600" dirty="0">
+                <a:solidFill>
+                  <a:schemeClr val="accent5">
+                    <a:lumMod val="75000"/>
+                  </a:schemeClr>
+                </a:solidFill>
+                <a:latin typeface="+mn-ea"/>
+              </a:rPr>
+              <a:t>혼란 중첩</a:t>
+            </a:r>
+            <a:r>
+              <a:rPr lang="en-US" altLang="ko-KR" sz="1600" dirty="0">
+                <a:solidFill>
+                  <a:schemeClr val="accent5">
+                    <a:lumMod val="75000"/>
+                  </a:schemeClr>
+                </a:solidFill>
+                <a:latin typeface="+mn-ea"/>
+              </a:rPr>
+              <a:t>, </a:t>
+            </a:r>
+            <a:r>
+              <a:rPr lang="ko-KR" altLang="en-US" sz="1600" dirty="0">
+                <a:solidFill>
+                  <a:schemeClr val="accent5">
+                    <a:lumMod val="75000"/>
+                  </a:schemeClr>
+                </a:solidFill>
+                <a:latin typeface="+mn-ea"/>
+              </a:rPr>
+              <a:t>골드 소모량 </a:t>
+            </a:r>
+            <a:r>
+              <a:rPr lang="en-US" altLang="ko-KR" sz="1600" dirty="0">
+                <a:solidFill>
+                  <a:schemeClr val="accent5">
+                    <a:lumMod val="75000"/>
+                  </a:schemeClr>
+                </a:solidFill>
+                <a:latin typeface="+mn-ea"/>
+              </a:rPr>
+              <a:t>1+N</a:t>
+            </a:r>
+            <a:r>
+              <a:rPr lang="ko-KR" altLang="en-US" sz="1600" dirty="0">
+                <a:solidFill>
+                  <a:schemeClr val="accent5">
+                    <a:lumMod val="75000"/>
+                  </a:schemeClr>
+                </a:solidFill>
+                <a:latin typeface="+mn-ea"/>
+              </a:rPr>
+              <a:t>배</a:t>
+            </a:r>
+            <a:r>
+              <a:rPr lang="en-US" altLang="ko-KR" sz="1600" dirty="0">
+                <a:solidFill>
+                  <a:schemeClr val="accent5">
+                    <a:lumMod val="75000"/>
+                  </a:schemeClr>
+                </a:solidFill>
+                <a:latin typeface="+mn-ea"/>
+              </a:rPr>
+              <a:t>(</a:t>
+            </a:r>
+            <a:r>
+              <a:rPr lang="ko-KR" altLang="en-US" sz="1600" dirty="0">
+                <a:solidFill>
+                  <a:schemeClr val="accent5">
+                    <a:lumMod val="75000"/>
+                  </a:schemeClr>
+                </a:solidFill>
+                <a:latin typeface="+mn-ea"/>
+              </a:rPr>
+              <a:t>중첩 당 </a:t>
+            </a:r>
+            <a:r>
+              <a:rPr lang="en-US" altLang="ko-KR" sz="1600" dirty="0">
+                <a:solidFill>
+                  <a:schemeClr val="accent5">
+                    <a:lumMod val="75000"/>
+                  </a:schemeClr>
+                </a:solidFill>
+                <a:latin typeface="+mn-ea"/>
+              </a:rPr>
+              <a:t>0.25</a:t>
+            </a:r>
+            <a:r>
+              <a:rPr lang="ko-KR" altLang="en-US" sz="1600" dirty="0">
+                <a:solidFill>
+                  <a:schemeClr val="accent5">
+                    <a:lumMod val="75000"/>
+                  </a:schemeClr>
+                </a:solidFill>
+                <a:latin typeface="+mn-ea"/>
+              </a:rPr>
+              <a:t>배</a:t>
+            </a:r>
+            <a:r>
+              <a:rPr lang="en-US" altLang="ko-KR" sz="1600" dirty="0">
+                <a:solidFill>
+                  <a:schemeClr val="accent5">
+                    <a:lumMod val="75000"/>
+                  </a:schemeClr>
+                </a:solidFill>
+                <a:latin typeface="+mn-ea"/>
+              </a:rPr>
+              <a:t>)</a:t>
+            </a:r>
+          </a:p>
+        </p:txBody>
+      </p:sp>
+      <p:sp>
+        <p:nvSpPr>
+          <p:cNvPr id="5" name="내용 개체 틀 2">
+            <a:extLst>
+              <a:ext uri="{FF2B5EF4-FFF2-40B4-BE49-F238E27FC236}">
+                <a16:creationId xmlns:a16="http://schemas.microsoft.com/office/drawing/2014/main" id="{381DA9C1-5A64-B288-91E1-13E89BA88DD6}"/>
+              </a:ext>
+            </a:extLst>
+          </p:cNvPr>
+          <p:cNvSpPr txBox="1">
+            <a:spLocks/>
+          </p:cNvSpPr>
+          <p:nvPr/>
+        </p:nvSpPr>
+        <p:spPr>
+          <a:xfrm>
+            <a:off x="2675466" y="1825624"/>
+            <a:ext cx="8678334" cy="1075619"/>
+          </a:xfrm>
+          <a:prstGeom prst="rect">
+            <a:avLst/>
+          </a:prstGeom>
+        </p:spPr>
+        <p:txBody>
+          <a:bodyPr vert="horz" lIns="91440" tIns="45720" rIns="91440" bIns="45720" rtlCol="0">
+            <a:noAutofit/>
+          </a:bodyPr>
+          <a:lstStyle>
+            <a:lvl1pPr marL="228600" indent="-228600" algn="l" defTabSz="914400" rtl="0" eaLnBrk="1" latinLnBrk="1" hangingPunct="1">
+              <a:lnSpc>
+                <a:spcPct val="90000"/>
+              </a:lnSpc>
+              <a:spcBef>
+                <a:spcPts val="1000"/>
+              </a:spcBef>
+              <a:buFont typeface="Arial" panose="020B0604020202020204" pitchFamily="34" charset="0"/>
+              <a:buChar char="•"/>
+              <a:defRPr sz="2800" kern="1200">
+                <a:solidFill>
+                  <a:schemeClr val="tx1"/>
+                </a:solidFill>
+                <a:latin typeface="+mn-lt"/>
+                <a:ea typeface="+mn-ea"/>
+                <a:cs typeface="+mn-cs"/>
+              </a:defRPr>
+            </a:lvl1pPr>
+            <a:lvl2pPr marL="685800" indent="-228600" algn="l" defTabSz="914400" rtl="0" eaLnBrk="1" latinLnBrk="1" hangingPunct="1">
+              <a:lnSpc>
+                <a:spcPct val="90000"/>
+              </a:lnSpc>
+              <a:spcBef>
+                <a:spcPts val="500"/>
+              </a:spcBef>
+              <a:buFont typeface="Arial" panose="020B0604020202020204" pitchFamily="34" charset="0"/>
+              <a:buChar char="•"/>
+              <a:defRPr sz="2400" kern="1200">
+                <a:solidFill>
+                  <a:schemeClr val="tx1"/>
+                </a:solidFill>
+                <a:latin typeface="+mn-lt"/>
+                <a:ea typeface="+mn-ea"/>
+                <a:cs typeface="+mn-cs"/>
+              </a:defRPr>
+            </a:lvl2pPr>
+            <a:lvl3pPr marL="1143000" indent="-228600" algn="l" defTabSz="914400" rtl="0" eaLnBrk="1" latinLnBrk="1" hangingPunct="1">
+              <a:lnSpc>
+                <a:spcPct val="90000"/>
+              </a:lnSpc>
+              <a:spcBef>
+                <a:spcPts val="500"/>
+              </a:spcBef>
+              <a:buFont typeface="Arial" panose="020B0604020202020204" pitchFamily="34" charset="0"/>
+              <a:buChar char="•"/>
+              <a:defRPr sz="2000" kern="1200">
+                <a:solidFill>
+                  <a:schemeClr val="tx1"/>
+                </a:solidFill>
+                <a:latin typeface="+mn-lt"/>
+                <a:ea typeface="+mn-ea"/>
+                <a:cs typeface="+mn-cs"/>
+              </a:defRPr>
+            </a:lvl3pPr>
+            <a:lvl4pPr marL="1600200" indent="-228600" algn="l" defTabSz="914400" rtl="0" eaLnBrk="1" latinLnBrk="1" hangingPunct="1">
+              <a:lnSpc>
+                <a:spcPct val="90000"/>
+              </a:lnSpc>
+              <a:spcBef>
+                <a:spcPts val="500"/>
+              </a:spcBef>
+              <a:buFont typeface="Arial" panose="020B0604020202020204" pitchFamily="34" charset="0"/>
+              <a:buChar char="•"/>
+              <a:defRPr sz="1800" kern="1200">
+                <a:solidFill>
+                  <a:schemeClr val="tx1"/>
+                </a:solidFill>
+                <a:latin typeface="+mn-lt"/>
+                <a:ea typeface="+mn-ea"/>
+                <a:cs typeface="+mn-cs"/>
+              </a:defRPr>
+            </a:lvl4pPr>
+            <a:lvl5pPr marL="2057400" indent="-228600" algn="l" defTabSz="914400" rtl="0" eaLnBrk="1" latinLnBrk="1" hangingPunct="1">
+              <a:lnSpc>
+                <a:spcPct val="90000"/>
+              </a:lnSpc>
+              <a:spcBef>
+                <a:spcPts val="500"/>
+              </a:spcBef>
+              <a:buFont typeface="Arial" panose="020B0604020202020204" pitchFamily="34" charset="0"/>
+              <a:buChar char="•"/>
+              <a:defRPr sz="1800" kern="1200">
+                <a:solidFill>
+                  <a:schemeClr val="tx1"/>
+                </a:solidFill>
+                <a:latin typeface="+mn-lt"/>
+                <a:ea typeface="+mn-ea"/>
+                <a:cs typeface="+mn-cs"/>
+              </a:defRPr>
+            </a:lvl5pPr>
+            <a:lvl6pPr marL="2514600" indent="-228600" algn="l" defTabSz="914400" rtl="0" eaLnBrk="1" latinLnBrk="1" hangingPunct="1">
+              <a:lnSpc>
+                <a:spcPct val="90000"/>
+              </a:lnSpc>
+              <a:spcBef>
+                <a:spcPts val="500"/>
+              </a:spcBef>
+              <a:buFont typeface="Arial" panose="020B0604020202020204" pitchFamily="34" charset="0"/>
+              <a:buChar char="•"/>
+              <a:defRPr sz="1800" kern="1200">
+                <a:solidFill>
+                  <a:schemeClr val="tx1"/>
+                </a:solidFill>
+                <a:latin typeface="+mn-lt"/>
+                <a:ea typeface="+mn-ea"/>
+                <a:cs typeface="+mn-cs"/>
+              </a:defRPr>
+            </a:lvl6pPr>
+            <a:lvl7pPr marL="2971800" indent="-228600" algn="l" defTabSz="914400" rtl="0" eaLnBrk="1" latinLnBrk="1" hangingPunct="1">
+              <a:lnSpc>
+                <a:spcPct val="90000"/>
+              </a:lnSpc>
+              <a:spcBef>
+                <a:spcPts val="500"/>
+              </a:spcBef>
+              <a:buFont typeface="Arial" panose="020B0604020202020204" pitchFamily="34" charset="0"/>
+              <a:buChar char="•"/>
+              <a:defRPr sz="1800" kern="1200">
+                <a:solidFill>
+                  <a:schemeClr val="tx1"/>
+                </a:solidFill>
+                <a:latin typeface="+mn-lt"/>
+                <a:ea typeface="+mn-ea"/>
+                <a:cs typeface="+mn-cs"/>
+              </a:defRPr>
+            </a:lvl7pPr>
+            <a:lvl8pPr marL="3429000" indent="-228600" algn="l" defTabSz="914400" rtl="0" eaLnBrk="1" latinLnBrk="1" hangingPunct="1">
+              <a:lnSpc>
+                <a:spcPct val="90000"/>
+              </a:lnSpc>
+              <a:spcBef>
+                <a:spcPts val="500"/>
+              </a:spcBef>
+              <a:buFont typeface="Arial" panose="020B0604020202020204" pitchFamily="34" charset="0"/>
+              <a:buChar char="•"/>
+              <a:defRPr sz="1800" kern="1200">
+                <a:solidFill>
+                  <a:schemeClr val="tx1"/>
+                </a:solidFill>
+                <a:latin typeface="+mn-lt"/>
+                <a:ea typeface="+mn-ea"/>
+                <a:cs typeface="+mn-cs"/>
+              </a:defRPr>
+            </a:lvl8pPr>
+            <a:lvl9pPr marL="3886200" indent="-228600" algn="l" defTabSz="914400" rtl="0" eaLnBrk="1" latinLnBrk="1" hangingPunct="1">
+              <a:lnSpc>
+                <a:spcPct val="90000"/>
+              </a:lnSpc>
+              <a:spcBef>
+                <a:spcPts val="500"/>
+              </a:spcBef>
+              <a:buFont typeface="Arial" panose="020B0604020202020204" pitchFamily="34" charset="0"/>
+              <a:buChar char="•"/>
+              <a:defRPr sz="1800" kern="1200">
+                <a:solidFill>
+                  <a:schemeClr val="tx1"/>
+                </a:solidFill>
+                <a:latin typeface="+mn-lt"/>
+                <a:ea typeface="+mn-ea"/>
+                <a:cs typeface="+mn-cs"/>
+              </a:defRPr>
+            </a:lvl9pPr>
+          </a:lstStyle>
+          <a:p>
+            <a:pPr marL="0" indent="0" algn="r">
+              <a:lnSpc>
+                <a:spcPct val="150000"/>
+              </a:lnSpc>
+              <a:buFont typeface="Arial" panose="020B0604020202020204" pitchFamily="34" charset="0"/>
+              <a:buNone/>
+            </a:pPr>
+            <a:r>
+              <a:rPr lang="en-US" altLang="ko-KR" sz="1800" b="1" dirty="0">
+                <a:latin typeface="+mn-ea"/>
+              </a:rPr>
+              <a:t>*</a:t>
+            </a:r>
+            <a:r>
+              <a:rPr lang="ko-KR" altLang="en-US" sz="1800" b="1" dirty="0">
+                <a:latin typeface="+mn-ea"/>
+              </a:rPr>
+              <a:t>시작 덱</a:t>
+            </a:r>
+            <a:r>
+              <a:rPr lang="en-US" altLang="ko-KR" sz="1800" b="1" dirty="0">
+                <a:latin typeface="+mn-ea"/>
+              </a:rPr>
+              <a:t>: </a:t>
+            </a:r>
+            <a:r>
+              <a:rPr lang="ko-KR" altLang="en-US" sz="1800" b="1" dirty="0">
+                <a:latin typeface="+mn-ea"/>
+              </a:rPr>
+              <a:t>불</a:t>
+            </a:r>
+            <a:r>
+              <a:rPr lang="en-US" altLang="ko-KR" sz="1800" b="1" dirty="0">
+                <a:latin typeface="+mn-ea"/>
+              </a:rPr>
+              <a:t>/</a:t>
+            </a:r>
+            <a:r>
+              <a:rPr lang="ko-KR" altLang="en-US" sz="1800" b="1" dirty="0">
+                <a:latin typeface="+mn-ea"/>
+              </a:rPr>
+              <a:t>물</a:t>
+            </a:r>
+            <a:r>
+              <a:rPr lang="en-US" altLang="ko-KR" sz="1800" b="1" dirty="0">
+                <a:latin typeface="+mn-ea"/>
+              </a:rPr>
+              <a:t>/</a:t>
+            </a:r>
+            <a:r>
+              <a:rPr lang="ko-KR" altLang="en-US" sz="1800" b="1" dirty="0">
+                <a:latin typeface="+mn-ea"/>
+              </a:rPr>
+              <a:t>땅</a:t>
+            </a:r>
+            <a:endParaRPr lang="en-US" altLang="ko-KR" sz="1800" b="1" dirty="0">
               <a:latin typeface="+mn-ea"/>
             </a:endParaRPr>
           </a:p>
           <a:p>
-            <a:pPr>
+            <a:pPr marL="0" indent="0" algn="r">
               <a:lnSpc>
                 <a:spcPct val="150000"/>
               </a:lnSpc>
-              <a:buFontTx/>
-              <a:buChar char="-"/>
-            </a:pPr>
-            <a:r>
-              <a:rPr lang="ko-KR" altLang="en-US" sz="1600" dirty="0">
-                <a:latin typeface="+mn-ea"/>
-              </a:rPr>
-              <a:t>빛</a:t>
-            </a:r>
-            <a:endParaRPr lang="en-US" altLang="ko-KR" sz="1600" dirty="0">
-              <a:latin typeface="+mn-ea"/>
-            </a:endParaRPr>
-          </a:p>
-          <a:p>
-            <a:pPr>
-              <a:lnSpc>
-                <a:spcPct val="150000"/>
-              </a:lnSpc>
-              <a:buFontTx/>
-              <a:buChar char="-"/>
-            </a:pPr>
-            <a:r>
-              <a:rPr lang="ko-KR" altLang="en-US" sz="1600" dirty="0">
-                <a:latin typeface="+mn-ea"/>
-              </a:rPr>
-              <a:t>어둠</a:t>
-            </a:r>
-            <a:endParaRPr lang="en-US" altLang="ko-KR" sz="1600" dirty="0">
+              <a:buFont typeface="Arial" panose="020B0604020202020204" pitchFamily="34" charset="0"/>
+              <a:buNone/>
+            </a:pPr>
+            <a:r>
+              <a:rPr lang="ko-KR" altLang="en-US" sz="1800" b="1" dirty="0">
+                <a:latin typeface="+mn-ea"/>
+              </a:rPr>
+              <a:t>이외의 속성 카드</a:t>
+            </a:r>
+            <a:r>
+              <a:rPr lang="en-US" altLang="ko-KR" sz="1800" b="1" dirty="0">
+                <a:latin typeface="+mn-ea"/>
+              </a:rPr>
+              <a:t>: </a:t>
+            </a:r>
+            <a:r>
+              <a:rPr lang="ko-KR" altLang="en-US" sz="1800" b="1" dirty="0">
+                <a:latin typeface="+mn-ea"/>
+              </a:rPr>
+              <a:t>모험 중 취득</a:t>
+            </a:r>
+            <a:r>
+              <a:rPr lang="en-US" altLang="ko-KR" sz="1800" b="1" dirty="0">
+                <a:latin typeface="+mn-ea"/>
+              </a:rPr>
+              <a:t>/</a:t>
+            </a:r>
+            <a:r>
+              <a:rPr lang="ko-KR" altLang="en-US" sz="1800" b="1" dirty="0">
+                <a:latin typeface="+mn-ea"/>
+              </a:rPr>
+              <a:t>거점 업그레이드 등</a:t>
+            </a:r>
+            <a:endParaRPr lang="en-US" altLang="ko-KR" sz="1800" b="1" dirty="0">
               <a:latin typeface="+mn-ea"/>
             </a:endParaRPr>
           </a:p>
@@ -5217,6 +6005,787 @@
 </file>
 
 <file path=ppt/slides/slide18.xml><?xml version="1.0" encoding="utf-8"?>
+<p:sld xmlns:a="http://schemas.openxmlformats.org/drawingml/2006/main" xmlns:r="http://schemas.openxmlformats.org/officeDocument/2006/relationships" xmlns:p="http://schemas.openxmlformats.org/presentationml/2006/main">
+  <p:cSld>
+    <p:spTree>
+      <p:nvGrpSpPr>
+        <p:cNvPr id="1" name="">
+          <a:extLst>
+            <a:ext uri="{FF2B5EF4-FFF2-40B4-BE49-F238E27FC236}">
+              <a16:creationId xmlns:a16="http://schemas.microsoft.com/office/drawing/2014/main" id="{5ED7F702-AA6B-EC5D-0900-B8786A01F086}"/>
+            </a:ext>
+          </a:extLst>
+        </p:cNvPr>
+        <p:cNvGrpSpPr/>
+        <p:nvPr/>
+      </p:nvGrpSpPr>
+      <p:grpSpPr>
+        <a:xfrm>
+          <a:off x="0" y="0"/>
+          <a:ext cx="0" cy="0"/>
+          <a:chOff x="0" y="0"/>
+          <a:chExt cx="0" cy="0"/>
+        </a:xfrm>
+      </p:grpSpPr>
+      <p:sp>
+        <p:nvSpPr>
+          <p:cNvPr id="2" name="제목 1">
+            <a:extLst>
+              <a:ext uri="{FF2B5EF4-FFF2-40B4-BE49-F238E27FC236}">
+                <a16:creationId xmlns:a16="http://schemas.microsoft.com/office/drawing/2014/main" id="{F75AEA74-646A-CC22-5DBA-7C9106EE33EA}"/>
+              </a:ext>
+            </a:extLst>
+          </p:cNvPr>
+          <p:cNvSpPr>
+            <a:spLocks noGrp="1"/>
+          </p:cNvSpPr>
+          <p:nvPr>
+            <p:ph type="title"/>
+          </p:nvPr>
+        </p:nvSpPr>
+        <p:spPr/>
+        <p:txBody>
+          <a:bodyPr/>
+          <a:lstStyle/>
+          <a:p>
+            <a:r>
+              <a:rPr lang="en-US" altLang="ko-KR" dirty="0"/>
+              <a:t>5.3. </a:t>
+            </a:r>
+            <a:r>
+              <a:rPr lang="ko-KR" altLang="en-US" dirty="0"/>
+              <a:t>속성 및 지형 변화</a:t>
+            </a:r>
+            <a:r>
+              <a:rPr lang="en-US" altLang="ko-KR" dirty="0"/>
+              <a:t>, </a:t>
+            </a:r>
+            <a:r>
+              <a:rPr lang="ko-KR" altLang="en-US" dirty="0"/>
+              <a:t>연쇄 반응</a:t>
+            </a:r>
+          </a:p>
+        </p:txBody>
+      </p:sp>
+      <p:sp>
+        <p:nvSpPr>
+          <p:cNvPr id="3" name="내용 개체 틀 2">
+            <a:extLst>
+              <a:ext uri="{FF2B5EF4-FFF2-40B4-BE49-F238E27FC236}">
+                <a16:creationId xmlns:a16="http://schemas.microsoft.com/office/drawing/2014/main" id="{594D71F2-1AC3-187A-DC68-238D4E65C7F3}"/>
+              </a:ext>
+            </a:extLst>
+          </p:cNvPr>
+          <p:cNvSpPr>
+            <a:spLocks noGrp="1"/>
+          </p:cNvSpPr>
+          <p:nvPr>
+            <p:ph idx="1"/>
+          </p:nvPr>
+        </p:nvSpPr>
+        <p:spPr/>
+        <p:txBody>
+          <a:bodyPr>
+            <a:normAutofit lnSpcReduction="10000"/>
+          </a:bodyPr>
+          <a:lstStyle/>
+          <a:p>
+            <a:pPr marL="0" indent="0">
+              <a:lnSpc>
+                <a:spcPct val="150000"/>
+              </a:lnSpc>
+              <a:buNone/>
+            </a:pPr>
+            <a:r>
+              <a:rPr lang="en-US" altLang="ko-KR" sz="2000" b="1" dirty="0">
+                <a:latin typeface="+mn-ea"/>
+              </a:rPr>
+              <a:t>&lt;</a:t>
+            </a:r>
+            <a:r>
+              <a:rPr lang="ko-KR" altLang="en-US" sz="2000" b="1" dirty="0">
+                <a:latin typeface="+mn-ea"/>
+              </a:rPr>
+              <a:t>일반적 지형 속성 특징</a:t>
+            </a:r>
+            <a:r>
+              <a:rPr lang="en-US" altLang="ko-KR" sz="2000" b="1" dirty="0">
+                <a:latin typeface="+mn-ea"/>
+              </a:rPr>
+              <a:t>&gt;</a:t>
+            </a:r>
+          </a:p>
+          <a:p>
+            <a:pPr>
+              <a:lnSpc>
+                <a:spcPct val="150000"/>
+              </a:lnSpc>
+              <a:buFontTx/>
+              <a:buChar char="-"/>
+            </a:pPr>
+            <a:r>
+              <a:rPr lang="ko-KR" altLang="en-US" sz="1600" dirty="0">
+                <a:latin typeface="+mn-ea"/>
+              </a:rPr>
+              <a:t>불 </a:t>
+            </a:r>
+            <a:r>
+              <a:rPr lang="en-US" altLang="ko-KR" sz="1600" dirty="0">
+                <a:latin typeface="+mn-ea"/>
+              </a:rPr>
+              <a:t>: 	</a:t>
+            </a:r>
+            <a:r>
+              <a:rPr lang="ko-KR" altLang="en-US" sz="1600" dirty="0">
+                <a:latin typeface="+mn-ea"/>
+              </a:rPr>
+              <a:t>화염 </a:t>
+            </a:r>
+            <a:r>
+              <a:rPr lang="en-US" altLang="ko-KR" sz="1600" dirty="0">
+                <a:latin typeface="+mn-ea"/>
+              </a:rPr>
+              <a:t>	– </a:t>
+            </a:r>
+            <a:r>
+              <a:rPr lang="ko-KR" altLang="en-US" sz="1600" dirty="0">
+                <a:latin typeface="+mn-ea"/>
+              </a:rPr>
+              <a:t>화상 유발</a:t>
+            </a:r>
+            <a:endParaRPr lang="en-US" altLang="ko-KR" sz="1600" dirty="0">
+              <a:latin typeface="+mn-ea"/>
+            </a:endParaRPr>
+          </a:p>
+          <a:p>
+            <a:pPr>
+              <a:lnSpc>
+                <a:spcPct val="150000"/>
+              </a:lnSpc>
+              <a:buFontTx/>
+              <a:buChar char="-"/>
+            </a:pPr>
+            <a:r>
+              <a:rPr lang="ko-KR" altLang="en-US" sz="1600" dirty="0">
+                <a:latin typeface="+mn-ea"/>
+              </a:rPr>
+              <a:t>물 </a:t>
+            </a:r>
+            <a:r>
+              <a:rPr lang="en-US" altLang="ko-KR" sz="1600" dirty="0">
+                <a:latin typeface="+mn-ea"/>
+              </a:rPr>
+              <a:t>:	</a:t>
+            </a:r>
+            <a:r>
+              <a:rPr lang="ko-KR" altLang="en-US" sz="1600" dirty="0">
+                <a:latin typeface="+mn-ea"/>
+              </a:rPr>
+              <a:t>물웅덩이 </a:t>
+            </a:r>
+            <a:r>
+              <a:rPr lang="en-US" altLang="ko-KR" sz="1600" dirty="0">
+                <a:latin typeface="+mn-ea"/>
+              </a:rPr>
+              <a:t>	– </a:t>
+            </a:r>
+            <a:r>
+              <a:rPr lang="ko-KR" altLang="en-US" sz="1600" dirty="0">
+                <a:latin typeface="+mn-ea"/>
+              </a:rPr>
+              <a:t>이동 반경 감소 </a:t>
+            </a:r>
+            <a:endParaRPr lang="en-US" altLang="ko-KR" sz="1600" dirty="0">
+              <a:latin typeface="+mn-ea"/>
+            </a:endParaRPr>
+          </a:p>
+          <a:p>
+            <a:pPr>
+              <a:lnSpc>
+                <a:spcPct val="150000"/>
+              </a:lnSpc>
+              <a:buFontTx/>
+              <a:buChar char="-"/>
+            </a:pPr>
+            <a:r>
+              <a:rPr lang="ko-KR" altLang="en-US" sz="1600" dirty="0">
+                <a:latin typeface="+mn-ea"/>
+              </a:rPr>
+              <a:t>땅 </a:t>
+            </a:r>
+            <a:r>
+              <a:rPr lang="en-US" altLang="ko-KR" sz="1600" dirty="0">
+                <a:latin typeface="+mn-ea"/>
+              </a:rPr>
+              <a:t>:	</a:t>
+            </a:r>
+            <a:r>
+              <a:rPr lang="ko-KR" altLang="en-US" sz="1600" dirty="0">
+                <a:latin typeface="+mn-ea"/>
+              </a:rPr>
+              <a:t>암석 </a:t>
+            </a:r>
+            <a:r>
+              <a:rPr lang="en-US" altLang="ko-KR" sz="1600" dirty="0">
+                <a:latin typeface="+mn-ea"/>
+              </a:rPr>
+              <a:t>	– </a:t>
+            </a:r>
+            <a:r>
+              <a:rPr lang="ko-KR" altLang="en-US" sz="1600" dirty="0">
+                <a:latin typeface="+mn-ea"/>
+              </a:rPr>
+              <a:t>장애물</a:t>
+            </a:r>
+            <a:r>
+              <a:rPr lang="en-US" altLang="ko-KR" sz="1600" dirty="0">
+                <a:latin typeface="+mn-ea"/>
+              </a:rPr>
+              <a:t>(</a:t>
+            </a:r>
+            <a:r>
+              <a:rPr lang="ko-KR" altLang="en-US" sz="1600" dirty="0">
+                <a:latin typeface="+mn-ea"/>
+              </a:rPr>
+              <a:t>이동</a:t>
+            </a:r>
+            <a:r>
+              <a:rPr lang="en-US" altLang="ko-KR" sz="1600" dirty="0">
+                <a:latin typeface="+mn-ea"/>
+              </a:rPr>
+              <a:t>, </a:t>
+            </a:r>
+            <a:r>
+              <a:rPr lang="ko-KR" altLang="en-US" sz="1600" dirty="0">
+                <a:latin typeface="+mn-ea"/>
+              </a:rPr>
+              <a:t>원거리공격 방해</a:t>
+            </a:r>
+            <a:r>
+              <a:rPr lang="en-US" altLang="ko-KR" sz="1600" dirty="0">
+                <a:latin typeface="+mn-ea"/>
+              </a:rPr>
+              <a:t>, </a:t>
+            </a:r>
+            <a:r>
+              <a:rPr lang="ko-KR" altLang="en-US" sz="1600" dirty="0">
+                <a:latin typeface="+mn-ea"/>
+              </a:rPr>
+              <a:t>밀치기</a:t>
+            </a:r>
+            <a:r>
+              <a:rPr lang="en-US" altLang="ko-KR" sz="1600" dirty="0">
+                <a:latin typeface="+mn-ea"/>
+              </a:rPr>
+              <a:t>)</a:t>
+            </a:r>
+          </a:p>
+          <a:p>
+            <a:pPr>
+              <a:lnSpc>
+                <a:spcPct val="150000"/>
+              </a:lnSpc>
+              <a:buFontTx/>
+              <a:buChar char="-"/>
+            </a:pPr>
+            <a:r>
+              <a:rPr lang="ko-KR" altLang="en-US" sz="1600" dirty="0">
+                <a:latin typeface="+mn-ea"/>
+              </a:rPr>
+              <a:t>바람 </a:t>
+            </a:r>
+            <a:r>
+              <a:rPr lang="en-US" altLang="ko-KR" sz="1600" dirty="0">
+                <a:latin typeface="+mn-ea"/>
+              </a:rPr>
+              <a:t>: 	</a:t>
+            </a:r>
+            <a:r>
+              <a:rPr lang="ko-KR" altLang="en-US" sz="1600" dirty="0">
+                <a:latin typeface="+mn-ea"/>
+              </a:rPr>
+              <a:t>기류 </a:t>
+            </a:r>
+            <a:r>
+              <a:rPr lang="en-US" altLang="ko-KR" sz="1600" dirty="0">
+                <a:latin typeface="+mn-ea"/>
+              </a:rPr>
+              <a:t>	– </a:t>
+            </a:r>
+            <a:r>
+              <a:rPr lang="ko-KR" altLang="en-US" sz="1600" dirty="0">
+                <a:latin typeface="+mn-ea"/>
+              </a:rPr>
+              <a:t>특정 방향을 가짐</a:t>
+            </a:r>
+            <a:r>
+              <a:rPr lang="en-US" altLang="ko-KR" sz="1600" dirty="0">
+                <a:latin typeface="+mn-ea"/>
+              </a:rPr>
+              <a:t>, </a:t>
+            </a:r>
+            <a:r>
+              <a:rPr lang="ko-KR" altLang="en-US" sz="1600" dirty="0">
+                <a:latin typeface="+mn-ea"/>
+              </a:rPr>
+              <a:t>해당 방향으로 이동을 시작 할 때 </a:t>
+            </a:r>
+            <a:r>
+              <a:rPr lang="en-US" altLang="ko-KR" sz="1600" dirty="0">
+                <a:latin typeface="+mn-ea"/>
+              </a:rPr>
+              <a:t>AP </a:t>
+            </a:r>
+            <a:r>
+              <a:rPr lang="ko-KR" altLang="en-US" sz="1600" dirty="0">
+                <a:latin typeface="+mn-ea"/>
+              </a:rPr>
+              <a:t>소모가 </a:t>
+            </a:r>
+            <a:r>
+              <a:rPr lang="en-US" altLang="ko-KR" sz="1600" dirty="0">
+                <a:latin typeface="+mn-ea"/>
+              </a:rPr>
+              <a:t>0</a:t>
+            </a:r>
+          </a:p>
+          <a:p>
+            <a:pPr>
+              <a:lnSpc>
+                <a:spcPct val="150000"/>
+              </a:lnSpc>
+              <a:buFontTx/>
+              <a:buChar char="-"/>
+            </a:pPr>
+            <a:r>
+              <a:rPr lang="ko-KR" altLang="en-US" sz="1600" dirty="0">
+                <a:latin typeface="+mn-ea"/>
+              </a:rPr>
+              <a:t>얼음 </a:t>
+            </a:r>
+            <a:r>
+              <a:rPr lang="en-US" altLang="ko-KR" sz="1600" dirty="0">
+                <a:latin typeface="+mn-ea"/>
+              </a:rPr>
+              <a:t>:	</a:t>
+            </a:r>
+            <a:r>
+              <a:rPr lang="ko-KR" altLang="en-US" sz="1600" dirty="0">
+                <a:latin typeface="+mn-ea"/>
+              </a:rPr>
+              <a:t>빙판</a:t>
+            </a:r>
+            <a:r>
+              <a:rPr lang="en-US" altLang="ko-KR" sz="1600" dirty="0">
+                <a:latin typeface="+mn-ea"/>
+              </a:rPr>
+              <a:t>	– </a:t>
+            </a:r>
+            <a:r>
+              <a:rPr lang="ko-KR" altLang="en-US" sz="1600" dirty="0">
+                <a:latin typeface="+mn-ea"/>
+              </a:rPr>
+              <a:t>미끄러짐</a:t>
+            </a:r>
+            <a:endParaRPr lang="en-US" altLang="ko-KR" sz="1600" dirty="0">
+              <a:latin typeface="+mn-ea"/>
+            </a:endParaRPr>
+          </a:p>
+          <a:p>
+            <a:pPr>
+              <a:lnSpc>
+                <a:spcPct val="150000"/>
+              </a:lnSpc>
+              <a:buFontTx/>
+              <a:buChar char="-"/>
+            </a:pPr>
+            <a:r>
+              <a:rPr lang="ko-KR" altLang="en-US" sz="1600" dirty="0">
+                <a:latin typeface="+mn-ea"/>
+              </a:rPr>
+              <a:t>번개 </a:t>
+            </a:r>
+            <a:r>
+              <a:rPr lang="en-US" altLang="ko-KR" sz="1600" dirty="0">
+                <a:latin typeface="+mn-ea"/>
+              </a:rPr>
+              <a:t>:	</a:t>
+            </a:r>
+            <a:r>
+              <a:rPr lang="ko-KR" altLang="en-US" sz="1600" dirty="0">
+                <a:latin typeface="+mn-ea"/>
+              </a:rPr>
+              <a:t>전류</a:t>
+            </a:r>
+            <a:r>
+              <a:rPr lang="en-US" altLang="ko-KR" sz="1600" dirty="0">
+                <a:latin typeface="+mn-ea"/>
+              </a:rPr>
+              <a:t> 	– </a:t>
+            </a:r>
+            <a:r>
+              <a:rPr lang="ko-KR" altLang="en-US" sz="1600" dirty="0">
+                <a:latin typeface="+mn-ea"/>
+              </a:rPr>
+              <a:t>감전 유발</a:t>
+            </a:r>
+            <a:endParaRPr lang="en-US" altLang="ko-KR" sz="1600" dirty="0">
+              <a:latin typeface="+mn-ea"/>
+            </a:endParaRPr>
+          </a:p>
+          <a:p>
+            <a:pPr>
+              <a:lnSpc>
+                <a:spcPct val="150000"/>
+              </a:lnSpc>
+              <a:buFontTx/>
+              <a:buChar char="-"/>
+            </a:pPr>
+            <a:r>
+              <a:rPr lang="ko-KR" altLang="en-US" sz="1600" dirty="0">
+                <a:latin typeface="+mn-ea"/>
+              </a:rPr>
+              <a:t>빛 </a:t>
+            </a:r>
+            <a:r>
+              <a:rPr lang="en-US" altLang="ko-KR" sz="1600" dirty="0">
+                <a:latin typeface="+mn-ea"/>
+              </a:rPr>
+              <a:t>:	</a:t>
+            </a:r>
+            <a:r>
+              <a:rPr lang="ko-KR" altLang="en-US" sz="1600" dirty="0">
+                <a:latin typeface="+mn-ea"/>
+              </a:rPr>
+              <a:t>성역</a:t>
+            </a:r>
+            <a:r>
+              <a:rPr lang="en-US" altLang="ko-KR" sz="1600" dirty="0">
+                <a:latin typeface="+mn-ea"/>
+              </a:rPr>
+              <a:t> 	– </a:t>
+            </a:r>
+            <a:r>
+              <a:rPr lang="ko-KR" altLang="en-US" sz="1600" dirty="0">
+                <a:latin typeface="+mn-ea"/>
+              </a:rPr>
+              <a:t>턴 종료 시 타일 위 대상의 디버프 </a:t>
+            </a:r>
+            <a:r>
+              <a:rPr lang="en-US" altLang="ko-KR" sz="1600" dirty="0">
+                <a:latin typeface="+mn-ea"/>
+              </a:rPr>
+              <a:t>1</a:t>
+            </a:r>
+            <a:r>
+              <a:rPr lang="ko-KR" altLang="en-US" sz="1600" dirty="0">
+                <a:latin typeface="+mn-ea"/>
+              </a:rPr>
+              <a:t>개 정화</a:t>
+            </a:r>
+            <a:endParaRPr lang="en-US" altLang="ko-KR" sz="1600" dirty="0">
+              <a:latin typeface="+mn-ea"/>
+            </a:endParaRPr>
+          </a:p>
+          <a:p>
+            <a:pPr>
+              <a:lnSpc>
+                <a:spcPct val="150000"/>
+              </a:lnSpc>
+              <a:buFontTx/>
+              <a:buChar char="-"/>
+            </a:pPr>
+            <a:r>
+              <a:rPr lang="ko-KR" altLang="en-US" sz="1600" dirty="0">
+                <a:latin typeface="+mn-ea"/>
+              </a:rPr>
+              <a:t>어둠 </a:t>
+            </a:r>
+            <a:r>
+              <a:rPr lang="en-US" altLang="ko-KR" sz="1600" dirty="0">
+                <a:latin typeface="+mn-ea"/>
+              </a:rPr>
+              <a:t>:	</a:t>
+            </a:r>
+            <a:r>
+              <a:rPr lang="ko-KR" altLang="en-US" sz="1600" dirty="0">
+                <a:latin typeface="+mn-ea"/>
+              </a:rPr>
+              <a:t>심연</a:t>
+            </a:r>
+            <a:r>
+              <a:rPr lang="en-US" altLang="ko-KR" sz="1600" dirty="0">
+                <a:latin typeface="+mn-ea"/>
+              </a:rPr>
+              <a:t> 	– </a:t>
+            </a:r>
+            <a:r>
+              <a:rPr lang="ko-KR" altLang="en-US" sz="1600" dirty="0">
+                <a:latin typeface="+mn-ea"/>
+              </a:rPr>
+              <a:t>턴 종료 시 타일 위 대상에게 혼란 스택 부여</a:t>
+            </a:r>
+            <a:r>
+              <a:rPr lang="en-US" altLang="ko-KR" sz="1600" dirty="0">
+                <a:latin typeface="+mn-ea"/>
+              </a:rPr>
+              <a:t> + </a:t>
+            </a:r>
+            <a:r>
+              <a:rPr lang="ko-KR" altLang="en-US" sz="1600" dirty="0">
+                <a:latin typeface="+mn-ea"/>
+              </a:rPr>
+              <a:t>타일 위에서는 치유불가</a:t>
+            </a:r>
+            <a:endParaRPr lang="en-US" altLang="ko-KR" sz="1600" dirty="0">
+              <a:latin typeface="+mn-ea"/>
+            </a:endParaRPr>
+          </a:p>
+        </p:txBody>
+      </p:sp>
+      <p:sp>
+        <p:nvSpPr>
+          <p:cNvPr id="4" name="내용 개체 틀 2">
+            <a:extLst>
+              <a:ext uri="{FF2B5EF4-FFF2-40B4-BE49-F238E27FC236}">
+                <a16:creationId xmlns:a16="http://schemas.microsoft.com/office/drawing/2014/main" id="{859F267D-8CF4-F8D5-8068-1DE4B8CA7D6C}"/>
+              </a:ext>
+            </a:extLst>
+          </p:cNvPr>
+          <p:cNvSpPr txBox="1">
+            <a:spLocks/>
+          </p:cNvSpPr>
+          <p:nvPr/>
+        </p:nvSpPr>
+        <p:spPr>
+          <a:xfrm>
+            <a:off x="3917244" y="1825625"/>
+            <a:ext cx="7436556" cy="556332"/>
+          </a:xfrm>
+          <a:prstGeom prst="rect">
+            <a:avLst/>
+          </a:prstGeom>
+        </p:spPr>
+        <p:txBody>
+          <a:bodyPr vert="horz" lIns="91440" tIns="45720" rIns="91440" bIns="45720" rtlCol="0">
+            <a:noAutofit/>
+          </a:bodyPr>
+          <a:lstStyle>
+            <a:lvl1pPr marL="228600" indent="-228600" algn="l" defTabSz="914400" rtl="0" eaLnBrk="1" latinLnBrk="1" hangingPunct="1">
+              <a:lnSpc>
+                <a:spcPct val="90000"/>
+              </a:lnSpc>
+              <a:spcBef>
+                <a:spcPts val="1000"/>
+              </a:spcBef>
+              <a:buFont typeface="Arial" panose="020B0604020202020204" pitchFamily="34" charset="0"/>
+              <a:buChar char="•"/>
+              <a:defRPr sz="2800" kern="1200">
+                <a:solidFill>
+                  <a:schemeClr val="tx1"/>
+                </a:solidFill>
+                <a:latin typeface="+mn-lt"/>
+                <a:ea typeface="+mn-ea"/>
+                <a:cs typeface="+mn-cs"/>
+              </a:defRPr>
+            </a:lvl1pPr>
+            <a:lvl2pPr marL="685800" indent="-228600" algn="l" defTabSz="914400" rtl="0" eaLnBrk="1" latinLnBrk="1" hangingPunct="1">
+              <a:lnSpc>
+                <a:spcPct val="90000"/>
+              </a:lnSpc>
+              <a:spcBef>
+                <a:spcPts val="500"/>
+              </a:spcBef>
+              <a:buFont typeface="Arial" panose="020B0604020202020204" pitchFamily="34" charset="0"/>
+              <a:buChar char="•"/>
+              <a:defRPr sz="2400" kern="1200">
+                <a:solidFill>
+                  <a:schemeClr val="tx1"/>
+                </a:solidFill>
+                <a:latin typeface="+mn-lt"/>
+                <a:ea typeface="+mn-ea"/>
+                <a:cs typeface="+mn-cs"/>
+              </a:defRPr>
+            </a:lvl2pPr>
+            <a:lvl3pPr marL="1143000" indent="-228600" algn="l" defTabSz="914400" rtl="0" eaLnBrk="1" latinLnBrk="1" hangingPunct="1">
+              <a:lnSpc>
+                <a:spcPct val="90000"/>
+              </a:lnSpc>
+              <a:spcBef>
+                <a:spcPts val="500"/>
+              </a:spcBef>
+              <a:buFont typeface="Arial" panose="020B0604020202020204" pitchFamily="34" charset="0"/>
+              <a:buChar char="•"/>
+              <a:defRPr sz="2000" kern="1200">
+                <a:solidFill>
+                  <a:schemeClr val="tx1"/>
+                </a:solidFill>
+                <a:latin typeface="+mn-lt"/>
+                <a:ea typeface="+mn-ea"/>
+                <a:cs typeface="+mn-cs"/>
+              </a:defRPr>
+            </a:lvl3pPr>
+            <a:lvl4pPr marL="1600200" indent="-228600" algn="l" defTabSz="914400" rtl="0" eaLnBrk="1" latinLnBrk="1" hangingPunct="1">
+              <a:lnSpc>
+                <a:spcPct val="90000"/>
+              </a:lnSpc>
+              <a:spcBef>
+                <a:spcPts val="500"/>
+              </a:spcBef>
+              <a:buFont typeface="Arial" panose="020B0604020202020204" pitchFamily="34" charset="0"/>
+              <a:buChar char="•"/>
+              <a:defRPr sz="1800" kern="1200">
+                <a:solidFill>
+                  <a:schemeClr val="tx1"/>
+                </a:solidFill>
+                <a:latin typeface="+mn-lt"/>
+                <a:ea typeface="+mn-ea"/>
+                <a:cs typeface="+mn-cs"/>
+              </a:defRPr>
+            </a:lvl4pPr>
+            <a:lvl5pPr marL="2057400" indent="-228600" algn="l" defTabSz="914400" rtl="0" eaLnBrk="1" latinLnBrk="1" hangingPunct="1">
+              <a:lnSpc>
+                <a:spcPct val="90000"/>
+              </a:lnSpc>
+              <a:spcBef>
+                <a:spcPts val="500"/>
+              </a:spcBef>
+              <a:buFont typeface="Arial" panose="020B0604020202020204" pitchFamily="34" charset="0"/>
+              <a:buChar char="•"/>
+              <a:defRPr sz="1800" kern="1200">
+                <a:solidFill>
+                  <a:schemeClr val="tx1"/>
+                </a:solidFill>
+                <a:latin typeface="+mn-lt"/>
+                <a:ea typeface="+mn-ea"/>
+                <a:cs typeface="+mn-cs"/>
+              </a:defRPr>
+            </a:lvl5pPr>
+            <a:lvl6pPr marL="2514600" indent="-228600" algn="l" defTabSz="914400" rtl="0" eaLnBrk="1" latinLnBrk="1" hangingPunct="1">
+              <a:lnSpc>
+                <a:spcPct val="90000"/>
+              </a:lnSpc>
+              <a:spcBef>
+                <a:spcPts val="500"/>
+              </a:spcBef>
+              <a:buFont typeface="Arial" panose="020B0604020202020204" pitchFamily="34" charset="0"/>
+              <a:buChar char="•"/>
+              <a:defRPr sz="1800" kern="1200">
+                <a:solidFill>
+                  <a:schemeClr val="tx1"/>
+                </a:solidFill>
+                <a:latin typeface="+mn-lt"/>
+                <a:ea typeface="+mn-ea"/>
+                <a:cs typeface="+mn-cs"/>
+              </a:defRPr>
+            </a:lvl6pPr>
+            <a:lvl7pPr marL="2971800" indent="-228600" algn="l" defTabSz="914400" rtl="0" eaLnBrk="1" latinLnBrk="1" hangingPunct="1">
+              <a:lnSpc>
+                <a:spcPct val="90000"/>
+              </a:lnSpc>
+              <a:spcBef>
+                <a:spcPts val="500"/>
+              </a:spcBef>
+              <a:buFont typeface="Arial" panose="020B0604020202020204" pitchFamily="34" charset="0"/>
+              <a:buChar char="•"/>
+              <a:defRPr sz="1800" kern="1200">
+                <a:solidFill>
+                  <a:schemeClr val="tx1"/>
+                </a:solidFill>
+                <a:latin typeface="+mn-lt"/>
+                <a:ea typeface="+mn-ea"/>
+                <a:cs typeface="+mn-cs"/>
+              </a:defRPr>
+            </a:lvl7pPr>
+            <a:lvl8pPr marL="3429000" indent="-228600" algn="l" defTabSz="914400" rtl="0" eaLnBrk="1" latinLnBrk="1" hangingPunct="1">
+              <a:lnSpc>
+                <a:spcPct val="90000"/>
+              </a:lnSpc>
+              <a:spcBef>
+                <a:spcPts val="500"/>
+              </a:spcBef>
+              <a:buFont typeface="Arial" panose="020B0604020202020204" pitchFamily="34" charset="0"/>
+              <a:buChar char="•"/>
+              <a:defRPr sz="1800" kern="1200">
+                <a:solidFill>
+                  <a:schemeClr val="tx1"/>
+                </a:solidFill>
+                <a:latin typeface="+mn-lt"/>
+                <a:ea typeface="+mn-ea"/>
+                <a:cs typeface="+mn-cs"/>
+              </a:defRPr>
+            </a:lvl8pPr>
+            <a:lvl9pPr marL="3886200" indent="-228600" algn="l" defTabSz="914400" rtl="0" eaLnBrk="1" latinLnBrk="1" hangingPunct="1">
+              <a:lnSpc>
+                <a:spcPct val="90000"/>
+              </a:lnSpc>
+              <a:spcBef>
+                <a:spcPts val="500"/>
+              </a:spcBef>
+              <a:buFont typeface="Arial" panose="020B0604020202020204" pitchFamily="34" charset="0"/>
+              <a:buChar char="•"/>
+              <a:defRPr sz="1800" kern="1200">
+                <a:solidFill>
+                  <a:schemeClr val="tx1"/>
+                </a:solidFill>
+                <a:latin typeface="+mn-lt"/>
+                <a:ea typeface="+mn-ea"/>
+                <a:cs typeface="+mn-cs"/>
+              </a:defRPr>
+            </a:lvl9pPr>
+          </a:lstStyle>
+          <a:p>
+            <a:pPr marL="0" indent="0" algn="ctr">
+              <a:lnSpc>
+                <a:spcPct val="150000"/>
+              </a:lnSpc>
+              <a:buFont typeface="Arial" panose="020B0604020202020204" pitchFamily="34" charset="0"/>
+              <a:buNone/>
+            </a:pPr>
+            <a:r>
+              <a:rPr lang="en-US" altLang="ko-KR" sz="1800" b="1" dirty="0">
+                <a:latin typeface="+mn-ea"/>
+              </a:rPr>
+              <a:t>*</a:t>
+            </a:r>
+            <a:r>
+              <a:rPr lang="ko-KR" altLang="en-US" sz="1800" b="1" dirty="0">
+                <a:latin typeface="+mn-ea"/>
+              </a:rPr>
+              <a:t>모든 속성 카드가 아닌</a:t>
+            </a:r>
+            <a:r>
+              <a:rPr lang="en-US" altLang="ko-KR" sz="1800" b="1" dirty="0">
+                <a:latin typeface="+mn-ea"/>
+              </a:rPr>
+              <a:t> </a:t>
+            </a:r>
+            <a:r>
+              <a:rPr lang="ko-KR" altLang="en-US" sz="1800" b="1" dirty="0">
+                <a:latin typeface="+mn-ea"/>
+              </a:rPr>
+              <a:t>특정한 카드들 만이 지형 변화를 유발 시킨다</a:t>
+            </a:r>
+            <a:endParaRPr lang="en-US" altLang="ko-KR" sz="1800" b="1" dirty="0">
+              <a:latin typeface="+mn-ea"/>
+            </a:endParaRPr>
+          </a:p>
+        </p:txBody>
+      </p:sp>
+    </p:spTree>
+    <p:extLst>
+      <p:ext uri="{BB962C8B-B14F-4D97-AF65-F5344CB8AC3E}">
+        <p14:creationId xmlns:p14="http://schemas.microsoft.com/office/powerpoint/2010/main" val="3333431584"/>
+      </p:ext>
+    </p:extLst>
+  </p:cSld>
+  <p:clrMapOvr>
+    <a:masterClrMapping/>
+  </p:clrMapOvr>
+</p:sld>
+</file>
+
+<file path=ppt/slides/slide19.xml><?xml version="1.0" encoding="utf-8"?>
 <p:sld xmlns:a="http://schemas.openxmlformats.org/drawingml/2006/main" xmlns:r="http://schemas.openxmlformats.org/officeDocument/2006/relationships" xmlns:p="http://schemas.openxmlformats.org/presentationml/2006/main">
   <p:cSld>
     <p:spTree>
@@ -5303,7 +6872,7 @@
         </p:spPr>
         <p:txBody>
           <a:bodyPr>
-            <a:normAutofit lnSpcReduction="10000"/>
+            <a:normAutofit/>
           </a:bodyPr>
           <a:lstStyle/>
           <a:p>
@@ -5376,14 +6945,6 @@
               </a:rPr>
               <a:t>)</a:t>
             </a:r>
-          </a:p>
-          <a:p>
-            <a:pPr marL="0" indent="0">
-              <a:lnSpc>
-                <a:spcPct val="150000"/>
-              </a:lnSpc>
-              <a:buNone/>
-            </a:pPr>
             <a:endParaRPr lang="en-US" altLang="ko-KR" sz="2000" dirty="0">
               <a:latin typeface="+mn-ea"/>
             </a:endParaRPr>
@@ -5398,7 +6959,7 @@
               <a:rPr lang="ko-KR" altLang="en-US" sz="2000" dirty="0">
                 <a:latin typeface="+mn-ea"/>
               </a:rPr>
-              <a:t>속성 덱 컨셉</a:t>
+              <a:t>단일 속성 덱 컨셉</a:t>
             </a:r>
             <a:endParaRPr lang="en-US" altLang="ko-KR" sz="2000" dirty="0">
               <a:latin typeface="+mn-ea"/>
@@ -5466,6 +7027,22 @@
                 <a:latin typeface="+mn-ea"/>
               </a:rPr>
               <a:t>땅</a:t>
+            </a:r>
+            <a:endParaRPr lang="en-US" altLang="ko-KR" sz="1600" dirty="0">
+              <a:latin typeface="+mn-ea"/>
+            </a:endParaRPr>
+          </a:p>
+          <a:p>
+            <a:pPr lvl="1">
+              <a:lnSpc>
+                <a:spcPct val="150000"/>
+              </a:lnSpc>
+            </a:pPr>
+            <a:r>
+              <a:rPr lang="ko-KR" altLang="en-US" sz="1600" dirty="0">
+                <a:latin typeface="+mn-ea"/>
+              </a:rPr>
+              <a:t>얼음</a:t>
             </a:r>
             <a:endParaRPr lang="en-US" altLang="ko-KR" sz="1600" dirty="0">
               <a:latin typeface="+mn-ea"/>
@@ -5747,9 +7324,10 @@
               <a:buAutoNum type="arabicPeriod"/>
             </a:pPr>
             <a:r>
-              <a:rPr lang="en-US" altLang="ko-KR" sz="1600" dirty="0"/>
-              <a:t>Key Settings</a:t>
-            </a:r>
+              <a:rPr lang="ko-KR" altLang="en-US" sz="1600" dirty="0"/>
+              <a:t>키 설정</a:t>
+            </a:r>
+            <a:endParaRPr lang="en-US" altLang="ko-KR" sz="1600" dirty="0"/>
           </a:p>
         </p:txBody>
       </p:sp>
@@ -5966,7 +7544,15 @@
             </a:pPr>
             <a:r>
               <a:rPr lang="ko-KR" altLang="en-US" sz="1600" dirty="0"/>
-              <a:t>기본 룰</a:t>
+              <a:t>행동력</a:t>
+            </a:r>
+            <a:r>
+              <a:rPr lang="en-US" altLang="ko-KR" sz="1600" dirty="0"/>
+              <a:t>(AP) </a:t>
+            </a:r>
+            <a:r>
+              <a:rPr lang="ko-KR" altLang="en-US" sz="1600" dirty="0"/>
+              <a:t>규칙</a:t>
             </a:r>
             <a:endParaRPr lang="en-US" altLang="ko-KR" sz="1600" dirty="0"/>
           </a:p>
@@ -5980,7 +7566,54 @@
             </a:pPr>
             <a:r>
               <a:rPr lang="ko-KR" altLang="en-US" sz="1600" dirty="0"/>
-              <a:t>스테이지 구성</a:t>
+              <a:t>턴 흐름 및 적 </a:t>
+            </a:r>
+            <a:r>
+              <a:rPr lang="en-US" altLang="ko-KR" sz="1600" dirty="0"/>
+              <a:t>AI</a:t>
+            </a:r>
+          </a:p>
+          <a:p>
+            <a:pPr marL="914400" lvl="1" indent="-457200">
+              <a:lnSpc>
+                <a:spcPct val="150000"/>
+              </a:lnSpc>
+              <a:buFont typeface="Arial" panose="020B0604020202020204" pitchFamily="34" charset="0"/>
+              <a:buAutoNum type="arabicPeriod"/>
+            </a:pPr>
+            <a:r>
+              <a:rPr lang="ko-KR" altLang="en-US" sz="1600" dirty="0"/>
+              <a:t>속성 및 지형변화</a:t>
+            </a:r>
+            <a:r>
+              <a:rPr lang="en-US" altLang="ko-KR" sz="1600" dirty="0"/>
+              <a:t>, </a:t>
+            </a:r>
+            <a:r>
+              <a:rPr lang="ko-KR" altLang="en-US" sz="1600" dirty="0"/>
+              <a:t>연쇄반응</a:t>
+            </a:r>
+            <a:endParaRPr lang="en-US" altLang="ko-KR" sz="1600" dirty="0"/>
+          </a:p>
+          <a:p>
+            <a:pPr marL="914400" lvl="1" indent="-457200">
+              <a:lnSpc>
+                <a:spcPct val="150000"/>
+              </a:lnSpc>
+              <a:buFont typeface="Arial" panose="020B0604020202020204" pitchFamily="34" charset="0"/>
+              <a:buAutoNum type="arabicPeriod"/>
+            </a:pPr>
+            <a:r>
+              <a:rPr lang="ko-KR" altLang="en-US" sz="1600" dirty="0"/>
+              <a:t>마법</a:t>
+            </a:r>
+            <a:r>
+              <a:rPr lang="en-US" altLang="ko-KR" sz="1600" dirty="0"/>
+              <a:t>/</a:t>
+            </a:r>
+            <a:r>
+              <a:rPr lang="ko-KR" altLang="en-US" sz="1600" dirty="0"/>
+              <a:t>덱 컨셉</a:t>
             </a:r>
             <a:endParaRPr lang="en-US" altLang="ko-KR" sz="1600" dirty="0"/>
           </a:p>

--- a/_문서/_Project Entropy 기획문서.pptx
+++ b/_문서/_Project Entropy 기획문서.pptx
@@ -6885,223 +6885,44 @@
               <a:rPr lang="ko-KR" altLang="en-US" sz="2000" dirty="0">
                 <a:latin typeface="+mn-ea"/>
               </a:rPr>
-              <a:t>단일 속성 만으로도 온전히 작동하도록 설계</a:t>
+              <a:t>시작 덱</a:t>
             </a:r>
             <a:r>
               <a:rPr lang="en-US" altLang="ko-KR" sz="2000" dirty="0">
                 <a:latin typeface="+mn-ea"/>
               </a:rPr>
+              <a:t>: </a:t>
+            </a:r>
+            <a:r>
+              <a:rPr lang="ko-KR" altLang="en-US" sz="2000" dirty="0">
+                <a:latin typeface="+mn-ea"/>
+              </a:rPr>
+              <a:t>불</a:t>
+            </a:r>
+            <a:r>
+              <a:rPr lang="en-US" altLang="ko-KR" sz="2000" dirty="0">
+                <a:latin typeface="+mn-ea"/>
+              </a:rPr>
               <a:t>/</a:t>
             </a:r>
             <a:r>
               <a:rPr lang="ko-KR" altLang="en-US" sz="2000" dirty="0">
                 <a:latin typeface="+mn-ea"/>
               </a:rPr>
-              <a:t>개발</a:t>
-            </a:r>
-            <a:endParaRPr lang="en-US" altLang="ko-KR" sz="2000" dirty="0">
-              <a:latin typeface="+mn-ea"/>
-            </a:endParaRPr>
-          </a:p>
-          <a:p>
-            <a:pPr lvl="1">
-              <a:lnSpc>
-                <a:spcPct val="150000"/>
-              </a:lnSpc>
-            </a:pPr>
-            <a:r>
-              <a:rPr lang="ko-KR" altLang="en-US" sz="1600" dirty="0">
-                <a:latin typeface="+mn-ea"/>
-              </a:rPr>
-              <a:t>빌드가 굉장히 많아질 듯 </a:t>
-            </a:r>
-            <a:r>
-              <a:rPr lang="en-US" altLang="ko-KR" sz="1600" dirty="0">
-                <a:latin typeface="+mn-ea"/>
-              </a:rPr>
-              <a:t>(</a:t>
-            </a:r>
-            <a:r>
-              <a:rPr lang="ko-KR" altLang="en-US" sz="1600" dirty="0">
-                <a:latin typeface="+mn-ea"/>
-              </a:rPr>
-              <a:t>단일 덱</a:t>
-            </a:r>
-            <a:r>
-              <a:rPr lang="en-US" altLang="ko-KR" sz="1600" dirty="0">
-                <a:latin typeface="+mn-ea"/>
-              </a:rPr>
-              <a:t>, </a:t>
-            </a:r>
-            <a:r>
-              <a:rPr lang="ko-KR" altLang="en-US" sz="1600" dirty="0">
-                <a:latin typeface="+mn-ea"/>
-              </a:rPr>
-              <a:t>혼합 덱 등</a:t>
-            </a:r>
-            <a:r>
-              <a:rPr lang="en-US" altLang="ko-KR" sz="1600" dirty="0">
-                <a:latin typeface="+mn-ea"/>
-              </a:rPr>
-              <a:t>)</a:t>
-            </a:r>
-            <a:endParaRPr lang="en-US" altLang="ko-KR" sz="2000" dirty="0">
-              <a:latin typeface="+mn-ea"/>
-            </a:endParaRPr>
-          </a:p>
-          <a:p>
-            <a:pPr>
-              <a:lnSpc>
-                <a:spcPct val="150000"/>
-              </a:lnSpc>
-            </a:pPr>
+              <a:t>물</a:t>
+            </a:r>
+            <a:r>
+              <a:rPr lang="en-US" altLang="ko-KR" sz="2000" dirty="0">
+                <a:latin typeface="+mn-ea"/>
+              </a:rPr>
+              <a:t>/</a:t>
+            </a:r>
             <a:r>
               <a:rPr lang="ko-KR" altLang="en-US" sz="2000" dirty="0">
                 <a:latin typeface="+mn-ea"/>
               </a:rPr>
-              <a:t>단일 속성 덱 컨셉</a:t>
-            </a:r>
-            <a:endParaRPr lang="en-US" altLang="ko-KR" sz="2000" dirty="0">
-              <a:latin typeface="+mn-ea"/>
-            </a:endParaRPr>
-          </a:p>
-          <a:p>
-            <a:pPr lvl="1">
-              <a:lnSpc>
-                <a:spcPct val="150000"/>
-              </a:lnSpc>
-            </a:pPr>
-            <a:r>
-              <a:rPr lang="ko-KR" altLang="en-US" sz="1600" dirty="0">
-                <a:latin typeface="+mn-ea"/>
-              </a:rPr>
-              <a:t>불</a:t>
-            </a:r>
-            <a:r>
-              <a:rPr lang="en-US" altLang="ko-KR" sz="1600" dirty="0">
-                <a:latin typeface="+mn-ea"/>
-              </a:rPr>
-              <a:t>	</a:t>
-            </a:r>
-          </a:p>
-          <a:p>
-            <a:pPr lvl="1">
-              <a:lnSpc>
-                <a:spcPct val="150000"/>
-              </a:lnSpc>
-            </a:pPr>
-            <a:r>
-              <a:rPr lang="ko-KR" altLang="en-US" sz="1600" dirty="0">
-                <a:latin typeface="+mn-ea"/>
-              </a:rPr>
-              <a:t>물</a:t>
-            </a:r>
-            <a:endParaRPr lang="en-US" altLang="ko-KR" sz="1600" dirty="0">
-              <a:latin typeface="+mn-ea"/>
-            </a:endParaRPr>
-          </a:p>
-          <a:p>
-            <a:pPr lvl="1">
-              <a:lnSpc>
-                <a:spcPct val="150000"/>
-              </a:lnSpc>
-            </a:pPr>
-            <a:r>
-              <a:rPr lang="ko-KR" altLang="en-US" sz="1600" dirty="0">
-                <a:latin typeface="+mn-ea"/>
-              </a:rPr>
-              <a:t>바람</a:t>
-            </a:r>
-            <a:endParaRPr lang="en-US" altLang="ko-KR" sz="1600" dirty="0">
-              <a:latin typeface="+mn-ea"/>
-            </a:endParaRPr>
-          </a:p>
-          <a:p>
-            <a:pPr lvl="1">
-              <a:lnSpc>
-                <a:spcPct val="150000"/>
-              </a:lnSpc>
-            </a:pPr>
-            <a:r>
-              <a:rPr lang="ko-KR" altLang="en-US" sz="1600" dirty="0">
-                <a:latin typeface="+mn-ea"/>
-              </a:rPr>
               <a:t>땅</a:t>
             </a:r>
-            <a:endParaRPr lang="en-US" altLang="ko-KR" sz="1600" dirty="0">
-              <a:latin typeface="+mn-ea"/>
-            </a:endParaRPr>
-          </a:p>
-          <a:p>
-            <a:pPr lvl="1">
-              <a:lnSpc>
-                <a:spcPct val="150000"/>
-              </a:lnSpc>
-            </a:pPr>
-            <a:r>
-              <a:rPr lang="ko-KR" altLang="en-US" sz="1600" dirty="0">
-                <a:latin typeface="+mn-ea"/>
-              </a:rPr>
-              <a:t>얼음</a:t>
-            </a:r>
-            <a:endParaRPr lang="en-US" altLang="ko-KR" sz="1600" dirty="0">
-              <a:latin typeface="+mn-ea"/>
-            </a:endParaRPr>
-          </a:p>
-          <a:p>
-            <a:pPr lvl="1">
-              <a:lnSpc>
-                <a:spcPct val="150000"/>
-              </a:lnSpc>
-            </a:pPr>
-            <a:r>
-              <a:rPr lang="ko-KR" altLang="en-US" sz="1600" dirty="0">
-                <a:latin typeface="+mn-ea"/>
-              </a:rPr>
-              <a:t>번개</a:t>
-            </a:r>
-            <a:endParaRPr lang="en-US" altLang="ko-KR" sz="1600" dirty="0">
-              <a:latin typeface="+mn-ea"/>
-            </a:endParaRPr>
-          </a:p>
-          <a:p>
-            <a:pPr lvl="1">
-              <a:lnSpc>
-                <a:spcPct val="150000"/>
-              </a:lnSpc>
-            </a:pPr>
-            <a:r>
-              <a:rPr lang="ko-KR" altLang="en-US" sz="1600" dirty="0">
-                <a:latin typeface="+mn-ea"/>
-              </a:rPr>
-              <a:t>빛</a:t>
-            </a:r>
-            <a:endParaRPr lang="en-US" altLang="ko-KR" sz="1600" dirty="0">
-              <a:latin typeface="+mn-ea"/>
-            </a:endParaRPr>
-          </a:p>
-          <a:p>
-            <a:pPr lvl="1">
-              <a:lnSpc>
-                <a:spcPct val="150000"/>
-              </a:lnSpc>
-            </a:pPr>
-            <a:r>
-              <a:rPr lang="ko-KR" altLang="en-US" sz="1600" dirty="0">
-                <a:latin typeface="+mn-ea"/>
-              </a:rPr>
-              <a:t>어둠</a:t>
-            </a:r>
-            <a:endParaRPr lang="en-US" altLang="ko-KR" sz="1600" dirty="0">
-              <a:latin typeface="+mn-ea"/>
-            </a:endParaRPr>
-          </a:p>
-          <a:p>
-            <a:pPr>
-              <a:lnSpc>
-                <a:spcPct val="150000"/>
-              </a:lnSpc>
-            </a:pPr>
             <a:endParaRPr lang="en-US" altLang="ko-KR" sz="1600" dirty="0">
               <a:latin typeface="+mn-ea"/>
             </a:endParaRPr>

--- a/_문서/_Project Entropy 기획문서.pptx
+++ b/_문서/_Project Entropy 기획문서.pptx
@@ -23,7 +23,8 @@
     <p:sldId id="272" r:id="rId17"/>
     <p:sldId id="273" r:id="rId18"/>
     <p:sldId id="276" r:id="rId19"/>
-    <p:sldId id="274" r:id="rId20"/>
+    <p:sldId id="277" r:id="rId20"/>
+    <p:sldId id="274" r:id="rId21"/>
   </p:sldIdLst>
   <p:sldSz cx="12192000" cy="6858000"/>
   <p:notesSz cx="6858000" cy="9144000"/>
@@ -277,7 +278,7 @@
           <a:p>
             <a:fld id="{DECF2A0E-2FBA-4159-9323-C233CC2AF0DB}" type="datetimeFigureOut">
               <a:rPr lang="ko-KR" altLang="en-US" smtClean="0"/>
-              <a:t>2026-07-13</a:t>
+              <a:t>2026-07-14</a:t>
             </a:fld>
             <a:endParaRPr lang="ko-KR" altLang="en-US"/>
           </a:p>
@@ -475,7 +476,7 @@
           <a:p>
             <a:fld id="{DECF2A0E-2FBA-4159-9323-C233CC2AF0DB}" type="datetimeFigureOut">
               <a:rPr lang="ko-KR" altLang="en-US" smtClean="0"/>
-              <a:t>2026-07-13</a:t>
+              <a:t>2026-07-14</a:t>
             </a:fld>
             <a:endParaRPr lang="ko-KR" altLang="en-US"/>
           </a:p>
@@ -683,7 +684,7 @@
           <a:p>
             <a:fld id="{DECF2A0E-2FBA-4159-9323-C233CC2AF0DB}" type="datetimeFigureOut">
               <a:rPr lang="ko-KR" altLang="en-US" smtClean="0"/>
-              <a:t>2026-07-13</a:t>
+              <a:t>2026-07-14</a:t>
             </a:fld>
             <a:endParaRPr lang="ko-KR" altLang="en-US"/>
           </a:p>
@@ -881,7 +882,7 @@
           <a:p>
             <a:fld id="{DECF2A0E-2FBA-4159-9323-C233CC2AF0DB}" type="datetimeFigureOut">
               <a:rPr lang="ko-KR" altLang="en-US" smtClean="0"/>
-              <a:t>2026-07-13</a:t>
+              <a:t>2026-07-14</a:t>
             </a:fld>
             <a:endParaRPr lang="ko-KR" altLang="en-US"/>
           </a:p>
@@ -1156,7 +1157,7 @@
           <a:p>
             <a:fld id="{DECF2A0E-2FBA-4159-9323-C233CC2AF0DB}" type="datetimeFigureOut">
               <a:rPr lang="ko-KR" altLang="en-US" smtClean="0"/>
-              <a:t>2026-07-13</a:t>
+              <a:t>2026-07-14</a:t>
             </a:fld>
             <a:endParaRPr lang="ko-KR" altLang="en-US"/>
           </a:p>
@@ -1421,7 +1422,7 @@
           <a:p>
             <a:fld id="{DECF2A0E-2FBA-4159-9323-C233CC2AF0DB}" type="datetimeFigureOut">
               <a:rPr lang="ko-KR" altLang="en-US" smtClean="0"/>
-              <a:t>2026-07-13</a:t>
+              <a:t>2026-07-14</a:t>
             </a:fld>
             <a:endParaRPr lang="ko-KR" altLang="en-US"/>
           </a:p>
@@ -1833,7 +1834,7 @@
           <a:p>
             <a:fld id="{DECF2A0E-2FBA-4159-9323-C233CC2AF0DB}" type="datetimeFigureOut">
               <a:rPr lang="ko-KR" altLang="en-US" smtClean="0"/>
-              <a:t>2026-07-13</a:t>
+              <a:t>2026-07-14</a:t>
             </a:fld>
             <a:endParaRPr lang="ko-KR" altLang="en-US"/>
           </a:p>
@@ -1974,7 +1975,7 @@
           <a:p>
             <a:fld id="{DECF2A0E-2FBA-4159-9323-C233CC2AF0DB}" type="datetimeFigureOut">
               <a:rPr lang="ko-KR" altLang="en-US" smtClean="0"/>
-              <a:t>2026-07-13</a:t>
+              <a:t>2026-07-14</a:t>
             </a:fld>
             <a:endParaRPr lang="ko-KR" altLang="en-US"/>
           </a:p>
@@ -2087,7 +2088,7 @@
           <a:p>
             <a:fld id="{DECF2A0E-2FBA-4159-9323-C233CC2AF0DB}" type="datetimeFigureOut">
               <a:rPr lang="ko-KR" altLang="en-US" smtClean="0"/>
-              <a:t>2026-07-13</a:t>
+              <a:t>2026-07-14</a:t>
             </a:fld>
             <a:endParaRPr lang="ko-KR" altLang="en-US"/>
           </a:p>
@@ -2398,7 +2399,7 @@
           <a:p>
             <a:fld id="{DECF2A0E-2FBA-4159-9323-C233CC2AF0DB}" type="datetimeFigureOut">
               <a:rPr lang="ko-KR" altLang="en-US" smtClean="0"/>
-              <a:t>2026-07-13</a:t>
+              <a:t>2026-07-14</a:t>
             </a:fld>
             <a:endParaRPr lang="ko-KR" altLang="en-US"/>
           </a:p>
@@ -2686,7 +2687,7 @@
           <a:p>
             <a:fld id="{DECF2A0E-2FBA-4159-9323-C233CC2AF0DB}" type="datetimeFigureOut">
               <a:rPr lang="ko-KR" altLang="en-US" smtClean="0"/>
-              <a:t>2026-07-13</a:t>
+              <a:t>2026-07-14</a:t>
             </a:fld>
             <a:endParaRPr lang="ko-KR" altLang="en-US"/>
           </a:p>
@@ -2927,7 +2928,7 @@
           <a:p>
             <a:fld id="{DECF2A0E-2FBA-4159-9323-C233CC2AF0DB}" type="datetimeFigureOut">
               <a:rPr lang="ko-KR" altLang="en-US" smtClean="0"/>
-              <a:t>2026-07-13</a:t>
+              <a:t>2026-07-14</a:t>
             </a:fld>
             <a:endParaRPr lang="ko-KR" altLang="en-US"/>
           </a:p>
@@ -4055,11 +4056,12 @@
           <a:bodyPr/>
           <a:lstStyle/>
           <a:p>
-            <a:r>
-              <a:rPr lang="en-US" altLang="ko-KR" dirty="0"/>
+            <a:pPr algn="ctr"/>
+            <a:r>
+              <a:rPr lang="en-US" altLang="ko-KR" b="1" dirty="0"/>
               <a:t>5. Game System</a:t>
             </a:r>
-            <a:endParaRPr lang="ko-KR" altLang="en-US" dirty="0"/>
+            <a:endParaRPr lang="ko-KR" altLang="en-US" b="1" dirty="0"/>
           </a:p>
         </p:txBody>
       </p:sp>
@@ -4081,12 +4083,12 @@
         </p:nvSpPr>
         <p:spPr/>
         <p:txBody>
-          <a:bodyPr>
+          <a:bodyPr anchor="ctr" anchorCtr="0">
             <a:normAutofit/>
           </a:bodyPr>
           <a:lstStyle/>
           <a:p>
-            <a:pPr>
+            <a:pPr algn="ctr">
               <a:lnSpc>
                 <a:spcPct val="150000"/>
               </a:lnSpc>
@@ -4110,7 +4112,7 @@
             <a:endParaRPr lang="en-US" altLang="ko-KR" sz="2000" dirty="0"/>
           </a:p>
           <a:p>
-            <a:pPr>
+            <a:pPr algn="ctr">
               <a:lnSpc>
                 <a:spcPct val="150000"/>
               </a:lnSpc>
@@ -4129,7 +4131,7 @@
             </a:r>
           </a:p>
           <a:p>
-            <a:pPr>
+            <a:pPr algn="ctr">
               <a:lnSpc>
                 <a:spcPct val="150000"/>
               </a:lnSpc>
@@ -4153,7 +4155,7 @@
             <a:endParaRPr lang="en-US" altLang="ko-KR" sz="2000" dirty="0"/>
           </a:p>
           <a:p>
-            <a:pPr>
+            <a:pPr algn="ctr">
               <a:lnSpc>
                 <a:spcPct val="150000"/>
               </a:lnSpc>
@@ -4164,15 +4166,7 @@
             </a:r>
             <a:r>
               <a:rPr lang="ko-KR" altLang="en-US" sz="2000" dirty="0"/>
-              <a:t>마법</a:t>
-            </a:r>
-            <a:r>
-              <a:rPr lang="en-US" altLang="ko-KR" sz="2000" dirty="0"/>
-              <a:t>/</a:t>
-            </a:r>
-            <a:r>
-              <a:rPr lang="ko-KR" altLang="en-US" sz="2000" dirty="0"/>
-              <a:t>덱 컨셉</a:t>
+              <a:t>마석 장착 시스템</a:t>
             </a:r>
             <a:endParaRPr lang="en-US" altLang="ko-KR" sz="2000" dirty="0"/>
           </a:p>
@@ -6793,7 +6787,7 @@
         <p:cNvPr id="1" name="">
           <a:extLst>
             <a:ext uri="{FF2B5EF4-FFF2-40B4-BE49-F238E27FC236}">
-              <a16:creationId xmlns:a16="http://schemas.microsoft.com/office/drawing/2014/main" id="{C531B589-DD34-DFFC-7FB4-6BC0E5E9679C}"/>
+              <a16:creationId xmlns:a16="http://schemas.microsoft.com/office/drawing/2014/main" id="{91B6AEC7-179A-BF59-B3C4-4F5B944D5F33}"/>
             </a:ext>
           </a:extLst>
         </p:cNvPr>
@@ -6813,7 +6807,7 @@
           <p:cNvPr id="2" name="제목 1">
             <a:extLst>
               <a:ext uri="{FF2B5EF4-FFF2-40B4-BE49-F238E27FC236}">
-                <a16:creationId xmlns:a16="http://schemas.microsoft.com/office/drawing/2014/main" id="{EFC5A634-FEC1-BEC1-6A0D-A8C9979877B2}"/>
+                <a16:creationId xmlns:a16="http://schemas.microsoft.com/office/drawing/2014/main" id="{67C9983E-703E-2870-2990-12042A46F418}"/>
               </a:ext>
             </a:extLst>
           </p:cNvPr>
@@ -6831,19 +6825,19 @@
           <a:p>
             <a:r>
               <a:rPr lang="en-US" altLang="ko-KR" dirty="0"/>
-              <a:t>5.4. </a:t>
+              <a:t>5.3. </a:t>
             </a:r>
             <a:r>
               <a:rPr lang="ko-KR" altLang="en-US" dirty="0"/>
-              <a:t>마법</a:t>
+              <a:t>속성 및 지형 변화</a:t>
             </a:r>
             <a:r>
               <a:rPr lang="en-US" altLang="ko-KR" dirty="0"/>
-              <a:t>/</a:t>
+              <a:t>, </a:t>
             </a:r>
             <a:r>
               <a:rPr lang="ko-KR" altLang="en-US" dirty="0"/>
-              <a:t>덱 컨셉</a:t>
+              <a:t>연쇄 반응</a:t>
             </a:r>
           </a:p>
         </p:txBody>
@@ -6853,7 +6847,7 @@
           <p:cNvPr id="3" name="내용 개체 틀 2">
             <a:extLst>
               <a:ext uri="{FF2B5EF4-FFF2-40B4-BE49-F238E27FC236}">
-                <a16:creationId xmlns:a16="http://schemas.microsoft.com/office/drawing/2014/main" id="{D7F21CF3-36B4-4EC3-9C65-E660CD83D5E7}"/>
+                <a16:creationId xmlns:a16="http://schemas.microsoft.com/office/drawing/2014/main" id="{9359B004-46A9-9A24-3E56-356FE8D979E3}"/>
               </a:ext>
             </a:extLst>
           </p:cNvPr>
@@ -6864,65 +6858,214 @@
             <p:ph idx="1"/>
           </p:nvPr>
         </p:nvSpPr>
-        <p:spPr>
-          <a:xfrm>
-            <a:off x="838200" y="1825624"/>
-            <a:ext cx="10515600" cy="5032375"/>
-          </a:xfrm>
-        </p:spPr>
+        <p:spPr/>
         <p:txBody>
           <a:bodyPr>
             <a:normAutofit/>
           </a:bodyPr>
           <a:lstStyle/>
           <a:p>
+            <a:pPr marL="0" indent="0">
+              <a:lnSpc>
+                <a:spcPct val="150000"/>
+              </a:lnSpc>
+              <a:buNone/>
+            </a:pPr>
+            <a:r>
+              <a:rPr lang="en-US" altLang="ko-KR" sz="2000" b="1" dirty="0">
+                <a:latin typeface="+mn-ea"/>
+              </a:rPr>
+              <a:t>&lt;</a:t>
+            </a:r>
+            <a:r>
+              <a:rPr lang="ko-KR" altLang="en-US" sz="2000" b="1" dirty="0">
+                <a:latin typeface="+mn-ea"/>
+              </a:rPr>
+              <a:t>지형 속성 연쇄 반응</a:t>
+            </a:r>
+            <a:r>
+              <a:rPr lang="en-US" altLang="ko-KR" sz="2000" b="1" dirty="0">
+                <a:latin typeface="+mn-ea"/>
+              </a:rPr>
+              <a:t>&gt;</a:t>
+            </a:r>
+          </a:p>
+          <a:p>
             <a:pPr>
               <a:lnSpc>
                 <a:spcPct val="150000"/>
               </a:lnSpc>
-            </a:pPr>
-            <a:r>
-              <a:rPr lang="ko-KR" altLang="en-US" sz="2000" dirty="0">
-                <a:latin typeface="+mn-ea"/>
-              </a:rPr>
-              <a:t>시작 덱</a:t>
-            </a:r>
-            <a:r>
-              <a:rPr lang="en-US" altLang="ko-KR" sz="2000" dirty="0">
+              <a:buFontTx/>
+              <a:buChar char="-"/>
+            </a:pPr>
+            <a:r>
+              <a:rPr lang="ko-KR" altLang="en-US" sz="1600" dirty="0">
+                <a:latin typeface="+mn-ea"/>
+              </a:rPr>
+              <a:t>불 </a:t>
+            </a:r>
+            <a:r>
+              <a:rPr lang="en-US" altLang="ko-KR" sz="1600" dirty="0">
+                <a:latin typeface="+mn-ea"/>
+              </a:rPr>
+              <a:t>+ </a:t>
+            </a:r>
+            <a:r>
+              <a:rPr lang="ko-KR" altLang="en-US" sz="1600" dirty="0">
+                <a:latin typeface="+mn-ea"/>
+              </a:rPr>
+              <a:t>물 </a:t>
+            </a:r>
+            <a:r>
+              <a:rPr lang="en-US" altLang="ko-KR" sz="1600" dirty="0">
                 <a:latin typeface="+mn-ea"/>
               </a:rPr>
               <a:t>: </a:t>
             </a:r>
             <a:r>
-              <a:rPr lang="ko-KR" altLang="en-US" sz="2000" dirty="0">
-                <a:latin typeface="+mn-ea"/>
-              </a:rPr>
-              <a:t>불</a:t>
-            </a:r>
-            <a:r>
-              <a:rPr lang="en-US" altLang="ko-KR" sz="2000" dirty="0">
-                <a:latin typeface="+mn-ea"/>
-              </a:rPr>
-              <a:t>/</a:t>
-            </a:r>
-            <a:r>
-              <a:rPr lang="ko-KR" altLang="en-US" sz="2000" dirty="0">
+              <a:rPr lang="ko-KR" altLang="en-US" sz="1600" dirty="0">
+                <a:latin typeface="+mn-ea"/>
+              </a:rPr>
+              <a:t>증발 타일로 변환</a:t>
+            </a:r>
+            <a:r>
+              <a:rPr lang="en-US" altLang="ko-KR" sz="1600" dirty="0">
+                <a:latin typeface="+mn-ea"/>
+              </a:rPr>
+              <a:t>	(</a:t>
+            </a:r>
+            <a:r>
+              <a:rPr lang="ko-KR" altLang="en-US" sz="1600" dirty="0">
+                <a:latin typeface="+mn-ea"/>
+              </a:rPr>
+              <a:t>증발</a:t>
+            </a:r>
+            <a:r>
+              <a:rPr lang="en-US" altLang="ko-KR" sz="1600" dirty="0">
+                <a:latin typeface="+mn-ea"/>
+              </a:rPr>
+              <a:t>: </a:t>
+            </a:r>
+            <a:r>
+              <a:rPr lang="ko-KR" altLang="en-US" sz="1600" dirty="0">
+                <a:latin typeface="+mn-ea"/>
+              </a:rPr>
+              <a:t>안개</a:t>
+            </a:r>
+            <a:r>
+              <a:rPr lang="en-US" altLang="ko-KR" sz="1600" dirty="0">
+                <a:latin typeface="+mn-ea"/>
+              </a:rPr>
+              <a:t>, </a:t>
+            </a:r>
+            <a:r>
+              <a:rPr lang="ko-KR" altLang="en-US" sz="1600" dirty="0">
+                <a:latin typeface="+mn-ea"/>
+              </a:rPr>
+              <a:t>이동 혼선 </a:t>
+            </a:r>
+            <a:r>
+              <a:rPr lang="en-US" altLang="ko-KR" sz="1600" dirty="0">
+                <a:latin typeface="+mn-ea"/>
+              </a:rPr>
+              <a:t>/ </a:t>
+            </a:r>
+            <a:r>
+              <a:rPr lang="ko-KR" altLang="en-US" sz="1600" dirty="0">
+                <a:latin typeface="+mn-ea"/>
+              </a:rPr>
+              <a:t>이후 화염</a:t>
+            </a:r>
+            <a:r>
+              <a:rPr lang="en-US" altLang="ko-KR" sz="1600" dirty="0">
+                <a:latin typeface="+mn-ea"/>
+              </a:rPr>
+              <a:t>, </a:t>
+            </a:r>
+            <a:r>
+              <a:rPr lang="ko-KR" altLang="en-US" sz="1600" dirty="0">
+                <a:latin typeface="+mn-ea"/>
+              </a:rPr>
+              <a:t>물 지형속성에 덮어씌워지거나 </a:t>
+            </a:r>
+            <a:r>
+              <a:rPr lang="en-US" altLang="ko-KR" sz="1600" dirty="0">
+                <a:latin typeface="+mn-ea"/>
+              </a:rPr>
+              <a:t>1</a:t>
+            </a:r>
+            <a:r>
+              <a:rPr lang="ko-KR" altLang="en-US" sz="1600" dirty="0">
+                <a:latin typeface="+mn-ea"/>
+              </a:rPr>
+              <a:t>턴 후 사라짐</a:t>
+            </a:r>
+            <a:r>
+              <a:rPr lang="en-US" altLang="ko-KR" sz="1600" dirty="0">
+                <a:latin typeface="+mn-ea"/>
+              </a:rPr>
+              <a:t>)</a:t>
+            </a:r>
+          </a:p>
+          <a:p>
+            <a:pPr>
+              <a:lnSpc>
+                <a:spcPct val="150000"/>
+              </a:lnSpc>
+              <a:buFontTx/>
+              <a:buChar char="-"/>
+            </a:pPr>
+            <a:r>
+              <a:rPr lang="ko-KR" altLang="en-US" sz="1600" dirty="0">
                 <a:latin typeface="+mn-ea"/>
               </a:rPr>
               <a:t>물</a:t>
             </a:r>
             <a:r>
-              <a:rPr lang="en-US" altLang="ko-KR" sz="2000" dirty="0">
-                <a:latin typeface="+mn-ea"/>
-              </a:rPr>
-              <a:t>/</a:t>
-            </a:r>
-            <a:r>
-              <a:rPr lang="ko-KR" altLang="en-US" sz="2000" dirty="0">
-                <a:latin typeface="+mn-ea"/>
-              </a:rPr>
-              <a:t>땅</a:t>
-            </a:r>
+              <a:rPr lang="en-US" altLang="ko-KR" sz="1600" dirty="0">
+                <a:latin typeface="+mn-ea"/>
+              </a:rPr>
+              <a:t> + </a:t>
+            </a:r>
+            <a:r>
+              <a:rPr lang="ko-KR" altLang="en-US" sz="1600" dirty="0">
+                <a:latin typeface="+mn-ea"/>
+              </a:rPr>
+              <a:t>번개</a:t>
+            </a:r>
+            <a:r>
+              <a:rPr lang="en-US" altLang="ko-KR" sz="1600" dirty="0">
+                <a:latin typeface="+mn-ea"/>
+              </a:rPr>
+              <a:t>: </a:t>
+            </a:r>
+            <a:r>
+              <a:rPr lang="ko-KR" altLang="en-US" sz="1600" dirty="0">
+                <a:latin typeface="+mn-ea"/>
+              </a:rPr>
+              <a:t>연쇄 감전 </a:t>
+            </a:r>
+            <a:r>
+              <a:rPr lang="en-US" altLang="ko-KR" sz="1600" dirty="0">
+                <a:latin typeface="+mn-ea"/>
+              </a:rPr>
+              <a:t>-&gt; </a:t>
+            </a:r>
+            <a:r>
+              <a:rPr lang="ko-KR" altLang="en-US" sz="1600" dirty="0">
+                <a:latin typeface="+mn-ea"/>
+              </a:rPr>
+              <a:t>연결된 물 타일에 해당 영역 모두 감전</a:t>
+            </a:r>
+          </a:p>
+          <a:p>
+            <a:pPr>
+              <a:lnSpc>
+                <a:spcPct val="150000"/>
+              </a:lnSpc>
+              <a:buFontTx/>
+              <a:buChar char="-"/>
+            </a:pPr>
             <a:endParaRPr lang="en-US" altLang="ko-KR" sz="1600" dirty="0">
               <a:latin typeface="+mn-ea"/>
             </a:endParaRPr>
@@ -6932,7 +7075,7 @@
     </p:spTree>
     <p:extLst>
       <p:ext uri="{BB962C8B-B14F-4D97-AF65-F5344CB8AC3E}">
-        <p14:creationId xmlns:p14="http://schemas.microsoft.com/office/powerpoint/2010/main" val="4066843575"/>
+        <p14:creationId xmlns:p14="http://schemas.microsoft.com/office/powerpoint/2010/main" val="2802738405"/>
       </p:ext>
     </p:extLst>
   </p:cSld>
@@ -7426,15 +7569,7 @@
             </a:pPr>
             <a:r>
               <a:rPr lang="ko-KR" altLang="en-US" sz="1600" dirty="0"/>
-              <a:t>마법</a:t>
-            </a:r>
-            <a:r>
-              <a:rPr lang="en-US" altLang="ko-KR" sz="1600" dirty="0"/>
-              <a:t>/</a:t>
-            </a:r>
-            <a:r>
-              <a:rPr lang="ko-KR" altLang="en-US" sz="1600" dirty="0"/>
-              <a:t>덱 컨셉</a:t>
+              <a:t>마석 장착 시스템</a:t>
             </a:r>
             <a:endParaRPr lang="en-US" altLang="ko-KR" sz="1600" dirty="0"/>
           </a:p>
@@ -7444,6 +7579,355 @@
     <p:extLst>
       <p:ext uri="{BB962C8B-B14F-4D97-AF65-F5344CB8AC3E}">
         <p14:creationId xmlns:p14="http://schemas.microsoft.com/office/powerpoint/2010/main" val="3758008093"/>
+      </p:ext>
+    </p:extLst>
+  </p:cSld>
+  <p:clrMapOvr>
+    <a:masterClrMapping/>
+  </p:clrMapOvr>
+</p:sld>
+</file>
+
+<file path=ppt/slides/slide20.xml><?xml version="1.0" encoding="utf-8"?>
+<p:sld xmlns:a="http://schemas.openxmlformats.org/drawingml/2006/main" xmlns:r="http://schemas.openxmlformats.org/officeDocument/2006/relationships" xmlns:p="http://schemas.openxmlformats.org/presentationml/2006/main">
+  <p:cSld>
+    <p:spTree>
+      <p:nvGrpSpPr>
+        <p:cNvPr id="1" name="">
+          <a:extLst>
+            <a:ext uri="{FF2B5EF4-FFF2-40B4-BE49-F238E27FC236}">
+              <a16:creationId xmlns:a16="http://schemas.microsoft.com/office/drawing/2014/main" id="{C531B589-DD34-DFFC-7FB4-6BC0E5E9679C}"/>
+            </a:ext>
+          </a:extLst>
+        </p:cNvPr>
+        <p:cNvGrpSpPr/>
+        <p:nvPr/>
+      </p:nvGrpSpPr>
+      <p:grpSpPr>
+        <a:xfrm>
+          <a:off x="0" y="0"/>
+          <a:ext cx="0" cy="0"/>
+          <a:chOff x="0" y="0"/>
+          <a:chExt cx="0" cy="0"/>
+        </a:xfrm>
+      </p:grpSpPr>
+      <p:sp>
+        <p:nvSpPr>
+          <p:cNvPr id="2" name="제목 1">
+            <a:extLst>
+              <a:ext uri="{FF2B5EF4-FFF2-40B4-BE49-F238E27FC236}">
+                <a16:creationId xmlns:a16="http://schemas.microsoft.com/office/drawing/2014/main" id="{EFC5A634-FEC1-BEC1-6A0D-A8C9979877B2}"/>
+              </a:ext>
+            </a:extLst>
+          </p:cNvPr>
+          <p:cNvSpPr>
+            <a:spLocks noGrp="1"/>
+          </p:cNvSpPr>
+          <p:nvPr>
+            <p:ph type="title"/>
+          </p:nvPr>
+        </p:nvSpPr>
+        <p:spPr/>
+        <p:txBody>
+          <a:bodyPr/>
+          <a:lstStyle/>
+          <a:p>
+            <a:r>
+              <a:rPr lang="en-US" altLang="ko-KR" dirty="0"/>
+              <a:t>5.4. </a:t>
+            </a:r>
+            <a:r>
+              <a:rPr lang="ko-KR" altLang="en-US" dirty="0"/>
+              <a:t>마석 장착 시스템</a:t>
+            </a:r>
+          </a:p>
+        </p:txBody>
+      </p:sp>
+      <p:sp>
+        <p:nvSpPr>
+          <p:cNvPr id="3" name="내용 개체 틀 2">
+            <a:extLst>
+              <a:ext uri="{FF2B5EF4-FFF2-40B4-BE49-F238E27FC236}">
+                <a16:creationId xmlns:a16="http://schemas.microsoft.com/office/drawing/2014/main" id="{D7F21CF3-36B4-4EC3-9C65-E660CD83D5E7}"/>
+              </a:ext>
+            </a:extLst>
+          </p:cNvPr>
+          <p:cNvSpPr>
+            <a:spLocks noGrp="1"/>
+          </p:cNvSpPr>
+          <p:nvPr>
+            <p:ph idx="1"/>
+          </p:nvPr>
+        </p:nvSpPr>
+        <p:spPr>
+          <a:xfrm>
+            <a:off x="838200" y="1825624"/>
+            <a:ext cx="10515600" cy="5032375"/>
+          </a:xfrm>
+        </p:spPr>
+        <p:txBody>
+          <a:bodyPr>
+            <a:normAutofit/>
+          </a:bodyPr>
+          <a:lstStyle/>
+          <a:p>
+            <a:pPr>
+              <a:lnSpc>
+                <a:spcPct val="150000"/>
+              </a:lnSpc>
+            </a:pPr>
+            <a:r>
+              <a:rPr lang="ko-KR" altLang="en-US" sz="2000" dirty="0">
+                <a:latin typeface="+mn-ea"/>
+              </a:rPr>
+              <a:t>개념</a:t>
+            </a:r>
+            <a:r>
+              <a:rPr lang="en-US" altLang="ko-KR" sz="2000" dirty="0">
+                <a:latin typeface="+mn-ea"/>
+              </a:rPr>
+              <a:t>: </a:t>
+            </a:r>
+            <a:r>
+              <a:rPr lang="ko-KR" altLang="en-US" sz="2000" dirty="0">
+                <a:latin typeface="+mn-ea"/>
+              </a:rPr>
+              <a:t>각 마법 카드에 </a:t>
+            </a:r>
+            <a:r>
+              <a:rPr lang="en-US" altLang="ko-KR" sz="2000" dirty="0">
+                <a:latin typeface="+mn-ea"/>
+              </a:rPr>
+              <a:t>1~2</a:t>
+            </a:r>
+            <a:r>
+              <a:rPr lang="ko-KR" altLang="en-US" sz="2000" dirty="0">
+                <a:latin typeface="+mn-ea"/>
+              </a:rPr>
+              <a:t>개의 </a:t>
+            </a:r>
+            <a:r>
+              <a:rPr lang="en-US" altLang="ko-KR" sz="2000" dirty="0">
+                <a:latin typeface="+mn-ea"/>
+              </a:rPr>
+              <a:t>‘</a:t>
+            </a:r>
+            <a:r>
+              <a:rPr lang="ko-KR" altLang="en-US" sz="2000" dirty="0">
+                <a:latin typeface="+mn-ea"/>
+              </a:rPr>
+              <a:t>마석 소켓</a:t>
+            </a:r>
+            <a:r>
+              <a:rPr lang="en-US" altLang="ko-KR" sz="2000" dirty="0">
+                <a:latin typeface="+mn-ea"/>
+              </a:rPr>
+              <a:t>’</a:t>
+            </a:r>
+            <a:r>
+              <a:rPr lang="ko-KR" altLang="en-US" sz="2000" dirty="0">
+                <a:latin typeface="+mn-ea"/>
+              </a:rPr>
+              <a:t>이 존재하며</a:t>
+            </a:r>
+            <a:r>
+              <a:rPr lang="en-US" altLang="ko-KR" sz="2000" dirty="0">
+                <a:latin typeface="+mn-ea"/>
+              </a:rPr>
+              <a:t>, </a:t>
+            </a:r>
+            <a:r>
+              <a:rPr lang="ko-KR" altLang="en-US" sz="2000" dirty="0">
+                <a:latin typeface="+mn-ea"/>
+              </a:rPr>
+              <a:t>거점이나 상점 등에서 획득한 마석을 </a:t>
+            </a:r>
+            <a:r>
+              <a:rPr lang="ko-KR" altLang="en-US" sz="2000" dirty="0" err="1">
+                <a:latin typeface="+mn-ea"/>
+              </a:rPr>
+              <a:t>갈아끼우며</a:t>
+            </a:r>
+            <a:r>
+              <a:rPr lang="ko-KR" altLang="en-US" sz="2000" dirty="0">
+                <a:latin typeface="+mn-ea"/>
+              </a:rPr>
+              <a:t> 카드의 기능을 개조할 수 있다</a:t>
+            </a:r>
+            <a:r>
+              <a:rPr lang="en-US" altLang="ko-KR" sz="2000" dirty="0">
+                <a:latin typeface="+mn-ea"/>
+              </a:rPr>
+              <a:t>.</a:t>
+            </a:r>
+          </a:p>
+          <a:p>
+            <a:pPr>
+              <a:lnSpc>
+                <a:spcPct val="150000"/>
+              </a:lnSpc>
+            </a:pPr>
+            <a:r>
+              <a:rPr lang="ko-KR" altLang="en-US" sz="2000" dirty="0">
+                <a:latin typeface="+mn-ea"/>
+              </a:rPr>
+              <a:t>특징</a:t>
+            </a:r>
+            <a:r>
+              <a:rPr lang="en-US" altLang="ko-KR" sz="2000" dirty="0">
+                <a:latin typeface="+mn-ea"/>
+              </a:rPr>
+              <a:t>: </a:t>
+            </a:r>
+            <a:r>
+              <a:rPr lang="ko-KR" altLang="en-US" sz="2000" dirty="0">
+                <a:latin typeface="+mn-ea"/>
+              </a:rPr>
+              <a:t>제한된 슬롯 내에서 조합을 찾으므로 밸런스 제어가 쉬움</a:t>
+            </a:r>
+            <a:endParaRPr lang="en-US" altLang="ko-KR" sz="2000" dirty="0">
+              <a:latin typeface="+mn-ea"/>
+            </a:endParaRPr>
+          </a:p>
+          <a:p>
+            <a:pPr>
+              <a:lnSpc>
+                <a:spcPct val="150000"/>
+              </a:lnSpc>
+            </a:pPr>
+            <a:endParaRPr lang="en-US" altLang="ko-KR" sz="2000" dirty="0">
+              <a:latin typeface="+mn-ea"/>
+            </a:endParaRPr>
+          </a:p>
+          <a:p>
+            <a:pPr>
+              <a:lnSpc>
+                <a:spcPct val="150000"/>
+              </a:lnSpc>
+            </a:pPr>
+            <a:r>
+              <a:rPr lang="ko-KR" altLang="en-US" sz="2000" dirty="0">
+                <a:latin typeface="+mn-ea"/>
+              </a:rPr>
+              <a:t>예시</a:t>
+            </a:r>
+            <a:r>
+              <a:rPr lang="en-US" altLang="ko-KR" sz="2000" dirty="0">
+                <a:latin typeface="+mn-ea"/>
+              </a:rPr>
+              <a:t>: </a:t>
+            </a:r>
+            <a:r>
+              <a:rPr lang="ko-KR" altLang="en-US" sz="2000" dirty="0">
+                <a:latin typeface="+mn-ea"/>
+              </a:rPr>
+              <a:t>밀치기</a:t>
+            </a:r>
+            <a:r>
+              <a:rPr lang="en-US" altLang="ko-KR" sz="2000" dirty="0">
+                <a:latin typeface="+mn-ea"/>
+              </a:rPr>
+              <a:t>, </a:t>
+            </a:r>
+            <a:r>
+              <a:rPr lang="ko-KR" altLang="en-US" sz="2000" dirty="0">
+                <a:latin typeface="+mn-ea"/>
+              </a:rPr>
+              <a:t>이중 속성</a:t>
+            </a:r>
+            <a:r>
+              <a:rPr lang="en-US" altLang="ko-KR" sz="2000" dirty="0">
+                <a:latin typeface="+mn-ea"/>
+              </a:rPr>
+              <a:t>, </a:t>
+            </a:r>
+            <a:r>
+              <a:rPr lang="ko-KR" altLang="en-US" sz="2000" dirty="0">
+                <a:latin typeface="+mn-ea"/>
+              </a:rPr>
+              <a:t>지형 변화 유발</a:t>
+            </a:r>
+            <a:r>
+              <a:rPr lang="en-US" altLang="ko-KR" sz="2000" dirty="0">
+                <a:latin typeface="+mn-ea"/>
+              </a:rPr>
+              <a:t>, </a:t>
+            </a:r>
+            <a:r>
+              <a:rPr lang="ko-KR" altLang="en-US" sz="2000" dirty="0">
+                <a:latin typeface="+mn-ea"/>
+              </a:rPr>
+              <a:t>다중 시전</a:t>
+            </a:r>
+            <a:r>
+              <a:rPr lang="en-US" altLang="ko-KR" sz="2000" dirty="0">
+                <a:latin typeface="+mn-ea"/>
+              </a:rPr>
+              <a:t>, </a:t>
+            </a:r>
+            <a:r>
+              <a:rPr lang="ko-KR" altLang="en-US" sz="2000" dirty="0">
+                <a:latin typeface="+mn-ea"/>
+              </a:rPr>
+              <a:t>범위 확산</a:t>
+            </a:r>
+            <a:br>
+              <a:rPr lang="en-US" altLang="ko-KR" sz="2000" dirty="0">
+                <a:latin typeface="+mn-ea"/>
+              </a:rPr>
+            </a:br>
+            <a:r>
+              <a:rPr lang="ko-KR" altLang="en-US" sz="2000" dirty="0">
+                <a:latin typeface="+mn-ea"/>
+              </a:rPr>
+              <a:t>페널티</a:t>
+            </a:r>
+            <a:r>
+              <a:rPr lang="en-US" altLang="ko-KR" sz="2000" dirty="0">
+                <a:latin typeface="+mn-ea"/>
+              </a:rPr>
+              <a:t>: AP </a:t>
+            </a:r>
+            <a:r>
+              <a:rPr lang="ko-KR" altLang="en-US" sz="2000" dirty="0">
+                <a:latin typeface="+mn-ea"/>
+              </a:rPr>
+              <a:t>소모 증가</a:t>
+            </a:r>
+            <a:r>
+              <a:rPr lang="en-US" altLang="ko-KR" sz="2000" dirty="0">
+                <a:latin typeface="+mn-ea"/>
+              </a:rPr>
+              <a:t>, </a:t>
+            </a:r>
+            <a:r>
+              <a:rPr lang="ko-KR" altLang="en-US" sz="2000" dirty="0">
+                <a:latin typeface="+mn-ea"/>
+              </a:rPr>
+              <a:t>체력 소모 추가</a:t>
+            </a:r>
+            <a:r>
+              <a:rPr lang="en-US" altLang="ko-KR" sz="2000" dirty="0">
+                <a:latin typeface="+mn-ea"/>
+              </a:rPr>
+              <a:t>, </a:t>
+            </a:r>
+            <a:r>
+              <a:rPr lang="ko-KR" altLang="en-US" sz="2000" dirty="0">
+                <a:latin typeface="+mn-ea"/>
+              </a:rPr>
+              <a:t>일시적 디버프 등</a:t>
+            </a:r>
+            <a:endParaRPr lang="en-US" altLang="ko-KR" sz="2000" dirty="0">
+              <a:latin typeface="+mn-ea"/>
+            </a:endParaRPr>
+          </a:p>
+        </p:txBody>
+      </p:sp>
+    </p:spTree>
+    <p:extLst>
+      <p:ext uri="{BB962C8B-B14F-4D97-AF65-F5344CB8AC3E}">
+        <p14:creationId xmlns:p14="http://schemas.microsoft.com/office/powerpoint/2010/main" val="4066843575"/>
       </p:ext>
     </p:extLst>
   </p:cSld>
@@ -7834,12 +8318,13 @@
           <a:bodyPr/>
           <a:lstStyle/>
           <a:p>
-            <a:r>
-              <a:rPr lang="en-US" altLang="ko-KR" dirty="0"/>
+            <a:pPr algn="ctr"/>
+            <a:r>
+              <a:rPr lang="en-US" altLang="ko-KR" b="1" dirty="0"/>
               <a:t>3. </a:t>
             </a:r>
             <a:r>
-              <a:rPr lang="ko-KR" altLang="en-US" dirty="0"/>
+              <a:rPr lang="ko-KR" altLang="en-US" b="1" dirty="0"/>
               <a:t>세계관</a:t>
             </a:r>
           </a:p>
@@ -7863,12 +8348,12 @@
         </p:nvSpPr>
         <p:spPr/>
         <p:txBody>
-          <a:bodyPr>
+          <a:bodyPr anchor="ctr" anchorCtr="0">
             <a:normAutofit/>
           </a:bodyPr>
           <a:lstStyle/>
           <a:p>
-            <a:pPr>
+            <a:pPr algn="ctr">
               <a:lnSpc>
                 <a:spcPct val="100000"/>
               </a:lnSpc>
@@ -7884,15 +8369,7 @@
             <a:endParaRPr lang="en-US" altLang="ko-KR" sz="2000" dirty="0"/>
           </a:p>
           <a:p>
-            <a:pPr>
-              <a:lnSpc>
-                <a:spcPct val="100000"/>
-              </a:lnSpc>
-            </a:pPr>
-            <a:endParaRPr lang="en-US" altLang="ko-KR" sz="2000" dirty="0"/>
-          </a:p>
-          <a:p>
-            <a:pPr>
+            <a:pPr algn="ctr">
               <a:lnSpc>
                 <a:spcPct val="100000"/>
               </a:lnSpc>
@@ -7908,15 +8385,7 @@
             <a:endParaRPr lang="en-US" altLang="ko-KR" sz="2000" dirty="0"/>
           </a:p>
           <a:p>
-            <a:pPr>
-              <a:lnSpc>
-                <a:spcPct val="100000"/>
-              </a:lnSpc>
-            </a:pPr>
-            <a:endParaRPr lang="en-US" altLang="ko-KR" sz="2000" dirty="0"/>
-          </a:p>
-          <a:p>
-            <a:pPr>
+            <a:pPr algn="ctr">
               <a:lnSpc>
                 <a:spcPct val="100000"/>
               </a:lnSpc>
@@ -8763,12 +9232,13 @@
           <a:bodyPr/>
           <a:lstStyle/>
           <a:p>
-            <a:r>
-              <a:rPr lang="en-US" altLang="ko-KR" dirty="0"/>
+            <a:pPr algn="ctr"/>
+            <a:r>
+              <a:rPr lang="en-US" altLang="ko-KR" b="1" dirty="0"/>
               <a:t>4. </a:t>
             </a:r>
             <a:r>
-              <a:rPr lang="ko-KR" altLang="en-US" dirty="0"/>
+              <a:rPr lang="ko-KR" altLang="en-US" b="1" dirty="0"/>
               <a:t>구조 및 형태</a:t>
             </a:r>
           </a:p>
@@ -8792,12 +9262,12 @@
         </p:nvSpPr>
         <p:spPr/>
         <p:txBody>
-          <a:bodyPr>
+          <a:bodyPr anchor="ctr" anchorCtr="0">
             <a:normAutofit/>
           </a:bodyPr>
           <a:lstStyle/>
           <a:p>
-            <a:pPr>
+            <a:pPr algn="ctr">
               <a:lnSpc>
                 <a:spcPct val="100000"/>
               </a:lnSpc>
@@ -8808,15 +9278,7 @@
             </a:r>
           </a:p>
           <a:p>
-            <a:pPr>
-              <a:lnSpc>
-                <a:spcPct val="100000"/>
-              </a:lnSpc>
-            </a:pPr>
-            <a:endParaRPr lang="en-US" altLang="ko-KR" sz="2000" dirty="0"/>
-          </a:p>
-          <a:p>
-            <a:pPr>
+            <a:pPr algn="ctr">
               <a:lnSpc>
                 <a:spcPct val="100000"/>
               </a:lnSpc>
@@ -8827,15 +9289,7 @@
             </a:r>
           </a:p>
           <a:p>
-            <a:pPr>
-              <a:lnSpc>
-                <a:spcPct val="100000"/>
-              </a:lnSpc>
-            </a:pPr>
-            <a:endParaRPr lang="en-US" altLang="ko-KR" sz="2000" dirty="0"/>
-          </a:p>
-          <a:p>
-            <a:pPr>
+            <a:pPr algn="ctr">
               <a:lnSpc>
                 <a:spcPct val="100000"/>
               </a:lnSpc>
